--- a/submission/Rhythm-Pitch.pptx
+++ b/submission/Rhythm-Pitch.pptx
@@ -2,21 +2,125 @@
 <file path=ppt/presentation.xml><?xml version="1.0" encoding="utf-8"?>
 <p:presentation xmlns:p="http://schemas.openxmlformats.org/presentationml/2006/main">
   <p:sldMasterIdLst>
-    <p:sldMasterId xmlns:r="http://schemas.openxmlformats.org/officeDocument/2006/relationships" id="2147483648" r:id="Rd6084721a5264e57"/>
+    <p:sldMasterId xmlns:r="http://schemas.openxmlformats.org/officeDocument/2006/relationships" id="2147483648" r:id="R110d18ed53a2486a"/>
   </p:sldMasterIdLst>
   <p:notesMasterIdLst>
-    <p:notesMasterId xmlns:r="http://schemas.openxmlformats.org/officeDocument/2006/relationships" r:id="R0e01c2cd7b1d4d39"/>
+    <p:notesMasterId xmlns:r="http://schemas.openxmlformats.org/officeDocument/2006/relationships" r:id="R0c022deae39d458c"/>
   </p:notesMasterIdLst>
   <p:sldIdLst>
-    <p:sldId xmlns:r="http://schemas.openxmlformats.org/officeDocument/2006/relationships" id="256" r:id="R052abb1f297a4645"/>
-    <p:sldId xmlns:r="http://schemas.openxmlformats.org/officeDocument/2006/relationships" id="257" r:id="R8d9930a401534e34"/>
-    <p:sldId xmlns:r="http://schemas.openxmlformats.org/officeDocument/2006/relationships" id="258" r:id="Ra6e500e7a6794cba"/>
-    <p:sldId xmlns:r="http://schemas.openxmlformats.org/officeDocument/2006/relationships" id="259" r:id="R12c944d793854fe3"/>
-    <p:sldId xmlns:r="http://schemas.openxmlformats.org/officeDocument/2006/relationships" id="260" r:id="R98ecc06399594e29"/>
-    <p:sldId xmlns:r="http://schemas.openxmlformats.org/officeDocument/2006/relationships" id="261" r:id="R802ee591ebd94087"/>
+    <p:sldId xmlns:r="http://schemas.openxmlformats.org/officeDocument/2006/relationships" id="256" r:id="Rd8755d85c0d346e3"/>
+    <p:sldId xmlns:r="http://schemas.openxmlformats.org/officeDocument/2006/relationships" id="257" r:id="Rbdd4fbb6ab01445f"/>
+    <p:sldId xmlns:r="http://schemas.openxmlformats.org/officeDocument/2006/relationships" id="258" r:id="Ree381bd3eed34a27"/>
+    <p:sldId xmlns:r="http://schemas.openxmlformats.org/officeDocument/2006/relationships" id="259" r:id="R15c8dea1b05d40eb"/>
+    <p:sldId xmlns:r="http://schemas.openxmlformats.org/officeDocument/2006/relationships" id="260" r:id="R125747fb266c4f1c"/>
+    <p:sldId xmlns:r="http://schemas.openxmlformats.org/officeDocument/2006/relationships" id="261" r:id="R0a461cef044c4805"/>
   </p:sldIdLst>
   <p:sldSz cx="12192000" cy="6858000"/>
   <p:notesSz cx="6858000" cy="9144000"/>
+  <p:defaultTextStyle>
+    <a:defPPr xmlns:a="http://schemas.openxmlformats.org/drawingml/2006/main">
+      <a:buNone/>
+    </a:defPPr>
+    <a:lvl1pPr xmlns:a="http://schemas.openxmlformats.org/drawingml/2006/main" marL="0" algn="l" defTabSz="914400">
+      <a:buNone/>
+      <a:defRPr sz="1800" kern="1200">
+        <a:solidFill>
+          <a:schemeClr val="tx1"/>
+        </a:solidFill>
+        <a:latin typeface="+mn-lt"/>
+        <a:ea typeface="+mn-lt"/>
+        <a:cs typeface="+mn-lt"/>
+      </a:defRPr>
+    </a:lvl1pPr>
+    <a:lvl2pPr xmlns:a="http://schemas.openxmlformats.org/drawingml/2006/main" marL="457200" algn="l" defTabSz="914400">
+      <a:buNone/>
+      <a:defRPr sz="1800" kern="1200">
+        <a:solidFill>
+          <a:schemeClr val="tx1"/>
+        </a:solidFill>
+        <a:latin typeface="+mn-lt"/>
+        <a:ea typeface="+mn-lt"/>
+        <a:cs typeface="+mn-lt"/>
+      </a:defRPr>
+    </a:lvl2pPr>
+    <a:lvl3pPr xmlns:a="http://schemas.openxmlformats.org/drawingml/2006/main" marL="914400" algn="l" defTabSz="914400">
+      <a:buNone/>
+      <a:defRPr sz="1800" kern="1200">
+        <a:solidFill>
+          <a:schemeClr val="tx1"/>
+        </a:solidFill>
+        <a:latin typeface="+mn-lt"/>
+        <a:ea typeface="+mn-lt"/>
+        <a:cs typeface="+mn-lt"/>
+      </a:defRPr>
+    </a:lvl3pPr>
+    <a:lvl4pPr xmlns:a="http://schemas.openxmlformats.org/drawingml/2006/main" marL="1371600" algn="l" defTabSz="914400">
+      <a:buNone/>
+      <a:defRPr sz="1800" kern="1200">
+        <a:solidFill>
+          <a:schemeClr val="tx1"/>
+        </a:solidFill>
+        <a:latin typeface="+mn-lt"/>
+        <a:ea typeface="+mn-lt"/>
+        <a:cs typeface="+mn-lt"/>
+      </a:defRPr>
+    </a:lvl4pPr>
+    <a:lvl5pPr xmlns:a="http://schemas.openxmlformats.org/drawingml/2006/main" marL="1828800" algn="l" defTabSz="914400">
+      <a:buNone/>
+      <a:defRPr sz="1800" kern="1200">
+        <a:solidFill>
+          <a:schemeClr val="tx1"/>
+        </a:solidFill>
+        <a:latin typeface="+mn-lt"/>
+        <a:ea typeface="+mn-lt"/>
+        <a:cs typeface="+mn-lt"/>
+      </a:defRPr>
+    </a:lvl5pPr>
+    <a:lvl6pPr xmlns:a="http://schemas.openxmlformats.org/drawingml/2006/main" marL="2286000" algn="l" defTabSz="914400">
+      <a:buNone/>
+      <a:defRPr sz="1800" kern="1200">
+        <a:solidFill>
+          <a:schemeClr val="tx1"/>
+        </a:solidFill>
+        <a:latin typeface="+mn-lt"/>
+        <a:ea typeface="+mn-lt"/>
+        <a:cs typeface="+mn-lt"/>
+      </a:defRPr>
+    </a:lvl6pPr>
+    <a:lvl7pPr xmlns:a="http://schemas.openxmlformats.org/drawingml/2006/main" marL="2743200" algn="l" defTabSz="914400">
+      <a:buNone/>
+      <a:defRPr sz="1800" kern="1200">
+        <a:solidFill>
+          <a:schemeClr val="tx1"/>
+        </a:solidFill>
+        <a:latin typeface="+mn-lt"/>
+        <a:ea typeface="+mn-lt"/>
+        <a:cs typeface="+mn-lt"/>
+      </a:defRPr>
+    </a:lvl7pPr>
+    <a:lvl8pPr xmlns:a="http://schemas.openxmlformats.org/drawingml/2006/main" marL="3200400" algn="l" defTabSz="914400">
+      <a:buNone/>
+      <a:defRPr sz="1800" kern="1200">
+        <a:solidFill>
+          <a:schemeClr val="tx1"/>
+        </a:solidFill>
+        <a:latin typeface="+mn-lt"/>
+        <a:ea typeface="+mn-lt"/>
+        <a:cs typeface="+mn-lt"/>
+      </a:defRPr>
+    </a:lvl8pPr>
+    <a:lvl9pPr xmlns:a="http://schemas.openxmlformats.org/drawingml/2006/main" marL="3657600" algn="l" defTabSz="914400">
+      <a:buNone/>
+      <a:defRPr sz="1800" kern="1200">
+        <a:solidFill>
+          <a:schemeClr val="tx1"/>
+        </a:solidFill>
+        <a:latin typeface="+mn-lt"/>
+        <a:ea typeface="+mn-lt"/>
+        <a:cs typeface="+mn-lt"/>
+      </a:defRPr>
+    </a:lvl9pPr>
+  </p:defaultTextStyle>
 </p:presentation>
 </file>
 
@@ -587,7 +691,7 @@
           <a:lstStyle xmlns:a="http://schemas.openxmlformats.org/drawingml/2006/main"/>
           <a:p xmlns:a="http://schemas.openxmlformats.org/drawingml/2006/main">
             <a:r>
-              <a:t>CSV processing is performed on the client. No uploaded file is stored by the app. The optional draft request contains item name and timing evidence, not customer identifiers or contact details. A local LM Studio endpoint is used in the current configuration.</a:t>
+              <a:t>The app processes uploaded CSV files in the browser. Its deterministic rule creates the shopper review signal; Gemma through the configured OpenAI-compatible endpoint can draft follow-up wording. Drafts are checked and remain for merchant review. Customer IDs and contact details are not sent to the model, and Rhythm does not send messages.</a:t>
             </a:r>
           </a:p>
         </p:txBody>
@@ -727,7 +831,7 @@
           <a:lstStyle xmlns:a="http://schemas.openxmlformats.org/drawingml/2006/main"/>
           <a:p xmlns:a="http://schemas.openxmlformats.org/drawingml/2006/main">
             <a:r>
-              <a:t>Source: Chen, Daqing. Online Retail, UCI Machine Learning Repository (2015), DOI 10.24432/C5BW33, https://archive.ics.uci.edu/dataset/352/online%2Bretail. The bundled extract retains UK transaction records with positive quantity and price, customer IDs, and non-cancellation invoices; it keeps the 250 customers with most distinct purchase days. Original customer IDs are replaced with salted stable pseudonyms; item labels and transaction values/dates remain from the source. The data is historical and is not current merchant data.</a:t>
+              <a:t>The bundled sample contains 297,626 transaction rows for 2,000 pseudonymized UK customers, selected from the Online Retail dataset published by the UCI Machine Learning Repository. The extract keeps records with customer IDs, positive quantity and price, and non-cancellation invoices. Original customer IDs are replaced with salted stable pseudonyms; product labels, transaction values and dates are from the source. The data covers 2010–2011 and is historical, not live merchant activity. Source: Chen, Daqing. Online Retail, UCI Machine Learning Repository (2015), DOI 10.24432/C5BW33, https://archive.ics.uci.edu/dataset/352/online%2Bretail. Licensed CC BY 4.0.</a:t>
             </a:r>
           </a:p>
         </p:txBody>
@@ -797,7 +901,7 @@
           <a:lstStyle xmlns:a="http://schemas.openxmlformats.org/drawingml/2006/main"/>
           <a:p xmlns:a="http://schemas.openxmlformats.org/drawingml/2006/main">
             <a:r>
-              <a:t>The hackathon brief asks for AMD hardware or infrastructure to make a meaningful contribution. This prototype is configured for local Gemma through LM Studio, and the developer has an AMD Radeon RX 9070 XT. The GPU has not been confirmed to perform model inference. Before submission, verify LM Studio uses Radeon acceleration and show evidence in the demo video. If the run uses CPU only, do not claim AMD GPU acceleration. Hackathon: https://lablab.ai/ai-hackathons/amd-developer-hackathon-act-iii</a:t>
+              <a:t>The item watchlist groups overdue shoppers by the repeated item in their history. It ranks items by flagged shopper count and shows the median usual repeat interval and median days past the personal threshold; the review action filters matching shoppers. These figures describe historical transactions, not campaign outcomes. Optional drafts use Gemma through LM Studio or another configured OpenAI-compatible endpoint; only item names and timing evidence are sent. GPU offload on the AMD Radeon RX 9070 XT has not been verified. Hackathon: https://lablab.ai/ai-hackathons/amd-developer-hackathon-act-iii</a:t>
             </a:r>
           </a:p>
         </p:txBody>
@@ -884,7 +988,7 @@
                 <a:cs typeface="+mj-lt"/>
               </a:defRPr>
             </a:defPPr>
-            <a:lvl1pPr marL="0" indent="0">
+            <a:lvl1pPr marL="0" indent="0" algn="ctr">
               <a:lnSpc>
                 <a:spcPct val="110000"/>
               </a:lnSpc>
@@ -895,8 +999,16 @@
                 <a:spcPts val="0"/>
               </a:spcAft>
               <a:buNone/>
+              <a:defRPr sz="4800" b="1">
+                <a:solidFill>
+                  <a:schemeClr val="tx1"/>
+                </a:solidFill>
+                <a:latin typeface="+mj-lt"/>
+                <a:ea typeface="+mj-lt"/>
+                <a:cs typeface="+mj-lt"/>
+              </a:defRPr>
             </a:lvl1pPr>
-            <a:lvl2pPr marL="0" indent="0">
+            <a:lvl2pPr marL="0" indent="0" algn="ctr">
               <a:lnSpc>
                 <a:spcPct val="110000"/>
               </a:lnSpc>
@@ -907,8 +1019,16 @@
                 <a:spcPts val="0"/>
               </a:spcAft>
               <a:buNone/>
+              <a:defRPr sz="4800" b="1">
+                <a:solidFill>
+                  <a:schemeClr val="tx1"/>
+                </a:solidFill>
+                <a:latin typeface="+mj-lt"/>
+                <a:ea typeface="+mj-lt"/>
+                <a:cs typeface="+mj-lt"/>
+              </a:defRPr>
             </a:lvl2pPr>
-            <a:lvl3pPr marL="0" indent="0">
+            <a:lvl3pPr marL="0" indent="0" algn="ctr">
               <a:lnSpc>
                 <a:spcPct val="110000"/>
               </a:lnSpc>
@@ -919,8 +1039,16 @@
                 <a:spcPts val="0"/>
               </a:spcAft>
               <a:buNone/>
+              <a:defRPr sz="4800" b="1">
+                <a:solidFill>
+                  <a:schemeClr val="tx1"/>
+                </a:solidFill>
+                <a:latin typeface="+mj-lt"/>
+                <a:ea typeface="+mj-lt"/>
+                <a:cs typeface="+mj-lt"/>
+              </a:defRPr>
             </a:lvl3pPr>
-            <a:lvl4pPr marL="0" indent="0">
+            <a:lvl4pPr marL="0" indent="0" algn="ctr">
               <a:lnSpc>
                 <a:spcPct val="110000"/>
               </a:lnSpc>
@@ -931,8 +1059,16 @@
                 <a:spcPts val="0"/>
               </a:spcAft>
               <a:buNone/>
+              <a:defRPr sz="4800" b="1">
+                <a:solidFill>
+                  <a:schemeClr val="tx1"/>
+                </a:solidFill>
+                <a:latin typeface="+mj-lt"/>
+                <a:ea typeface="+mj-lt"/>
+                <a:cs typeface="+mj-lt"/>
+              </a:defRPr>
             </a:lvl4pPr>
-            <a:lvl5pPr marL="0" indent="0">
+            <a:lvl5pPr marL="0" indent="0" algn="ctr">
               <a:lnSpc>
                 <a:spcPct val="110000"/>
               </a:lnSpc>
@@ -943,8 +1079,16 @@
                 <a:spcPts val="0"/>
               </a:spcAft>
               <a:buNone/>
+              <a:defRPr sz="4800" b="1">
+                <a:solidFill>
+                  <a:schemeClr val="tx1"/>
+                </a:solidFill>
+                <a:latin typeface="+mj-lt"/>
+                <a:ea typeface="+mj-lt"/>
+                <a:cs typeface="+mj-lt"/>
+              </a:defRPr>
             </a:lvl5pPr>
-            <a:lvl6pPr marL="0" indent="0">
+            <a:lvl6pPr marL="0" indent="0" algn="ctr">
               <a:lnSpc>
                 <a:spcPct val="110000"/>
               </a:lnSpc>
@@ -955,8 +1099,16 @@
                 <a:spcPts val="0"/>
               </a:spcAft>
               <a:buNone/>
+              <a:defRPr sz="4800" b="1">
+                <a:solidFill>
+                  <a:schemeClr val="tx1"/>
+                </a:solidFill>
+                <a:latin typeface="+mj-lt"/>
+                <a:ea typeface="+mj-lt"/>
+                <a:cs typeface="+mj-lt"/>
+              </a:defRPr>
             </a:lvl6pPr>
-            <a:lvl7pPr marL="0" indent="0">
+            <a:lvl7pPr marL="0" indent="0" algn="ctr">
               <a:lnSpc>
                 <a:spcPct val="110000"/>
               </a:lnSpc>
@@ -967,8 +1119,16 @@
                 <a:spcPts val="0"/>
               </a:spcAft>
               <a:buNone/>
+              <a:defRPr sz="4800" b="1">
+                <a:solidFill>
+                  <a:schemeClr val="tx1"/>
+                </a:solidFill>
+                <a:latin typeface="+mj-lt"/>
+                <a:ea typeface="+mj-lt"/>
+                <a:cs typeface="+mj-lt"/>
+              </a:defRPr>
             </a:lvl7pPr>
-            <a:lvl8pPr marL="0" indent="0">
+            <a:lvl8pPr marL="0" indent="0" algn="ctr">
               <a:lnSpc>
                 <a:spcPct val="110000"/>
               </a:lnSpc>
@@ -979,8 +1139,16 @@
                 <a:spcPts val="0"/>
               </a:spcAft>
               <a:buNone/>
+              <a:defRPr sz="4800" b="1">
+                <a:solidFill>
+                  <a:schemeClr val="tx1"/>
+                </a:solidFill>
+                <a:latin typeface="+mj-lt"/>
+                <a:ea typeface="+mj-lt"/>
+                <a:cs typeface="+mj-lt"/>
+              </a:defRPr>
             </a:lvl8pPr>
-            <a:lvl9pPr marL="0" indent="0">
+            <a:lvl9pPr marL="0" indent="0" algn="ctr">
               <a:lnSpc>
                 <a:spcPct val="110000"/>
               </a:lnSpc>
@@ -991,9 +1159,19 @@
                 <a:spcPts val="0"/>
               </a:spcAft>
               <a:buNone/>
+              <a:defRPr sz="4800" b="1">
+                <a:solidFill>
+                  <a:schemeClr val="tx1"/>
+                </a:solidFill>
+                <a:latin typeface="+mj-lt"/>
+                <a:ea typeface="+mj-lt"/>
+                <a:cs typeface="+mj-lt"/>
+              </a:defRPr>
             </a:lvl9pPr>
           </a:lstStyle>
-          <a:p xmlns:a="http://schemas.openxmlformats.org/drawingml/2006/main"/>
+          <a:p xmlns:a="http://schemas.openxmlformats.org/drawingml/2006/main">
+            <a:endParaRPr/>
+          </a:p>
         </p:txBody>
       </p:sp>
       <p:sp>
@@ -1041,7 +1219,7 @@
                 <a:cs typeface="+mn-lt"/>
               </a:defRPr>
             </a:defPPr>
-            <a:lvl1pPr marL="0" indent="0">
+            <a:lvl1pPr marL="0" indent="0" algn="ctr">
               <a:lnSpc>
                 <a:spcPct val="110000"/>
               </a:lnSpc>
@@ -1052,8 +1230,16 @@
                 <a:spcPts val="0"/>
               </a:spcAft>
               <a:buNone/>
+              <a:defRPr sz="2100" b="0">
+                <a:solidFill>
+                  <a:schemeClr val="tx1"/>
+                </a:solidFill>
+                <a:latin typeface="+mn-lt"/>
+                <a:ea typeface="+mn-lt"/>
+                <a:cs typeface="+mn-lt"/>
+              </a:defRPr>
             </a:lvl1pPr>
-            <a:lvl2pPr marL="0" indent="0">
+            <a:lvl2pPr marL="0" indent="0" algn="ctr">
               <a:lnSpc>
                 <a:spcPct val="110000"/>
               </a:lnSpc>
@@ -1064,8 +1250,16 @@
                 <a:spcPts val="0"/>
               </a:spcAft>
               <a:buNone/>
+              <a:defRPr sz="2100" b="0">
+                <a:solidFill>
+                  <a:schemeClr val="tx1"/>
+                </a:solidFill>
+                <a:latin typeface="+mn-lt"/>
+                <a:ea typeface="+mn-lt"/>
+                <a:cs typeface="+mn-lt"/>
+              </a:defRPr>
             </a:lvl2pPr>
-            <a:lvl3pPr marL="0" indent="0">
+            <a:lvl3pPr marL="0" indent="0" algn="ctr">
               <a:lnSpc>
                 <a:spcPct val="110000"/>
               </a:lnSpc>
@@ -1076,8 +1270,16 @@
                 <a:spcPts val="0"/>
               </a:spcAft>
               <a:buNone/>
+              <a:defRPr sz="2100" b="0">
+                <a:solidFill>
+                  <a:schemeClr val="tx1"/>
+                </a:solidFill>
+                <a:latin typeface="+mn-lt"/>
+                <a:ea typeface="+mn-lt"/>
+                <a:cs typeface="+mn-lt"/>
+              </a:defRPr>
             </a:lvl3pPr>
-            <a:lvl4pPr marL="0" indent="0">
+            <a:lvl4pPr marL="0" indent="0" algn="ctr">
               <a:lnSpc>
                 <a:spcPct val="110000"/>
               </a:lnSpc>
@@ -1088,8 +1290,16 @@
                 <a:spcPts val="0"/>
               </a:spcAft>
               <a:buNone/>
+              <a:defRPr sz="2100" b="0">
+                <a:solidFill>
+                  <a:schemeClr val="tx1"/>
+                </a:solidFill>
+                <a:latin typeface="+mn-lt"/>
+                <a:ea typeface="+mn-lt"/>
+                <a:cs typeface="+mn-lt"/>
+              </a:defRPr>
             </a:lvl4pPr>
-            <a:lvl5pPr marL="0" indent="0">
+            <a:lvl5pPr marL="0" indent="0" algn="ctr">
               <a:lnSpc>
                 <a:spcPct val="110000"/>
               </a:lnSpc>
@@ -1100,8 +1310,16 @@
                 <a:spcPts val="0"/>
               </a:spcAft>
               <a:buNone/>
+              <a:defRPr sz="2100" b="0">
+                <a:solidFill>
+                  <a:schemeClr val="tx1"/>
+                </a:solidFill>
+                <a:latin typeface="+mn-lt"/>
+                <a:ea typeface="+mn-lt"/>
+                <a:cs typeface="+mn-lt"/>
+              </a:defRPr>
             </a:lvl5pPr>
-            <a:lvl6pPr marL="0" indent="0">
+            <a:lvl6pPr marL="0" indent="0" algn="ctr">
               <a:lnSpc>
                 <a:spcPct val="110000"/>
               </a:lnSpc>
@@ -1112,8 +1330,16 @@
                 <a:spcPts val="0"/>
               </a:spcAft>
               <a:buNone/>
+              <a:defRPr sz="2100" b="0">
+                <a:solidFill>
+                  <a:schemeClr val="tx1"/>
+                </a:solidFill>
+                <a:latin typeface="+mn-lt"/>
+                <a:ea typeface="+mn-lt"/>
+                <a:cs typeface="+mn-lt"/>
+              </a:defRPr>
             </a:lvl6pPr>
-            <a:lvl7pPr marL="0" indent="0">
+            <a:lvl7pPr marL="0" indent="0" algn="ctr">
               <a:lnSpc>
                 <a:spcPct val="110000"/>
               </a:lnSpc>
@@ -1124,8 +1350,16 @@
                 <a:spcPts val="0"/>
               </a:spcAft>
               <a:buNone/>
+              <a:defRPr sz="2100" b="0">
+                <a:solidFill>
+                  <a:schemeClr val="tx1"/>
+                </a:solidFill>
+                <a:latin typeface="+mn-lt"/>
+                <a:ea typeface="+mn-lt"/>
+                <a:cs typeface="+mn-lt"/>
+              </a:defRPr>
             </a:lvl7pPr>
-            <a:lvl8pPr marL="0" indent="0">
+            <a:lvl8pPr marL="0" indent="0" algn="ctr">
               <a:lnSpc>
                 <a:spcPct val="110000"/>
               </a:lnSpc>
@@ -1136,8 +1370,16 @@
                 <a:spcPts val="0"/>
               </a:spcAft>
               <a:buNone/>
+              <a:defRPr sz="2100" b="0">
+                <a:solidFill>
+                  <a:schemeClr val="tx1"/>
+                </a:solidFill>
+                <a:latin typeface="+mn-lt"/>
+                <a:ea typeface="+mn-lt"/>
+                <a:cs typeface="+mn-lt"/>
+              </a:defRPr>
             </a:lvl8pPr>
-            <a:lvl9pPr marL="0" indent="0">
+            <a:lvl9pPr marL="0" indent="0" algn="ctr">
               <a:lnSpc>
                 <a:spcPct val="110000"/>
               </a:lnSpc>
@@ -1148,9 +1390,19 @@
                 <a:spcPts val="0"/>
               </a:spcAft>
               <a:buNone/>
+              <a:defRPr sz="2100" b="0">
+                <a:solidFill>
+                  <a:schemeClr val="tx1"/>
+                </a:solidFill>
+                <a:latin typeface="+mn-lt"/>
+                <a:ea typeface="+mn-lt"/>
+                <a:cs typeface="+mn-lt"/>
+              </a:defRPr>
             </a:lvl9pPr>
           </a:lstStyle>
-          <a:p xmlns:a="http://schemas.openxmlformats.org/drawingml/2006/main"/>
+          <a:p xmlns:a="http://schemas.openxmlformats.org/drawingml/2006/main">
+            <a:endParaRPr/>
+          </a:p>
         </p:txBody>
       </p:sp>
     </p:spTree>
@@ -1215,7 +1467,7 @@
                 <a:cs typeface="+mj-lt"/>
               </a:defRPr>
             </a:defPPr>
-            <a:lvl1pPr marL="0" indent="0">
+            <a:lvl1pPr marL="0" indent="0" algn="ctr">
               <a:lnSpc>
                 <a:spcPct val="110000"/>
               </a:lnSpc>
@@ -1226,8 +1478,16 @@
                 <a:spcPts val="0"/>
               </a:spcAft>
               <a:buNone/>
+              <a:defRPr sz="4200" b="1">
+                <a:solidFill>
+                  <a:schemeClr val="tx1"/>
+                </a:solidFill>
+                <a:latin typeface="+mj-lt"/>
+                <a:ea typeface="+mj-lt"/>
+                <a:cs typeface="+mj-lt"/>
+              </a:defRPr>
             </a:lvl1pPr>
-            <a:lvl2pPr marL="0" indent="0">
+            <a:lvl2pPr marL="0" indent="0" algn="ctr">
               <a:lnSpc>
                 <a:spcPct val="110000"/>
               </a:lnSpc>
@@ -1238,8 +1498,16 @@
                 <a:spcPts val="0"/>
               </a:spcAft>
               <a:buNone/>
+              <a:defRPr sz="4200" b="1">
+                <a:solidFill>
+                  <a:schemeClr val="tx1"/>
+                </a:solidFill>
+                <a:latin typeface="+mj-lt"/>
+                <a:ea typeface="+mj-lt"/>
+                <a:cs typeface="+mj-lt"/>
+              </a:defRPr>
             </a:lvl2pPr>
-            <a:lvl3pPr marL="0" indent="0">
+            <a:lvl3pPr marL="0" indent="0" algn="ctr">
               <a:lnSpc>
                 <a:spcPct val="110000"/>
               </a:lnSpc>
@@ -1250,8 +1518,16 @@
                 <a:spcPts val="0"/>
               </a:spcAft>
               <a:buNone/>
+              <a:defRPr sz="4200" b="1">
+                <a:solidFill>
+                  <a:schemeClr val="tx1"/>
+                </a:solidFill>
+                <a:latin typeface="+mj-lt"/>
+                <a:ea typeface="+mj-lt"/>
+                <a:cs typeface="+mj-lt"/>
+              </a:defRPr>
             </a:lvl3pPr>
-            <a:lvl4pPr marL="0" indent="0">
+            <a:lvl4pPr marL="0" indent="0" algn="ctr">
               <a:lnSpc>
                 <a:spcPct val="110000"/>
               </a:lnSpc>
@@ -1262,8 +1538,16 @@
                 <a:spcPts val="0"/>
               </a:spcAft>
               <a:buNone/>
+              <a:defRPr sz="4200" b="1">
+                <a:solidFill>
+                  <a:schemeClr val="tx1"/>
+                </a:solidFill>
+                <a:latin typeface="+mj-lt"/>
+                <a:ea typeface="+mj-lt"/>
+                <a:cs typeface="+mj-lt"/>
+              </a:defRPr>
             </a:lvl4pPr>
-            <a:lvl5pPr marL="0" indent="0">
+            <a:lvl5pPr marL="0" indent="0" algn="ctr">
               <a:lnSpc>
                 <a:spcPct val="110000"/>
               </a:lnSpc>
@@ -1274,8 +1558,16 @@
                 <a:spcPts val="0"/>
               </a:spcAft>
               <a:buNone/>
+              <a:defRPr sz="4200" b="1">
+                <a:solidFill>
+                  <a:schemeClr val="tx1"/>
+                </a:solidFill>
+                <a:latin typeface="+mj-lt"/>
+                <a:ea typeface="+mj-lt"/>
+                <a:cs typeface="+mj-lt"/>
+              </a:defRPr>
             </a:lvl5pPr>
-            <a:lvl6pPr marL="0" indent="0">
+            <a:lvl6pPr marL="0" indent="0" algn="ctr">
               <a:lnSpc>
                 <a:spcPct val="110000"/>
               </a:lnSpc>
@@ -1286,8 +1578,16 @@
                 <a:spcPts val="0"/>
               </a:spcAft>
               <a:buNone/>
+              <a:defRPr sz="4200" b="1">
+                <a:solidFill>
+                  <a:schemeClr val="tx1"/>
+                </a:solidFill>
+                <a:latin typeface="+mj-lt"/>
+                <a:ea typeface="+mj-lt"/>
+                <a:cs typeface="+mj-lt"/>
+              </a:defRPr>
             </a:lvl6pPr>
-            <a:lvl7pPr marL="0" indent="0">
+            <a:lvl7pPr marL="0" indent="0" algn="ctr">
               <a:lnSpc>
                 <a:spcPct val="110000"/>
               </a:lnSpc>
@@ -1298,8 +1598,16 @@
                 <a:spcPts val="0"/>
               </a:spcAft>
               <a:buNone/>
+              <a:defRPr sz="4200" b="1">
+                <a:solidFill>
+                  <a:schemeClr val="tx1"/>
+                </a:solidFill>
+                <a:latin typeface="+mj-lt"/>
+                <a:ea typeface="+mj-lt"/>
+                <a:cs typeface="+mj-lt"/>
+              </a:defRPr>
             </a:lvl7pPr>
-            <a:lvl8pPr marL="0" indent="0">
+            <a:lvl8pPr marL="0" indent="0" algn="ctr">
               <a:lnSpc>
                 <a:spcPct val="110000"/>
               </a:lnSpc>
@@ -1310,8 +1618,16 @@
                 <a:spcPts val="0"/>
               </a:spcAft>
               <a:buNone/>
+              <a:defRPr sz="4200" b="1">
+                <a:solidFill>
+                  <a:schemeClr val="tx1"/>
+                </a:solidFill>
+                <a:latin typeface="+mj-lt"/>
+                <a:ea typeface="+mj-lt"/>
+                <a:cs typeface="+mj-lt"/>
+              </a:defRPr>
             </a:lvl8pPr>
-            <a:lvl9pPr marL="0" indent="0">
+            <a:lvl9pPr marL="0" indent="0" algn="ctr">
               <a:lnSpc>
                 <a:spcPct val="110000"/>
               </a:lnSpc>
@@ -1322,9 +1638,19 @@
                 <a:spcPts val="0"/>
               </a:spcAft>
               <a:buNone/>
+              <a:defRPr sz="4200" b="1">
+                <a:solidFill>
+                  <a:schemeClr val="tx1"/>
+                </a:solidFill>
+                <a:latin typeface="+mj-lt"/>
+                <a:ea typeface="+mj-lt"/>
+                <a:cs typeface="+mj-lt"/>
+              </a:defRPr>
             </a:lvl9pPr>
           </a:lstStyle>
-          <a:p xmlns:a="http://schemas.openxmlformats.org/drawingml/2006/main"/>
+          <a:p xmlns:a="http://schemas.openxmlformats.org/drawingml/2006/main">
+            <a:endParaRPr/>
+          </a:p>
         </p:txBody>
       </p:sp>
     </p:spTree>
@@ -1389,7 +1715,7 @@
                 <a:cs typeface="+mj-lt"/>
               </a:defRPr>
             </a:defPPr>
-            <a:lvl1pPr marL="0" indent="0">
+            <a:lvl1pPr marL="0" indent="0" algn="l">
               <a:lnSpc>
                 <a:spcPct val="110000"/>
               </a:lnSpc>
@@ -1400,8 +1726,16 @@
                 <a:spcPts val="0"/>
               </a:spcAft>
               <a:buNone/>
+              <a:defRPr sz="3300" b="1">
+                <a:solidFill>
+                  <a:schemeClr val="tx1"/>
+                </a:solidFill>
+                <a:latin typeface="+mj-lt"/>
+                <a:ea typeface="+mj-lt"/>
+                <a:cs typeface="+mj-lt"/>
+              </a:defRPr>
             </a:lvl1pPr>
-            <a:lvl2pPr marL="0" indent="0">
+            <a:lvl2pPr marL="0" indent="0" algn="l">
               <a:lnSpc>
                 <a:spcPct val="110000"/>
               </a:lnSpc>
@@ -1412,8 +1746,16 @@
                 <a:spcPts val="0"/>
               </a:spcAft>
               <a:buNone/>
+              <a:defRPr sz="3300" b="1">
+                <a:solidFill>
+                  <a:schemeClr val="tx1"/>
+                </a:solidFill>
+                <a:latin typeface="+mj-lt"/>
+                <a:ea typeface="+mj-lt"/>
+                <a:cs typeface="+mj-lt"/>
+              </a:defRPr>
             </a:lvl2pPr>
-            <a:lvl3pPr marL="0" indent="0">
+            <a:lvl3pPr marL="0" indent="0" algn="l">
               <a:lnSpc>
                 <a:spcPct val="110000"/>
               </a:lnSpc>
@@ -1424,8 +1766,16 @@
                 <a:spcPts val="0"/>
               </a:spcAft>
               <a:buNone/>
+              <a:defRPr sz="3300" b="1">
+                <a:solidFill>
+                  <a:schemeClr val="tx1"/>
+                </a:solidFill>
+                <a:latin typeface="+mj-lt"/>
+                <a:ea typeface="+mj-lt"/>
+                <a:cs typeface="+mj-lt"/>
+              </a:defRPr>
             </a:lvl3pPr>
-            <a:lvl4pPr marL="0" indent="0">
+            <a:lvl4pPr marL="0" indent="0" algn="l">
               <a:lnSpc>
                 <a:spcPct val="110000"/>
               </a:lnSpc>
@@ -1436,8 +1786,16 @@
                 <a:spcPts val="0"/>
               </a:spcAft>
               <a:buNone/>
+              <a:defRPr sz="3300" b="1">
+                <a:solidFill>
+                  <a:schemeClr val="tx1"/>
+                </a:solidFill>
+                <a:latin typeface="+mj-lt"/>
+                <a:ea typeface="+mj-lt"/>
+                <a:cs typeface="+mj-lt"/>
+              </a:defRPr>
             </a:lvl4pPr>
-            <a:lvl5pPr marL="0" indent="0">
+            <a:lvl5pPr marL="0" indent="0" algn="l">
               <a:lnSpc>
                 <a:spcPct val="110000"/>
               </a:lnSpc>
@@ -1448,8 +1806,16 @@
                 <a:spcPts val="0"/>
               </a:spcAft>
               <a:buNone/>
+              <a:defRPr sz="3300" b="1">
+                <a:solidFill>
+                  <a:schemeClr val="tx1"/>
+                </a:solidFill>
+                <a:latin typeface="+mj-lt"/>
+                <a:ea typeface="+mj-lt"/>
+                <a:cs typeface="+mj-lt"/>
+              </a:defRPr>
             </a:lvl5pPr>
-            <a:lvl6pPr marL="0" indent="0">
+            <a:lvl6pPr marL="0" indent="0" algn="l">
               <a:lnSpc>
                 <a:spcPct val="110000"/>
               </a:lnSpc>
@@ -1460,8 +1826,16 @@
                 <a:spcPts val="0"/>
               </a:spcAft>
               <a:buNone/>
+              <a:defRPr sz="3300" b="1">
+                <a:solidFill>
+                  <a:schemeClr val="tx1"/>
+                </a:solidFill>
+                <a:latin typeface="+mj-lt"/>
+                <a:ea typeface="+mj-lt"/>
+                <a:cs typeface="+mj-lt"/>
+              </a:defRPr>
             </a:lvl6pPr>
-            <a:lvl7pPr marL="0" indent="0">
+            <a:lvl7pPr marL="0" indent="0" algn="l">
               <a:lnSpc>
                 <a:spcPct val="110000"/>
               </a:lnSpc>
@@ -1472,8 +1846,16 @@
                 <a:spcPts val="0"/>
               </a:spcAft>
               <a:buNone/>
+              <a:defRPr sz="3300" b="1">
+                <a:solidFill>
+                  <a:schemeClr val="tx1"/>
+                </a:solidFill>
+                <a:latin typeface="+mj-lt"/>
+                <a:ea typeface="+mj-lt"/>
+                <a:cs typeface="+mj-lt"/>
+              </a:defRPr>
             </a:lvl7pPr>
-            <a:lvl8pPr marL="0" indent="0">
+            <a:lvl8pPr marL="0" indent="0" algn="l">
               <a:lnSpc>
                 <a:spcPct val="110000"/>
               </a:lnSpc>
@@ -1484,8 +1866,16 @@
                 <a:spcPts val="0"/>
               </a:spcAft>
               <a:buNone/>
+              <a:defRPr sz="3300" b="1">
+                <a:solidFill>
+                  <a:schemeClr val="tx1"/>
+                </a:solidFill>
+                <a:latin typeface="+mj-lt"/>
+                <a:ea typeface="+mj-lt"/>
+                <a:cs typeface="+mj-lt"/>
+              </a:defRPr>
             </a:lvl8pPr>
-            <a:lvl9pPr marL="0" indent="0">
+            <a:lvl9pPr marL="0" indent="0" algn="l">
               <a:lnSpc>
                 <a:spcPct val="110000"/>
               </a:lnSpc>
@@ -1496,9 +1886,19 @@
                 <a:spcPts val="0"/>
               </a:spcAft>
               <a:buNone/>
+              <a:defRPr sz="3300" b="1">
+                <a:solidFill>
+                  <a:schemeClr val="tx1"/>
+                </a:solidFill>
+                <a:latin typeface="+mj-lt"/>
+                <a:ea typeface="+mj-lt"/>
+                <a:cs typeface="+mj-lt"/>
+              </a:defRPr>
             </a:lvl9pPr>
           </a:lstStyle>
-          <a:p xmlns:a="http://schemas.openxmlformats.org/drawingml/2006/main"/>
+          <a:p xmlns:a="http://schemas.openxmlformats.org/drawingml/2006/main">
+            <a:endParaRPr/>
+          </a:p>
         </p:txBody>
       </p:sp>
       <p:sp>
@@ -1546,7 +1946,7 @@
                 <a:cs typeface="+mn-lt"/>
               </a:defRPr>
             </a:defPPr>
-            <a:lvl1pPr marL="228600" indent="-228600">
+            <a:lvl1pPr marL="228600" indent="-228600" algn="l">
               <a:lnSpc>
                 <a:spcPct val="110000"/>
               </a:lnSpc>
@@ -1557,8 +1957,16 @@
                 <a:spcPts val="1200"/>
               </a:spcAft>
               <a:buChar char="•"/>
+              <a:defRPr sz="2250" b="0">
+                <a:solidFill>
+                  <a:schemeClr val="tx1"/>
+                </a:solidFill>
+                <a:latin typeface="+mn-lt"/>
+                <a:ea typeface="+mn-lt"/>
+                <a:cs typeface="+mn-lt"/>
+              </a:defRPr>
             </a:lvl1pPr>
-            <a:lvl2pPr marL="533400" indent="-228600">
+            <a:lvl2pPr marL="533400" indent="-228600" algn="l">
               <a:lnSpc>
                 <a:spcPct val="110000"/>
               </a:lnSpc>
@@ -1569,8 +1977,16 @@
                 <a:spcPts val="1200"/>
               </a:spcAft>
               <a:buChar char="•"/>
+              <a:defRPr sz="2250" b="0">
+                <a:solidFill>
+                  <a:schemeClr val="tx1"/>
+                </a:solidFill>
+                <a:latin typeface="+mn-lt"/>
+                <a:ea typeface="+mn-lt"/>
+                <a:cs typeface="+mn-lt"/>
+              </a:defRPr>
             </a:lvl2pPr>
-            <a:lvl3pPr marL="838200" indent="-228600">
+            <a:lvl3pPr marL="838200" indent="-228600" algn="l">
               <a:lnSpc>
                 <a:spcPct val="110000"/>
               </a:lnSpc>
@@ -1581,8 +1997,16 @@
                 <a:spcPts val="1200"/>
               </a:spcAft>
               <a:buChar char="•"/>
+              <a:defRPr sz="2250" b="0">
+                <a:solidFill>
+                  <a:schemeClr val="tx1"/>
+                </a:solidFill>
+                <a:latin typeface="+mn-lt"/>
+                <a:ea typeface="+mn-lt"/>
+                <a:cs typeface="+mn-lt"/>
+              </a:defRPr>
             </a:lvl3pPr>
-            <a:lvl4pPr marL="1143000" indent="-228600">
+            <a:lvl4pPr marL="1143000" indent="-228600" algn="l">
               <a:lnSpc>
                 <a:spcPct val="110000"/>
               </a:lnSpc>
@@ -1593,8 +2017,16 @@
                 <a:spcPts val="1200"/>
               </a:spcAft>
               <a:buChar char="•"/>
+              <a:defRPr sz="2250" b="0">
+                <a:solidFill>
+                  <a:schemeClr val="tx1"/>
+                </a:solidFill>
+                <a:latin typeface="+mn-lt"/>
+                <a:ea typeface="+mn-lt"/>
+                <a:cs typeface="+mn-lt"/>
+              </a:defRPr>
             </a:lvl4pPr>
-            <a:lvl5pPr marL="1447800" indent="-228600">
+            <a:lvl5pPr marL="1447800" indent="-228600" algn="l">
               <a:lnSpc>
                 <a:spcPct val="110000"/>
               </a:lnSpc>
@@ -1605,8 +2037,16 @@
                 <a:spcPts val="1200"/>
               </a:spcAft>
               <a:buChar char="•"/>
+              <a:defRPr sz="2250" b="0">
+                <a:solidFill>
+                  <a:schemeClr val="tx1"/>
+                </a:solidFill>
+                <a:latin typeface="+mn-lt"/>
+                <a:ea typeface="+mn-lt"/>
+                <a:cs typeface="+mn-lt"/>
+              </a:defRPr>
             </a:lvl5pPr>
-            <a:lvl6pPr marL="1752600" indent="-228600">
+            <a:lvl6pPr marL="1752600" indent="-228600" algn="l">
               <a:lnSpc>
                 <a:spcPct val="110000"/>
               </a:lnSpc>
@@ -1617,8 +2057,16 @@
                 <a:spcPts val="1200"/>
               </a:spcAft>
               <a:buChar char="•"/>
+              <a:defRPr sz="2250" b="0">
+                <a:solidFill>
+                  <a:schemeClr val="tx1"/>
+                </a:solidFill>
+                <a:latin typeface="+mn-lt"/>
+                <a:ea typeface="+mn-lt"/>
+                <a:cs typeface="+mn-lt"/>
+              </a:defRPr>
             </a:lvl6pPr>
-            <a:lvl7pPr marL="2057400" indent="-228600">
+            <a:lvl7pPr marL="2057400" indent="-228600" algn="l">
               <a:lnSpc>
                 <a:spcPct val="110000"/>
               </a:lnSpc>
@@ -1629,8 +2077,16 @@
                 <a:spcPts val="1200"/>
               </a:spcAft>
               <a:buChar char="•"/>
+              <a:defRPr sz="2250" b="0">
+                <a:solidFill>
+                  <a:schemeClr val="tx1"/>
+                </a:solidFill>
+                <a:latin typeface="+mn-lt"/>
+                <a:ea typeface="+mn-lt"/>
+                <a:cs typeface="+mn-lt"/>
+              </a:defRPr>
             </a:lvl7pPr>
-            <a:lvl8pPr marL="2362200" indent="-228600">
+            <a:lvl8pPr marL="2362200" indent="-228600" algn="l">
               <a:lnSpc>
                 <a:spcPct val="110000"/>
               </a:lnSpc>
@@ -1641,8 +2097,16 @@
                 <a:spcPts val="1200"/>
               </a:spcAft>
               <a:buChar char="•"/>
+              <a:defRPr sz="2250" b="0">
+                <a:solidFill>
+                  <a:schemeClr val="tx1"/>
+                </a:solidFill>
+                <a:latin typeface="+mn-lt"/>
+                <a:ea typeface="+mn-lt"/>
+                <a:cs typeface="+mn-lt"/>
+              </a:defRPr>
             </a:lvl8pPr>
-            <a:lvl9pPr marL="2667000" indent="-228600">
+            <a:lvl9pPr marL="2667000" indent="-228600" algn="l">
               <a:lnSpc>
                 <a:spcPct val="110000"/>
               </a:lnSpc>
@@ -1653,9 +2117,19 @@
                 <a:spcPts val="1200"/>
               </a:spcAft>
               <a:buChar char="•"/>
+              <a:defRPr sz="2250" b="0">
+                <a:solidFill>
+                  <a:schemeClr val="tx1"/>
+                </a:solidFill>
+                <a:latin typeface="+mn-lt"/>
+                <a:ea typeface="+mn-lt"/>
+                <a:cs typeface="+mn-lt"/>
+              </a:defRPr>
             </a:lvl9pPr>
           </a:lstStyle>
-          <a:p xmlns:a="http://schemas.openxmlformats.org/drawingml/2006/main"/>
+          <a:p xmlns:a="http://schemas.openxmlformats.org/drawingml/2006/main">
+            <a:endParaRPr/>
+          </a:p>
         </p:txBody>
       </p:sp>
     </p:spTree>
@@ -1720,7 +2194,7 @@
                 <a:cs typeface="+mj-lt"/>
               </a:defRPr>
             </a:defPPr>
-            <a:lvl1pPr marL="0" indent="0">
+            <a:lvl1pPr marL="0" indent="0" algn="l">
               <a:lnSpc>
                 <a:spcPct val="110000"/>
               </a:lnSpc>
@@ -1731,8 +2205,16 @@
                 <a:spcPts val="0"/>
               </a:spcAft>
               <a:buNone/>
+              <a:defRPr sz="3300" b="1">
+                <a:solidFill>
+                  <a:schemeClr val="tx1"/>
+                </a:solidFill>
+                <a:latin typeface="+mj-lt"/>
+                <a:ea typeface="+mj-lt"/>
+                <a:cs typeface="+mj-lt"/>
+              </a:defRPr>
             </a:lvl1pPr>
-            <a:lvl2pPr marL="0" indent="0">
+            <a:lvl2pPr marL="0" indent="0" algn="l">
               <a:lnSpc>
                 <a:spcPct val="110000"/>
               </a:lnSpc>
@@ -1743,8 +2225,16 @@
                 <a:spcPts val="0"/>
               </a:spcAft>
               <a:buNone/>
+              <a:defRPr sz="3300" b="1">
+                <a:solidFill>
+                  <a:schemeClr val="tx1"/>
+                </a:solidFill>
+                <a:latin typeface="+mj-lt"/>
+                <a:ea typeface="+mj-lt"/>
+                <a:cs typeface="+mj-lt"/>
+              </a:defRPr>
             </a:lvl2pPr>
-            <a:lvl3pPr marL="0" indent="0">
+            <a:lvl3pPr marL="0" indent="0" algn="l">
               <a:lnSpc>
                 <a:spcPct val="110000"/>
               </a:lnSpc>
@@ -1755,8 +2245,16 @@
                 <a:spcPts val="0"/>
               </a:spcAft>
               <a:buNone/>
+              <a:defRPr sz="3300" b="1">
+                <a:solidFill>
+                  <a:schemeClr val="tx1"/>
+                </a:solidFill>
+                <a:latin typeface="+mj-lt"/>
+                <a:ea typeface="+mj-lt"/>
+                <a:cs typeface="+mj-lt"/>
+              </a:defRPr>
             </a:lvl3pPr>
-            <a:lvl4pPr marL="0" indent="0">
+            <a:lvl4pPr marL="0" indent="0" algn="l">
               <a:lnSpc>
                 <a:spcPct val="110000"/>
               </a:lnSpc>
@@ -1767,8 +2265,16 @@
                 <a:spcPts val="0"/>
               </a:spcAft>
               <a:buNone/>
+              <a:defRPr sz="3300" b="1">
+                <a:solidFill>
+                  <a:schemeClr val="tx1"/>
+                </a:solidFill>
+                <a:latin typeface="+mj-lt"/>
+                <a:ea typeface="+mj-lt"/>
+                <a:cs typeface="+mj-lt"/>
+              </a:defRPr>
             </a:lvl4pPr>
-            <a:lvl5pPr marL="0" indent="0">
+            <a:lvl5pPr marL="0" indent="0" algn="l">
               <a:lnSpc>
                 <a:spcPct val="110000"/>
               </a:lnSpc>
@@ -1779,8 +2285,16 @@
                 <a:spcPts val="0"/>
               </a:spcAft>
               <a:buNone/>
+              <a:defRPr sz="3300" b="1">
+                <a:solidFill>
+                  <a:schemeClr val="tx1"/>
+                </a:solidFill>
+                <a:latin typeface="+mj-lt"/>
+                <a:ea typeface="+mj-lt"/>
+                <a:cs typeface="+mj-lt"/>
+              </a:defRPr>
             </a:lvl5pPr>
-            <a:lvl6pPr marL="0" indent="0">
+            <a:lvl6pPr marL="0" indent="0" algn="l">
               <a:lnSpc>
                 <a:spcPct val="110000"/>
               </a:lnSpc>
@@ -1791,8 +2305,16 @@
                 <a:spcPts val="0"/>
               </a:spcAft>
               <a:buNone/>
+              <a:defRPr sz="3300" b="1">
+                <a:solidFill>
+                  <a:schemeClr val="tx1"/>
+                </a:solidFill>
+                <a:latin typeface="+mj-lt"/>
+                <a:ea typeface="+mj-lt"/>
+                <a:cs typeface="+mj-lt"/>
+              </a:defRPr>
             </a:lvl6pPr>
-            <a:lvl7pPr marL="0" indent="0">
+            <a:lvl7pPr marL="0" indent="0" algn="l">
               <a:lnSpc>
                 <a:spcPct val="110000"/>
               </a:lnSpc>
@@ -1803,8 +2325,16 @@
                 <a:spcPts val="0"/>
               </a:spcAft>
               <a:buNone/>
+              <a:defRPr sz="3300" b="1">
+                <a:solidFill>
+                  <a:schemeClr val="tx1"/>
+                </a:solidFill>
+                <a:latin typeface="+mj-lt"/>
+                <a:ea typeface="+mj-lt"/>
+                <a:cs typeface="+mj-lt"/>
+              </a:defRPr>
             </a:lvl7pPr>
-            <a:lvl8pPr marL="0" indent="0">
+            <a:lvl8pPr marL="0" indent="0" algn="l">
               <a:lnSpc>
                 <a:spcPct val="110000"/>
               </a:lnSpc>
@@ -1815,8 +2345,16 @@
                 <a:spcPts val="0"/>
               </a:spcAft>
               <a:buNone/>
+              <a:defRPr sz="3300" b="1">
+                <a:solidFill>
+                  <a:schemeClr val="tx1"/>
+                </a:solidFill>
+                <a:latin typeface="+mj-lt"/>
+                <a:ea typeface="+mj-lt"/>
+                <a:cs typeface="+mj-lt"/>
+              </a:defRPr>
             </a:lvl8pPr>
-            <a:lvl9pPr marL="0" indent="0">
+            <a:lvl9pPr marL="0" indent="0" algn="l">
               <a:lnSpc>
                 <a:spcPct val="110000"/>
               </a:lnSpc>
@@ -1827,9 +2365,19 @@
                 <a:spcPts val="0"/>
               </a:spcAft>
               <a:buNone/>
+              <a:defRPr sz="3300" b="1">
+                <a:solidFill>
+                  <a:schemeClr val="tx1"/>
+                </a:solidFill>
+                <a:latin typeface="+mj-lt"/>
+                <a:ea typeface="+mj-lt"/>
+                <a:cs typeface="+mj-lt"/>
+              </a:defRPr>
             </a:lvl9pPr>
           </a:lstStyle>
-          <a:p xmlns:a="http://schemas.openxmlformats.org/drawingml/2006/main"/>
+          <a:p xmlns:a="http://schemas.openxmlformats.org/drawingml/2006/main">
+            <a:endParaRPr/>
+          </a:p>
         </p:txBody>
       </p:sp>
       <p:sp>
@@ -1877,7 +2425,7 @@
                 <a:cs typeface="+mn-lt"/>
               </a:defRPr>
             </a:defPPr>
-            <a:lvl1pPr marL="228600" indent="-228600">
+            <a:lvl1pPr marL="228600" indent="-228600" algn="l">
               <a:lnSpc>
                 <a:spcPct val="110000"/>
               </a:lnSpc>
@@ -1888,8 +2436,16 @@
                 <a:spcPts val="1200"/>
               </a:spcAft>
               <a:buChar char="•"/>
+              <a:defRPr sz="2100" b="0">
+                <a:solidFill>
+                  <a:schemeClr val="tx1"/>
+                </a:solidFill>
+                <a:latin typeface="+mn-lt"/>
+                <a:ea typeface="+mn-lt"/>
+                <a:cs typeface="+mn-lt"/>
+              </a:defRPr>
             </a:lvl1pPr>
-            <a:lvl2pPr marL="533400" indent="-228600">
+            <a:lvl2pPr marL="533400" indent="-228600" algn="l">
               <a:lnSpc>
                 <a:spcPct val="110000"/>
               </a:lnSpc>
@@ -1900,8 +2456,16 @@
                 <a:spcPts val="1200"/>
               </a:spcAft>
               <a:buChar char="•"/>
+              <a:defRPr sz="2100" b="0">
+                <a:solidFill>
+                  <a:schemeClr val="tx1"/>
+                </a:solidFill>
+                <a:latin typeface="+mn-lt"/>
+                <a:ea typeface="+mn-lt"/>
+                <a:cs typeface="+mn-lt"/>
+              </a:defRPr>
             </a:lvl2pPr>
-            <a:lvl3pPr marL="838200" indent="-228600">
+            <a:lvl3pPr marL="838200" indent="-228600" algn="l">
               <a:lnSpc>
                 <a:spcPct val="110000"/>
               </a:lnSpc>
@@ -1912,8 +2476,16 @@
                 <a:spcPts val="1200"/>
               </a:spcAft>
               <a:buChar char="•"/>
+              <a:defRPr sz="2100" b="0">
+                <a:solidFill>
+                  <a:schemeClr val="tx1"/>
+                </a:solidFill>
+                <a:latin typeface="+mn-lt"/>
+                <a:ea typeface="+mn-lt"/>
+                <a:cs typeface="+mn-lt"/>
+              </a:defRPr>
             </a:lvl3pPr>
-            <a:lvl4pPr marL="1143000" indent="-228600">
+            <a:lvl4pPr marL="1143000" indent="-228600" algn="l">
               <a:lnSpc>
                 <a:spcPct val="110000"/>
               </a:lnSpc>
@@ -1924,8 +2496,16 @@
                 <a:spcPts val="1200"/>
               </a:spcAft>
               <a:buChar char="•"/>
+              <a:defRPr sz="2100" b="0">
+                <a:solidFill>
+                  <a:schemeClr val="tx1"/>
+                </a:solidFill>
+                <a:latin typeface="+mn-lt"/>
+                <a:ea typeface="+mn-lt"/>
+                <a:cs typeface="+mn-lt"/>
+              </a:defRPr>
             </a:lvl4pPr>
-            <a:lvl5pPr marL="1447800" indent="-228600">
+            <a:lvl5pPr marL="1447800" indent="-228600" algn="l">
               <a:lnSpc>
                 <a:spcPct val="110000"/>
               </a:lnSpc>
@@ -1936,8 +2516,16 @@
                 <a:spcPts val="1200"/>
               </a:spcAft>
               <a:buChar char="•"/>
+              <a:defRPr sz="2100" b="0">
+                <a:solidFill>
+                  <a:schemeClr val="tx1"/>
+                </a:solidFill>
+                <a:latin typeface="+mn-lt"/>
+                <a:ea typeface="+mn-lt"/>
+                <a:cs typeface="+mn-lt"/>
+              </a:defRPr>
             </a:lvl5pPr>
-            <a:lvl6pPr marL="1752600" indent="-228600">
+            <a:lvl6pPr marL="1752600" indent="-228600" algn="l">
               <a:lnSpc>
                 <a:spcPct val="110000"/>
               </a:lnSpc>
@@ -1948,8 +2536,16 @@
                 <a:spcPts val="1200"/>
               </a:spcAft>
               <a:buChar char="•"/>
+              <a:defRPr sz="2100" b="0">
+                <a:solidFill>
+                  <a:schemeClr val="tx1"/>
+                </a:solidFill>
+                <a:latin typeface="+mn-lt"/>
+                <a:ea typeface="+mn-lt"/>
+                <a:cs typeface="+mn-lt"/>
+              </a:defRPr>
             </a:lvl6pPr>
-            <a:lvl7pPr marL="2057400" indent="-228600">
+            <a:lvl7pPr marL="2057400" indent="-228600" algn="l">
               <a:lnSpc>
                 <a:spcPct val="110000"/>
               </a:lnSpc>
@@ -1960,8 +2556,16 @@
                 <a:spcPts val="1200"/>
               </a:spcAft>
               <a:buChar char="•"/>
+              <a:defRPr sz="2100" b="0">
+                <a:solidFill>
+                  <a:schemeClr val="tx1"/>
+                </a:solidFill>
+                <a:latin typeface="+mn-lt"/>
+                <a:ea typeface="+mn-lt"/>
+                <a:cs typeface="+mn-lt"/>
+              </a:defRPr>
             </a:lvl7pPr>
-            <a:lvl8pPr marL="2362200" indent="-228600">
+            <a:lvl8pPr marL="2362200" indent="-228600" algn="l">
               <a:lnSpc>
                 <a:spcPct val="110000"/>
               </a:lnSpc>
@@ -1972,8 +2576,16 @@
                 <a:spcPts val="1200"/>
               </a:spcAft>
               <a:buChar char="•"/>
+              <a:defRPr sz="2100" b="0">
+                <a:solidFill>
+                  <a:schemeClr val="tx1"/>
+                </a:solidFill>
+                <a:latin typeface="+mn-lt"/>
+                <a:ea typeface="+mn-lt"/>
+                <a:cs typeface="+mn-lt"/>
+              </a:defRPr>
             </a:lvl8pPr>
-            <a:lvl9pPr marL="2667000" indent="-228600">
+            <a:lvl9pPr marL="2667000" indent="-228600" algn="l">
               <a:lnSpc>
                 <a:spcPct val="110000"/>
               </a:lnSpc>
@@ -1984,9 +2596,19 @@
                 <a:spcPts val="1200"/>
               </a:spcAft>
               <a:buChar char="•"/>
+              <a:defRPr sz="2100" b="0">
+                <a:solidFill>
+                  <a:schemeClr val="tx1"/>
+                </a:solidFill>
+                <a:latin typeface="+mn-lt"/>
+                <a:ea typeface="+mn-lt"/>
+                <a:cs typeface="+mn-lt"/>
+              </a:defRPr>
             </a:lvl9pPr>
           </a:lstStyle>
-          <a:p xmlns:a="http://schemas.openxmlformats.org/drawingml/2006/main"/>
+          <a:p xmlns:a="http://schemas.openxmlformats.org/drawingml/2006/main">
+            <a:endParaRPr/>
+          </a:p>
         </p:txBody>
       </p:sp>
       <p:sp>
@@ -2034,7 +2656,7 @@
                 <a:cs typeface="+mn-lt"/>
               </a:defRPr>
             </a:defPPr>
-            <a:lvl1pPr marL="228600" indent="-228600">
+            <a:lvl1pPr marL="228600" indent="-228600" algn="l">
               <a:lnSpc>
                 <a:spcPct val="110000"/>
               </a:lnSpc>
@@ -2045,8 +2667,16 @@
                 <a:spcPts val="1200"/>
               </a:spcAft>
               <a:buChar char="•"/>
+              <a:defRPr sz="2100" b="0">
+                <a:solidFill>
+                  <a:schemeClr val="tx1"/>
+                </a:solidFill>
+                <a:latin typeface="+mn-lt"/>
+                <a:ea typeface="+mn-lt"/>
+                <a:cs typeface="+mn-lt"/>
+              </a:defRPr>
             </a:lvl1pPr>
-            <a:lvl2pPr marL="533400" indent="-228600">
+            <a:lvl2pPr marL="533400" indent="-228600" algn="l">
               <a:lnSpc>
                 <a:spcPct val="110000"/>
               </a:lnSpc>
@@ -2057,8 +2687,16 @@
                 <a:spcPts val="1200"/>
               </a:spcAft>
               <a:buChar char="•"/>
+              <a:defRPr sz="2100" b="0">
+                <a:solidFill>
+                  <a:schemeClr val="tx1"/>
+                </a:solidFill>
+                <a:latin typeface="+mn-lt"/>
+                <a:ea typeface="+mn-lt"/>
+                <a:cs typeface="+mn-lt"/>
+              </a:defRPr>
             </a:lvl2pPr>
-            <a:lvl3pPr marL="838200" indent="-228600">
+            <a:lvl3pPr marL="838200" indent="-228600" algn="l">
               <a:lnSpc>
                 <a:spcPct val="110000"/>
               </a:lnSpc>
@@ -2069,8 +2707,16 @@
                 <a:spcPts val="1200"/>
               </a:spcAft>
               <a:buChar char="•"/>
+              <a:defRPr sz="2100" b="0">
+                <a:solidFill>
+                  <a:schemeClr val="tx1"/>
+                </a:solidFill>
+                <a:latin typeface="+mn-lt"/>
+                <a:ea typeface="+mn-lt"/>
+                <a:cs typeface="+mn-lt"/>
+              </a:defRPr>
             </a:lvl3pPr>
-            <a:lvl4pPr marL="1143000" indent="-228600">
+            <a:lvl4pPr marL="1143000" indent="-228600" algn="l">
               <a:lnSpc>
                 <a:spcPct val="110000"/>
               </a:lnSpc>
@@ -2081,8 +2727,16 @@
                 <a:spcPts val="1200"/>
               </a:spcAft>
               <a:buChar char="•"/>
+              <a:defRPr sz="2100" b="0">
+                <a:solidFill>
+                  <a:schemeClr val="tx1"/>
+                </a:solidFill>
+                <a:latin typeface="+mn-lt"/>
+                <a:ea typeface="+mn-lt"/>
+                <a:cs typeface="+mn-lt"/>
+              </a:defRPr>
             </a:lvl4pPr>
-            <a:lvl5pPr marL="1447800" indent="-228600">
+            <a:lvl5pPr marL="1447800" indent="-228600" algn="l">
               <a:lnSpc>
                 <a:spcPct val="110000"/>
               </a:lnSpc>
@@ -2093,8 +2747,16 @@
                 <a:spcPts val="1200"/>
               </a:spcAft>
               <a:buChar char="•"/>
+              <a:defRPr sz="2100" b="0">
+                <a:solidFill>
+                  <a:schemeClr val="tx1"/>
+                </a:solidFill>
+                <a:latin typeface="+mn-lt"/>
+                <a:ea typeface="+mn-lt"/>
+                <a:cs typeface="+mn-lt"/>
+              </a:defRPr>
             </a:lvl5pPr>
-            <a:lvl6pPr marL="1752600" indent="-228600">
+            <a:lvl6pPr marL="1752600" indent="-228600" algn="l">
               <a:lnSpc>
                 <a:spcPct val="110000"/>
               </a:lnSpc>
@@ -2105,8 +2767,16 @@
                 <a:spcPts val="1200"/>
               </a:spcAft>
               <a:buChar char="•"/>
+              <a:defRPr sz="2100" b="0">
+                <a:solidFill>
+                  <a:schemeClr val="tx1"/>
+                </a:solidFill>
+                <a:latin typeface="+mn-lt"/>
+                <a:ea typeface="+mn-lt"/>
+                <a:cs typeface="+mn-lt"/>
+              </a:defRPr>
             </a:lvl6pPr>
-            <a:lvl7pPr marL="2057400" indent="-228600">
+            <a:lvl7pPr marL="2057400" indent="-228600" algn="l">
               <a:lnSpc>
                 <a:spcPct val="110000"/>
               </a:lnSpc>
@@ -2117,8 +2787,16 @@
                 <a:spcPts val="1200"/>
               </a:spcAft>
               <a:buChar char="•"/>
+              <a:defRPr sz="2100" b="0">
+                <a:solidFill>
+                  <a:schemeClr val="tx1"/>
+                </a:solidFill>
+                <a:latin typeface="+mn-lt"/>
+                <a:ea typeface="+mn-lt"/>
+                <a:cs typeface="+mn-lt"/>
+              </a:defRPr>
             </a:lvl7pPr>
-            <a:lvl8pPr marL="2362200" indent="-228600">
+            <a:lvl8pPr marL="2362200" indent="-228600" algn="l">
               <a:lnSpc>
                 <a:spcPct val="110000"/>
               </a:lnSpc>
@@ -2129,8 +2807,16 @@
                 <a:spcPts val="1200"/>
               </a:spcAft>
               <a:buChar char="•"/>
+              <a:defRPr sz="2100" b="0">
+                <a:solidFill>
+                  <a:schemeClr val="tx1"/>
+                </a:solidFill>
+                <a:latin typeface="+mn-lt"/>
+                <a:ea typeface="+mn-lt"/>
+                <a:cs typeface="+mn-lt"/>
+              </a:defRPr>
             </a:lvl8pPr>
-            <a:lvl9pPr marL="2667000" indent="-228600">
+            <a:lvl9pPr marL="2667000" indent="-228600" algn="l">
               <a:lnSpc>
                 <a:spcPct val="110000"/>
               </a:lnSpc>
@@ -2141,9 +2827,19 @@
                 <a:spcPts val="1200"/>
               </a:spcAft>
               <a:buChar char="•"/>
+              <a:defRPr sz="2100" b="0">
+                <a:solidFill>
+                  <a:schemeClr val="tx1"/>
+                </a:solidFill>
+                <a:latin typeface="+mn-lt"/>
+                <a:ea typeface="+mn-lt"/>
+                <a:cs typeface="+mn-lt"/>
+              </a:defRPr>
             </a:lvl9pPr>
           </a:lstStyle>
-          <a:p xmlns:a="http://schemas.openxmlformats.org/drawingml/2006/main"/>
+          <a:p xmlns:a="http://schemas.openxmlformats.org/drawingml/2006/main">
+            <a:endParaRPr/>
+          </a:p>
         </p:txBody>
       </p:sp>
     </p:spTree>
@@ -2208,7 +2904,7 @@
                 <a:cs typeface="+mj-lt"/>
               </a:defRPr>
             </a:defPPr>
-            <a:lvl1pPr marL="0" indent="0">
+            <a:lvl1pPr marL="0" indent="0" algn="l">
               <a:lnSpc>
                 <a:spcPct val="110000"/>
               </a:lnSpc>
@@ -2219,8 +2915,16 @@
                 <a:spcPts val="0"/>
               </a:spcAft>
               <a:buNone/>
+              <a:defRPr sz="3300" b="1">
+                <a:solidFill>
+                  <a:schemeClr val="tx1"/>
+                </a:solidFill>
+                <a:latin typeface="+mj-lt"/>
+                <a:ea typeface="+mj-lt"/>
+                <a:cs typeface="+mj-lt"/>
+              </a:defRPr>
             </a:lvl1pPr>
-            <a:lvl2pPr marL="0" indent="0">
+            <a:lvl2pPr marL="0" indent="0" algn="l">
               <a:lnSpc>
                 <a:spcPct val="110000"/>
               </a:lnSpc>
@@ -2231,8 +2935,16 @@
                 <a:spcPts val="0"/>
               </a:spcAft>
               <a:buNone/>
+              <a:defRPr sz="3300" b="1">
+                <a:solidFill>
+                  <a:schemeClr val="tx1"/>
+                </a:solidFill>
+                <a:latin typeface="+mj-lt"/>
+                <a:ea typeface="+mj-lt"/>
+                <a:cs typeface="+mj-lt"/>
+              </a:defRPr>
             </a:lvl2pPr>
-            <a:lvl3pPr marL="0" indent="0">
+            <a:lvl3pPr marL="0" indent="0" algn="l">
               <a:lnSpc>
                 <a:spcPct val="110000"/>
               </a:lnSpc>
@@ -2243,8 +2955,16 @@
                 <a:spcPts val="0"/>
               </a:spcAft>
               <a:buNone/>
+              <a:defRPr sz="3300" b="1">
+                <a:solidFill>
+                  <a:schemeClr val="tx1"/>
+                </a:solidFill>
+                <a:latin typeface="+mj-lt"/>
+                <a:ea typeface="+mj-lt"/>
+                <a:cs typeface="+mj-lt"/>
+              </a:defRPr>
             </a:lvl3pPr>
-            <a:lvl4pPr marL="0" indent="0">
+            <a:lvl4pPr marL="0" indent="0" algn="l">
               <a:lnSpc>
                 <a:spcPct val="110000"/>
               </a:lnSpc>
@@ -2255,8 +2975,16 @@
                 <a:spcPts val="0"/>
               </a:spcAft>
               <a:buNone/>
+              <a:defRPr sz="3300" b="1">
+                <a:solidFill>
+                  <a:schemeClr val="tx1"/>
+                </a:solidFill>
+                <a:latin typeface="+mj-lt"/>
+                <a:ea typeface="+mj-lt"/>
+                <a:cs typeface="+mj-lt"/>
+              </a:defRPr>
             </a:lvl4pPr>
-            <a:lvl5pPr marL="0" indent="0">
+            <a:lvl5pPr marL="0" indent="0" algn="l">
               <a:lnSpc>
                 <a:spcPct val="110000"/>
               </a:lnSpc>
@@ -2267,8 +2995,16 @@
                 <a:spcPts val="0"/>
               </a:spcAft>
               <a:buNone/>
+              <a:defRPr sz="3300" b="1">
+                <a:solidFill>
+                  <a:schemeClr val="tx1"/>
+                </a:solidFill>
+                <a:latin typeface="+mj-lt"/>
+                <a:ea typeface="+mj-lt"/>
+                <a:cs typeface="+mj-lt"/>
+              </a:defRPr>
             </a:lvl5pPr>
-            <a:lvl6pPr marL="0" indent="0">
+            <a:lvl6pPr marL="0" indent="0" algn="l">
               <a:lnSpc>
                 <a:spcPct val="110000"/>
               </a:lnSpc>
@@ -2279,8 +3015,16 @@
                 <a:spcPts val="0"/>
               </a:spcAft>
               <a:buNone/>
+              <a:defRPr sz="3300" b="1">
+                <a:solidFill>
+                  <a:schemeClr val="tx1"/>
+                </a:solidFill>
+                <a:latin typeface="+mj-lt"/>
+                <a:ea typeface="+mj-lt"/>
+                <a:cs typeface="+mj-lt"/>
+              </a:defRPr>
             </a:lvl6pPr>
-            <a:lvl7pPr marL="0" indent="0">
+            <a:lvl7pPr marL="0" indent="0" algn="l">
               <a:lnSpc>
                 <a:spcPct val="110000"/>
               </a:lnSpc>
@@ -2291,8 +3035,16 @@
                 <a:spcPts val="0"/>
               </a:spcAft>
               <a:buNone/>
+              <a:defRPr sz="3300" b="1">
+                <a:solidFill>
+                  <a:schemeClr val="tx1"/>
+                </a:solidFill>
+                <a:latin typeface="+mj-lt"/>
+                <a:ea typeface="+mj-lt"/>
+                <a:cs typeface="+mj-lt"/>
+              </a:defRPr>
             </a:lvl7pPr>
-            <a:lvl8pPr marL="0" indent="0">
+            <a:lvl8pPr marL="0" indent="0" algn="l">
               <a:lnSpc>
                 <a:spcPct val="110000"/>
               </a:lnSpc>
@@ -2303,8 +3055,16 @@
                 <a:spcPts val="0"/>
               </a:spcAft>
               <a:buNone/>
+              <a:defRPr sz="3300" b="1">
+                <a:solidFill>
+                  <a:schemeClr val="tx1"/>
+                </a:solidFill>
+                <a:latin typeface="+mj-lt"/>
+                <a:ea typeface="+mj-lt"/>
+                <a:cs typeface="+mj-lt"/>
+              </a:defRPr>
             </a:lvl8pPr>
-            <a:lvl9pPr marL="0" indent="0">
+            <a:lvl9pPr marL="0" indent="0" algn="l">
               <a:lnSpc>
                 <a:spcPct val="110000"/>
               </a:lnSpc>
@@ -2315,9 +3075,19 @@
                 <a:spcPts val="0"/>
               </a:spcAft>
               <a:buNone/>
+              <a:defRPr sz="3300" b="1">
+                <a:solidFill>
+                  <a:schemeClr val="tx1"/>
+                </a:solidFill>
+                <a:latin typeface="+mj-lt"/>
+                <a:ea typeface="+mj-lt"/>
+                <a:cs typeface="+mj-lt"/>
+              </a:defRPr>
             </a:lvl9pPr>
           </a:lstStyle>
-          <a:p xmlns:a="http://schemas.openxmlformats.org/drawingml/2006/main"/>
+          <a:p xmlns:a="http://schemas.openxmlformats.org/drawingml/2006/main">
+            <a:endParaRPr/>
+          </a:p>
         </p:txBody>
       </p:sp>
       <p:sp>
@@ -2365,7 +3135,7 @@
                 <a:cs typeface="+mn-lt"/>
               </a:defRPr>
             </a:defPPr>
-            <a:lvl1pPr marL="228600" indent="-228600">
+            <a:lvl1pPr marL="228600" indent="-228600" algn="l">
               <a:lnSpc>
                 <a:spcPct val="110000"/>
               </a:lnSpc>
@@ -2376,8 +3146,16 @@
                 <a:spcPts val="1200"/>
               </a:spcAft>
               <a:buChar char="•"/>
+              <a:defRPr sz="2250" b="0">
+                <a:solidFill>
+                  <a:schemeClr val="tx1"/>
+                </a:solidFill>
+                <a:latin typeface="+mn-lt"/>
+                <a:ea typeface="+mn-lt"/>
+                <a:cs typeface="+mn-lt"/>
+              </a:defRPr>
             </a:lvl1pPr>
-            <a:lvl2pPr marL="533400" indent="-228600">
+            <a:lvl2pPr marL="533400" indent="-228600" algn="l">
               <a:lnSpc>
                 <a:spcPct val="110000"/>
               </a:lnSpc>
@@ -2388,8 +3166,16 @@
                 <a:spcPts val="1200"/>
               </a:spcAft>
               <a:buChar char="•"/>
+              <a:defRPr sz="2250" b="0">
+                <a:solidFill>
+                  <a:schemeClr val="tx1"/>
+                </a:solidFill>
+                <a:latin typeface="+mn-lt"/>
+                <a:ea typeface="+mn-lt"/>
+                <a:cs typeface="+mn-lt"/>
+              </a:defRPr>
             </a:lvl2pPr>
-            <a:lvl3pPr marL="838200" indent="-228600">
+            <a:lvl3pPr marL="838200" indent="-228600" algn="l">
               <a:lnSpc>
                 <a:spcPct val="110000"/>
               </a:lnSpc>
@@ -2400,8 +3186,16 @@
                 <a:spcPts val="1200"/>
               </a:spcAft>
               <a:buChar char="•"/>
+              <a:defRPr sz="2250" b="0">
+                <a:solidFill>
+                  <a:schemeClr val="tx1"/>
+                </a:solidFill>
+                <a:latin typeface="+mn-lt"/>
+                <a:ea typeface="+mn-lt"/>
+                <a:cs typeface="+mn-lt"/>
+              </a:defRPr>
             </a:lvl3pPr>
-            <a:lvl4pPr marL="1143000" indent="-228600">
+            <a:lvl4pPr marL="1143000" indent="-228600" algn="l">
               <a:lnSpc>
                 <a:spcPct val="110000"/>
               </a:lnSpc>
@@ -2412,8 +3206,16 @@
                 <a:spcPts val="1200"/>
               </a:spcAft>
               <a:buChar char="•"/>
+              <a:defRPr sz="2250" b="0">
+                <a:solidFill>
+                  <a:schemeClr val="tx1"/>
+                </a:solidFill>
+                <a:latin typeface="+mn-lt"/>
+                <a:ea typeface="+mn-lt"/>
+                <a:cs typeface="+mn-lt"/>
+              </a:defRPr>
             </a:lvl4pPr>
-            <a:lvl5pPr marL="1447800" indent="-228600">
+            <a:lvl5pPr marL="1447800" indent="-228600" algn="l">
               <a:lnSpc>
                 <a:spcPct val="110000"/>
               </a:lnSpc>
@@ -2424,8 +3226,16 @@
                 <a:spcPts val="1200"/>
               </a:spcAft>
               <a:buChar char="•"/>
+              <a:defRPr sz="2250" b="0">
+                <a:solidFill>
+                  <a:schemeClr val="tx1"/>
+                </a:solidFill>
+                <a:latin typeface="+mn-lt"/>
+                <a:ea typeface="+mn-lt"/>
+                <a:cs typeface="+mn-lt"/>
+              </a:defRPr>
             </a:lvl5pPr>
-            <a:lvl6pPr marL="1752600" indent="-228600">
+            <a:lvl6pPr marL="1752600" indent="-228600" algn="l">
               <a:lnSpc>
                 <a:spcPct val="110000"/>
               </a:lnSpc>
@@ -2436,8 +3246,16 @@
                 <a:spcPts val="1200"/>
               </a:spcAft>
               <a:buChar char="•"/>
+              <a:defRPr sz="2250" b="0">
+                <a:solidFill>
+                  <a:schemeClr val="tx1"/>
+                </a:solidFill>
+                <a:latin typeface="+mn-lt"/>
+                <a:ea typeface="+mn-lt"/>
+                <a:cs typeface="+mn-lt"/>
+              </a:defRPr>
             </a:lvl6pPr>
-            <a:lvl7pPr marL="2057400" indent="-228600">
+            <a:lvl7pPr marL="2057400" indent="-228600" algn="l">
               <a:lnSpc>
                 <a:spcPct val="110000"/>
               </a:lnSpc>
@@ -2448,8 +3266,16 @@
                 <a:spcPts val="1200"/>
               </a:spcAft>
               <a:buChar char="•"/>
+              <a:defRPr sz="2250" b="0">
+                <a:solidFill>
+                  <a:schemeClr val="tx1"/>
+                </a:solidFill>
+                <a:latin typeface="+mn-lt"/>
+                <a:ea typeface="+mn-lt"/>
+                <a:cs typeface="+mn-lt"/>
+              </a:defRPr>
             </a:lvl7pPr>
-            <a:lvl8pPr marL="2362200" indent="-228600">
+            <a:lvl8pPr marL="2362200" indent="-228600" algn="l">
               <a:lnSpc>
                 <a:spcPct val="110000"/>
               </a:lnSpc>
@@ -2460,8 +3286,16 @@
                 <a:spcPts val="1200"/>
               </a:spcAft>
               <a:buChar char="•"/>
+              <a:defRPr sz="2250" b="0">
+                <a:solidFill>
+                  <a:schemeClr val="tx1"/>
+                </a:solidFill>
+                <a:latin typeface="+mn-lt"/>
+                <a:ea typeface="+mn-lt"/>
+                <a:cs typeface="+mn-lt"/>
+              </a:defRPr>
             </a:lvl8pPr>
-            <a:lvl9pPr marL="2667000" indent="-228600">
+            <a:lvl9pPr marL="2667000" indent="-228600" algn="l">
               <a:lnSpc>
                 <a:spcPct val="110000"/>
               </a:lnSpc>
@@ -2472,9 +3306,19 @@
                 <a:spcPts val="1200"/>
               </a:spcAft>
               <a:buChar char="•"/>
+              <a:defRPr sz="2250" b="0">
+                <a:solidFill>
+                  <a:schemeClr val="tx1"/>
+                </a:solidFill>
+                <a:latin typeface="+mn-lt"/>
+                <a:ea typeface="+mn-lt"/>
+                <a:cs typeface="+mn-lt"/>
+              </a:defRPr>
             </a:lvl9pPr>
           </a:lstStyle>
-          <a:p xmlns:a="http://schemas.openxmlformats.org/drawingml/2006/main"/>
+          <a:p xmlns:a="http://schemas.openxmlformats.org/drawingml/2006/main">
+            <a:endParaRPr/>
+          </a:p>
         </p:txBody>
       </p:sp>
     </p:spTree>
@@ -2520,12 +3364,12 @@
   </p:cSld>
   <p:clrMap bg1="lt1" tx1="dk1" bg2="lt2" tx2="dk2" accent1="accent1" accent2="accent2" accent3="accent3" accent4="accent4" accent5="accent5" accent6="accent6" hlink="hlink" folHlink="folHlink"/>
   <p:sldLayoutIdLst>
-    <p:sldLayoutId xmlns:r="http://schemas.openxmlformats.org/officeDocument/2006/relationships" id="2147483649" r:id="Rf769397a913448a6"/>
-    <p:sldLayoutId xmlns:r="http://schemas.openxmlformats.org/officeDocument/2006/relationships" id="2147483650" r:id="Ra10866555c6f49a7"/>
-    <p:sldLayoutId xmlns:r="http://schemas.openxmlformats.org/officeDocument/2006/relationships" id="2147483651" r:id="Rbbb3c0212578452e"/>
-    <p:sldLayoutId xmlns:r="http://schemas.openxmlformats.org/officeDocument/2006/relationships" id="2147483652" r:id="R6fb9507e640d4a5e"/>
-    <p:sldLayoutId xmlns:r="http://schemas.openxmlformats.org/officeDocument/2006/relationships" id="2147483653" r:id="Raa0055f10e18414e"/>
-    <p:sldLayoutId xmlns:r="http://schemas.openxmlformats.org/officeDocument/2006/relationships" id="2147483654" r:id="R17fd685915754ed9"/>
+    <p:sldLayoutId xmlns:r="http://schemas.openxmlformats.org/officeDocument/2006/relationships" id="2147483649" r:id="R25bd9aba16e64f0b"/>
+    <p:sldLayoutId xmlns:r="http://schemas.openxmlformats.org/officeDocument/2006/relationships" id="2147483650" r:id="Rc1e3e1e69f8e4166"/>
+    <p:sldLayoutId xmlns:r="http://schemas.openxmlformats.org/officeDocument/2006/relationships" id="2147483651" r:id="R2b73b15c97bf450a"/>
+    <p:sldLayoutId xmlns:r="http://schemas.openxmlformats.org/officeDocument/2006/relationships" id="2147483652" r:id="Rab4477ad272a48bd"/>
+    <p:sldLayoutId xmlns:r="http://schemas.openxmlformats.org/officeDocument/2006/relationships" id="2147483653" r:id="R6dae597fe6b04955"/>
+    <p:sldLayoutId xmlns:r="http://schemas.openxmlformats.org/officeDocument/2006/relationships" id="2147483654" r:id="R1ed92611764e4061"/>
   </p:sldLayoutIdLst>
   <p:txStyles>
     <p:titleStyle>
@@ -3073,7 +3917,7 @@
       </p:grpSpPr>
       <p:sp>
         <p:nvSpPr>
-          <p:cNvPr id="7" name="">
+          <p:cNvPr id="7" name="Rectangle 6">
             <a:extLst xmlns:a="http://schemas.openxmlformats.org/drawingml/2006/main">
               <a:ext uri="{FF2B5EF4-FFF2-40B4-BE49-F238E27FC236}">
                 <a16:creationId xmlns:a16="http://schemas.microsoft.com/office/drawing/2014/main" id="{5146DC76-CD0D-4C9B-A817-B532F2E7DED5}"/>
@@ -3101,7 +3945,7 @@
         </p:spPr>
         <p:txBody>
           <a:bodyPr xmlns:a="http://schemas.openxmlformats.org/drawingml/2006/main" wrap="square" lIns="0" tIns="0" rIns="0" bIns="0" anchor="ctr">
-            <a:normAutofit fontScale="100000"/>
+            <a:normAutofit/>
           </a:bodyPr>
           <a:lstStyle xmlns:a="http://schemas.openxmlformats.org/drawingml/2006/main">
             <a:defPPr>
@@ -3114,9 +3958,100 @@
                 <a:cs typeface="Arial"/>
               </a:defRPr>
             </a:defPPr>
+            <a:lvl1pPr>
+              <a:defRPr sz="1125" b="1">
+                <a:solidFill>
+                  <a:srgbClr val="AFC2FF"/>
+                </a:solidFill>
+                <a:latin typeface="Arial"/>
+                <a:ea typeface="Arial"/>
+                <a:cs typeface="Arial"/>
+              </a:defRPr>
+            </a:lvl1pPr>
+            <a:lvl2pPr>
+              <a:defRPr sz="1125" b="1">
+                <a:solidFill>
+                  <a:srgbClr val="AFC2FF"/>
+                </a:solidFill>
+                <a:latin typeface="Arial"/>
+                <a:ea typeface="Arial"/>
+                <a:cs typeface="Arial"/>
+              </a:defRPr>
+            </a:lvl2pPr>
+            <a:lvl3pPr>
+              <a:defRPr sz="1125" b="1">
+                <a:solidFill>
+                  <a:srgbClr val="AFC2FF"/>
+                </a:solidFill>
+                <a:latin typeface="Arial"/>
+                <a:ea typeface="Arial"/>
+                <a:cs typeface="Arial"/>
+              </a:defRPr>
+            </a:lvl3pPr>
+            <a:lvl4pPr>
+              <a:defRPr sz="1125" b="1">
+                <a:solidFill>
+                  <a:srgbClr val="AFC2FF"/>
+                </a:solidFill>
+                <a:latin typeface="Arial"/>
+                <a:ea typeface="Arial"/>
+                <a:cs typeface="Arial"/>
+              </a:defRPr>
+            </a:lvl4pPr>
+            <a:lvl5pPr>
+              <a:defRPr sz="1125" b="1">
+                <a:solidFill>
+                  <a:srgbClr val="AFC2FF"/>
+                </a:solidFill>
+                <a:latin typeface="Arial"/>
+                <a:ea typeface="Arial"/>
+                <a:cs typeface="Arial"/>
+              </a:defRPr>
+            </a:lvl5pPr>
+            <a:lvl6pPr>
+              <a:defRPr sz="1125" b="1">
+                <a:solidFill>
+                  <a:srgbClr val="AFC2FF"/>
+                </a:solidFill>
+                <a:latin typeface="Arial"/>
+                <a:ea typeface="Arial"/>
+                <a:cs typeface="Arial"/>
+              </a:defRPr>
+            </a:lvl6pPr>
+            <a:lvl7pPr>
+              <a:defRPr sz="1125" b="1">
+                <a:solidFill>
+                  <a:srgbClr val="AFC2FF"/>
+                </a:solidFill>
+                <a:latin typeface="Arial"/>
+                <a:ea typeface="Arial"/>
+                <a:cs typeface="Arial"/>
+              </a:defRPr>
+            </a:lvl7pPr>
+            <a:lvl8pPr>
+              <a:defRPr sz="1125" b="1">
+                <a:solidFill>
+                  <a:srgbClr val="AFC2FF"/>
+                </a:solidFill>
+                <a:latin typeface="Arial"/>
+                <a:ea typeface="Arial"/>
+                <a:cs typeface="Arial"/>
+              </a:defRPr>
+            </a:lvl8pPr>
+            <a:lvl9pPr>
+              <a:defRPr sz="1125" b="1">
+                <a:solidFill>
+                  <a:srgbClr val="AFC2FF"/>
+                </a:solidFill>
+                <a:latin typeface="Arial"/>
+                <a:ea typeface="Arial"/>
+                <a:cs typeface="Arial"/>
+              </a:defRPr>
+            </a:lvl9pPr>
           </a:lstStyle>
           <a:p xmlns:a="http://schemas.openxmlformats.org/drawingml/2006/main">
             <a:pPr>
+              <a:buNone/>
               <a:defRPr sz="1125" b="1">
                 <a:solidFill>
                   <a:srgbClr val="AFC2FF"/>
@@ -3142,7 +4077,7 @@
       </p:sp>
       <p:sp>
         <p:nvSpPr>
-          <p:cNvPr id="2" name="">
+          <p:cNvPr id="2" name="Rectangle 1">
             <a:extLst xmlns:a="http://schemas.openxmlformats.org/drawingml/2006/main">
               <a:ext uri="{FF2B5EF4-FFF2-40B4-BE49-F238E27FC236}">
                 <a16:creationId xmlns:a16="http://schemas.microsoft.com/office/drawing/2014/main" id="{7E6FFDD1-86CF-4A63-8594-C0135862C55D}"/>
@@ -3170,7 +4105,7 @@
         </p:spPr>
         <p:txBody>
           <a:bodyPr xmlns:a="http://schemas.openxmlformats.org/drawingml/2006/main" wrap="square" lIns="0" tIns="0" rIns="0" bIns="0" anchor="ctr">
-            <a:normAutofit fontScale="100000"/>
+            <a:normAutofit/>
           </a:bodyPr>
           <a:lstStyle xmlns:a="http://schemas.openxmlformats.org/drawingml/2006/main">
             <a:defPPr>
@@ -3183,9 +4118,100 @@
                 <a:cs typeface="Arial"/>
               </a:defRPr>
             </a:defPPr>
+            <a:lvl1pPr>
+              <a:defRPr sz="6450" b="1">
+                <a:solidFill>
+                  <a:srgbClr val="FFFFFF"/>
+                </a:solidFill>
+                <a:latin typeface="Arial"/>
+                <a:ea typeface="Arial"/>
+                <a:cs typeface="Arial"/>
+              </a:defRPr>
+            </a:lvl1pPr>
+            <a:lvl2pPr>
+              <a:defRPr sz="6450" b="1">
+                <a:solidFill>
+                  <a:srgbClr val="FFFFFF"/>
+                </a:solidFill>
+                <a:latin typeface="Arial"/>
+                <a:ea typeface="Arial"/>
+                <a:cs typeface="Arial"/>
+              </a:defRPr>
+            </a:lvl2pPr>
+            <a:lvl3pPr>
+              <a:defRPr sz="6450" b="1">
+                <a:solidFill>
+                  <a:srgbClr val="FFFFFF"/>
+                </a:solidFill>
+                <a:latin typeface="Arial"/>
+                <a:ea typeface="Arial"/>
+                <a:cs typeface="Arial"/>
+              </a:defRPr>
+            </a:lvl3pPr>
+            <a:lvl4pPr>
+              <a:defRPr sz="6450" b="1">
+                <a:solidFill>
+                  <a:srgbClr val="FFFFFF"/>
+                </a:solidFill>
+                <a:latin typeface="Arial"/>
+                <a:ea typeface="Arial"/>
+                <a:cs typeface="Arial"/>
+              </a:defRPr>
+            </a:lvl4pPr>
+            <a:lvl5pPr>
+              <a:defRPr sz="6450" b="1">
+                <a:solidFill>
+                  <a:srgbClr val="FFFFFF"/>
+                </a:solidFill>
+                <a:latin typeface="Arial"/>
+                <a:ea typeface="Arial"/>
+                <a:cs typeface="Arial"/>
+              </a:defRPr>
+            </a:lvl5pPr>
+            <a:lvl6pPr>
+              <a:defRPr sz="6450" b="1">
+                <a:solidFill>
+                  <a:srgbClr val="FFFFFF"/>
+                </a:solidFill>
+                <a:latin typeface="Arial"/>
+                <a:ea typeface="Arial"/>
+                <a:cs typeface="Arial"/>
+              </a:defRPr>
+            </a:lvl6pPr>
+            <a:lvl7pPr>
+              <a:defRPr sz="6450" b="1">
+                <a:solidFill>
+                  <a:srgbClr val="FFFFFF"/>
+                </a:solidFill>
+                <a:latin typeface="Arial"/>
+                <a:ea typeface="Arial"/>
+                <a:cs typeface="Arial"/>
+              </a:defRPr>
+            </a:lvl7pPr>
+            <a:lvl8pPr>
+              <a:defRPr sz="6450" b="1">
+                <a:solidFill>
+                  <a:srgbClr val="FFFFFF"/>
+                </a:solidFill>
+                <a:latin typeface="Arial"/>
+                <a:ea typeface="Arial"/>
+                <a:cs typeface="Arial"/>
+              </a:defRPr>
+            </a:lvl8pPr>
+            <a:lvl9pPr>
+              <a:defRPr sz="6450" b="1">
+                <a:solidFill>
+                  <a:srgbClr val="FFFFFF"/>
+                </a:solidFill>
+                <a:latin typeface="Arial"/>
+                <a:ea typeface="Arial"/>
+                <a:cs typeface="Arial"/>
+              </a:defRPr>
+            </a:lvl9pPr>
           </a:lstStyle>
           <a:p xmlns:a="http://schemas.openxmlformats.org/drawingml/2006/main">
             <a:pPr>
+              <a:buNone/>
               <a:defRPr sz="6450" b="1">
                 <a:solidFill>
                   <a:srgbClr val="FFFFFF"/>
@@ -3211,7 +4237,7 @@
       </p:sp>
       <p:sp>
         <p:nvSpPr>
-          <p:cNvPr id="3" name="">
+          <p:cNvPr id="3" name="Rectangle 2">
             <a:extLst xmlns:a="http://schemas.openxmlformats.org/drawingml/2006/main">
               <a:ext uri="{FF2B5EF4-FFF2-40B4-BE49-F238E27FC236}">
                 <a16:creationId xmlns:a16="http://schemas.microsoft.com/office/drawing/2014/main" id="{42349FA6-E904-49B4-9B17-D866BB04A032}"/>
@@ -3252,9 +4278,100 @@
                 <a:cs typeface="Arial"/>
               </a:defRPr>
             </a:defPPr>
+            <a:lvl1pPr>
+              <a:defRPr sz="2400" b="0">
+                <a:solidFill>
+                  <a:srgbClr val="E5EAF3"/>
+                </a:solidFill>
+                <a:latin typeface="Arial"/>
+                <a:ea typeface="Arial"/>
+                <a:cs typeface="Arial"/>
+              </a:defRPr>
+            </a:lvl1pPr>
+            <a:lvl2pPr>
+              <a:defRPr sz="2400" b="0">
+                <a:solidFill>
+                  <a:srgbClr val="E5EAF3"/>
+                </a:solidFill>
+                <a:latin typeface="Arial"/>
+                <a:ea typeface="Arial"/>
+                <a:cs typeface="Arial"/>
+              </a:defRPr>
+            </a:lvl2pPr>
+            <a:lvl3pPr>
+              <a:defRPr sz="2400" b="0">
+                <a:solidFill>
+                  <a:srgbClr val="E5EAF3"/>
+                </a:solidFill>
+                <a:latin typeface="Arial"/>
+                <a:ea typeface="Arial"/>
+                <a:cs typeface="Arial"/>
+              </a:defRPr>
+            </a:lvl3pPr>
+            <a:lvl4pPr>
+              <a:defRPr sz="2400" b="0">
+                <a:solidFill>
+                  <a:srgbClr val="E5EAF3"/>
+                </a:solidFill>
+                <a:latin typeface="Arial"/>
+                <a:ea typeface="Arial"/>
+                <a:cs typeface="Arial"/>
+              </a:defRPr>
+            </a:lvl4pPr>
+            <a:lvl5pPr>
+              <a:defRPr sz="2400" b="0">
+                <a:solidFill>
+                  <a:srgbClr val="E5EAF3"/>
+                </a:solidFill>
+                <a:latin typeface="Arial"/>
+                <a:ea typeface="Arial"/>
+                <a:cs typeface="Arial"/>
+              </a:defRPr>
+            </a:lvl5pPr>
+            <a:lvl6pPr>
+              <a:defRPr sz="2400" b="0">
+                <a:solidFill>
+                  <a:srgbClr val="E5EAF3"/>
+                </a:solidFill>
+                <a:latin typeface="Arial"/>
+                <a:ea typeface="Arial"/>
+                <a:cs typeface="Arial"/>
+              </a:defRPr>
+            </a:lvl6pPr>
+            <a:lvl7pPr>
+              <a:defRPr sz="2400" b="0">
+                <a:solidFill>
+                  <a:srgbClr val="E5EAF3"/>
+                </a:solidFill>
+                <a:latin typeface="Arial"/>
+                <a:ea typeface="Arial"/>
+                <a:cs typeface="Arial"/>
+              </a:defRPr>
+            </a:lvl7pPr>
+            <a:lvl8pPr>
+              <a:defRPr sz="2400" b="0">
+                <a:solidFill>
+                  <a:srgbClr val="E5EAF3"/>
+                </a:solidFill>
+                <a:latin typeface="Arial"/>
+                <a:ea typeface="Arial"/>
+                <a:cs typeface="Arial"/>
+              </a:defRPr>
+            </a:lvl8pPr>
+            <a:lvl9pPr>
+              <a:defRPr sz="2400" b="0">
+                <a:solidFill>
+                  <a:srgbClr val="E5EAF3"/>
+                </a:solidFill>
+                <a:latin typeface="Arial"/>
+                <a:ea typeface="Arial"/>
+                <a:cs typeface="Arial"/>
+              </a:defRPr>
+            </a:lvl9pPr>
           </a:lstStyle>
           <a:p xmlns:a="http://schemas.openxmlformats.org/drawingml/2006/main">
             <a:pPr>
+              <a:buNone/>
               <a:defRPr sz="2400" b="0">
                 <a:solidFill>
                   <a:srgbClr val="E5EAF3"/>
@@ -3273,14 +4390,14 @@
                 <a:ea typeface="Arial"/>
                 <a:cs typeface="Arial"/>
               </a:rPr>
-              <a:t>A personal purchase clock for customer retention</a:t>
+              <a:t>Retention decisions from each shopper’s reorder history</a:t>
             </a:r>
           </a:p>
         </p:txBody>
       </p:sp>
       <p:sp>
         <p:nvSpPr>
-          <p:cNvPr id="4" name="">
+          <p:cNvPr id="4" name="Straight Connector 3">
             <a:extLst xmlns:a="http://schemas.openxmlformats.org/drawingml/2006/main">
               <a:ext uri="{FF2B5EF4-FFF2-40B4-BE49-F238E27FC236}">
                 <a16:creationId xmlns:a16="http://schemas.microsoft.com/office/drawing/2014/main" id="{1876AC8C-FFB8-4EFA-B7B4-917316435CF9}"/>
@@ -3307,10 +4424,17 @@
             <a:prstDash val="solid"/>
           </a:ln>
         </p:spPr>
+        <p:txBody>
+          <a:bodyPr xmlns:a="http://schemas.openxmlformats.org/drawingml/2006/main"/>
+          <a:lstStyle xmlns:a="http://schemas.openxmlformats.org/drawingml/2006/main"/>
+          <a:p xmlns:a="http://schemas.openxmlformats.org/drawingml/2006/main">
+            <a:endParaRPr/>
+          </a:p>
+        </p:txBody>
       </p:sp>
       <p:sp>
         <p:nvSpPr>
-          <p:cNvPr id="5" name="">
+          <p:cNvPr id="5" name="Rectangle 4">
             <a:extLst xmlns:a="http://schemas.openxmlformats.org/drawingml/2006/main">
               <a:ext uri="{FF2B5EF4-FFF2-40B4-BE49-F238E27FC236}">
                 <a16:creationId xmlns:a16="http://schemas.microsoft.com/office/drawing/2014/main" id="{C6D25DBD-9A41-4B68-819E-B46D5134FDC0}"/>
@@ -3351,9 +4475,100 @@
                 <a:cs typeface="Arial"/>
               </a:defRPr>
             </a:defPPr>
+            <a:lvl1pPr>
+              <a:defRPr sz="1875" b="0">
+                <a:solidFill>
+                  <a:srgbClr val="FFFFFF"/>
+                </a:solidFill>
+                <a:latin typeface="Arial"/>
+                <a:ea typeface="Arial"/>
+                <a:cs typeface="Arial"/>
+              </a:defRPr>
+            </a:lvl1pPr>
+            <a:lvl2pPr>
+              <a:defRPr sz="1875" b="0">
+                <a:solidFill>
+                  <a:srgbClr val="FFFFFF"/>
+                </a:solidFill>
+                <a:latin typeface="Arial"/>
+                <a:ea typeface="Arial"/>
+                <a:cs typeface="Arial"/>
+              </a:defRPr>
+            </a:lvl2pPr>
+            <a:lvl3pPr>
+              <a:defRPr sz="1875" b="0">
+                <a:solidFill>
+                  <a:srgbClr val="FFFFFF"/>
+                </a:solidFill>
+                <a:latin typeface="Arial"/>
+                <a:ea typeface="Arial"/>
+                <a:cs typeface="Arial"/>
+              </a:defRPr>
+            </a:lvl3pPr>
+            <a:lvl4pPr>
+              <a:defRPr sz="1875" b="0">
+                <a:solidFill>
+                  <a:srgbClr val="FFFFFF"/>
+                </a:solidFill>
+                <a:latin typeface="Arial"/>
+                <a:ea typeface="Arial"/>
+                <a:cs typeface="Arial"/>
+              </a:defRPr>
+            </a:lvl4pPr>
+            <a:lvl5pPr>
+              <a:defRPr sz="1875" b="0">
+                <a:solidFill>
+                  <a:srgbClr val="FFFFFF"/>
+                </a:solidFill>
+                <a:latin typeface="Arial"/>
+                <a:ea typeface="Arial"/>
+                <a:cs typeface="Arial"/>
+              </a:defRPr>
+            </a:lvl5pPr>
+            <a:lvl6pPr>
+              <a:defRPr sz="1875" b="0">
+                <a:solidFill>
+                  <a:srgbClr val="FFFFFF"/>
+                </a:solidFill>
+                <a:latin typeface="Arial"/>
+                <a:ea typeface="Arial"/>
+                <a:cs typeface="Arial"/>
+              </a:defRPr>
+            </a:lvl6pPr>
+            <a:lvl7pPr>
+              <a:defRPr sz="1875" b="0">
+                <a:solidFill>
+                  <a:srgbClr val="FFFFFF"/>
+                </a:solidFill>
+                <a:latin typeface="Arial"/>
+                <a:ea typeface="Arial"/>
+                <a:cs typeface="Arial"/>
+              </a:defRPr>
+            </a:lvl7pPr>
+            <a:lvl8pPr>
+              <a:defRPr sz="1875" b="0">
+                <a:solidFill>
+                  <a:srgbClr val="FFFFFF"/>
+                </a:solidFill>
+                <a:latin typeface="Arial"/>
+                <a:ea typeface="Arial"/>
+                <a:cs typeface="Arial"/>
+              </a:defRPr>
+            </a:lvl8pPr>
+            <a:lvl9pPr>
+              <a:defRPr sz="1875" b="0">
+                <a:solidFill>
+                  <a:srgbClr val="FFFFFF"/>
+                </a:solidFill>
+                <a:latin typeface="Arial"/>
+                <a:ea typeface="Arial"/>
+                <a:cs typeface="Arial"/>
+              </a:defRPr>
+            </a:lvl9pPr>
           </a:lstStyle>
           <a:p xmlns:a="http://schemas.openxmlformats.org/drawingml/2006/main">
             <a:pPr>
+              <a:buNone/>
               <a:defRPr sz="1875" b="0">
                 <a:solidFill>
                   <a:srgbClr val="FFFFFF"/>
@@ -3372,14 +4587,14 @@
                 <a:ea typeface="Arial"/>
                 <a:cs typeface="Arial"/>
               </a:rPr>
-              <a:t>Notice when a regular shopper’s routine changes. Give a merchant evidence for a thoughtful next step.</a:t>
+              <a:t>Rhythm flags repeat shoppers past a personal reorder threshold, then shows the purchase history behind each signal.</a:t>
             </a:r>
           </a:p>
         </p:txBody>
       </p:sp>
       <p:sp>
         <p:nvSpPr>
-          <p:cNvPr id="6" name="">
+          <p:cNvPr id="6" name="Rectangle 5">
             <a:extLst xmlns:a="http://schemas.openxmlformats.org/drawingml/2006/main">
               <a:ext uri="{FF2B5EF4-FFF2-40B4-BE49-F238E27FC236}">
                 <a16:creationId xmlns:a16="http://schemas.microsoft.com/office/drawing/2014/main" id="{284F0D83-EADD-42CE-9452-E020F97EA197}"/>
@@ -3407,7 +4622,7 @@
         </p:spPr>
         <p:txBody>
           <a:bodyPr xmlns:a="http://schemas.openxmlformats.org/drawingml/2006/main" wrap="square" lIns="0" tIns="0" rIns="0" bIns="0" anchor="ctr">
-            <a:normAutofit fontScale="100000"/>
+            <a:normAutofit/>
           </a:bodyPr>
           <a:lstStyle xmlns:a="http://schemas.openxmlformats.org/drawingml/2006/main">
             <a:defPPr>
@@ -3420,9 +4635,100 @@
                 <a:cs typeface="Arial"/>
               </a:defRPr>
             </a:defPPr>
+            <a:lvl1pPr>
+              <a:defRPr sz="1200" b="1">
+                <a:solidFill>
+                  <a:srgbClr val="AFC2FF"/>
+                </a:solidFill>
+                <a:latin typeface="Arial"/>
+                <a:ea typeface="Arial"/>
+                <a:cs typeface="Arial"/>
+              </a:defRPr>
+            </a:lvl1pPr>
+            <a:lvl2pPr>
+              <a:defRPr sz="1200" b="1">
+                <a:solidFill>
+                  <a:srgbClr val="AFC2FF"/>
+                </a:solidFill>
+                <a:latin typeface="Arial"/>
+                <a:ea typeface="Arial"/>
+                <a:cs typeface="Arial"/>
+              </a:defRPr>
+            </a:lvl2pPr>
+            <a:lvl3pPr>
+              <a:defRPr sz="1200" b="1">
+                <a:solidFill>
+                  <a:srgbClr val="AFC2FF"/>
+                </a:solidFill>
+                <a:latin typeface="Arial"/>
+                <a:ea typeface="Arial"/>
+                <a:cs typeface="Arial"/>
+              </a:defRPr>
+            </a:lvl3pPr>
+            <a:lvl4pPr>
+              <a:defRPr sz="1200" b="1">
+                <a:solidFill>
+                  <a:srgbClr val="AFC2FF"/>
+                </a:solidFill>
+                <a:latin typeface="Arial"/>
+                <a:ea typeface="Arial"/>
+                <a:cs typeface="Arial"/>
+              </a:defRPr>
+            </a:lvl4pPr>
+            <a:lvl5pPr>
+              <a:defRPr sz="1200" b="1">
+                <a:solidFill>
+                  <a:srgbClr val="AFC2FF"/>
+                </a:solidFill>
+                <a:latin typeface="Arial"/>
+                <a:ea typeface="Arial"/>
+                <a:cs typeface="Arial"/>
+              </a:defRPr>
+            </a:lvl5pPr>
+            <a:lvl6pPr>
+              <a:defRPr sz="1200" b="1">
+                <a:solidFill>
+                  <a:srgbClr val="AFC2FF"/>
+                </a:solidFill>
+                <a:latin typeface="Arial"/>
+                <a:ea typeface="Arial"/>
+                <a:cs typeface="Arial"/>
+              </a:defRPr>
+            </a:lvl6pPr>
+            <a:lvl7pPr>
+              <a:defRPr sz="1200" b="1">
+                <a:solidFill>
+                  <a:srgbClr val="AFC2FF"/>
+                </a:solidFill>
+                <a:latin typeface="Arial"/>
+                <a:ea typeface="Arial"/>
+                <a:cs typeface="Arial"/>
+              </a:defRPr>
+            </a:lvl7pPr>
+            <a:lvl8pPr>
+              <a:defRPr sz="1200" b="1">
+                <a:solidFill>
+                  <a:srgbClr val="AFC2FF"/>
+                </a:solidFill>
+                <a:latin typeface="Arial"/>
+                <a:ea typeface="Arial"/>
+                <a:cs typeface="Arial"/>
+              </a:defRPr>
+            </a:lvl8pPr>
+            <a:lvl9pPr>
+              <a:defRPr sz="1200" b="1">
+                <a:solidFill>
+                  <a:srgbClr val="AFC2FF"/>
+                </a:solidFill>
+                <a:latin typeface="Arial"/>
+                <a:ea typeface="Arial"/>
+                <a:cs typeface="Arial"/>
+              </a:defRPr>
+            </a:lvl9pPr>
           </a:lstStyle>
           <a:p xmlns:a="http://schemas.openxmlformats.org/drawingml/2006/main">
             <a:pPr>
+              <a:buNone/>
               <a:defRPr sz="1200" b="1">
                 <a:solidFill>
                   <a:srgbClr val="AFC2FF"/>
@@ -3477,7 +4783,7 @@
       </p:grpSpPr>
       <p:sp>
         <p:nvSpPr>
-          <p:cNvPr id="10" name="">
+          <p:cNvPr id="10" name="Rectangle 9">
             <a:extLst xmlns:a="http://schemas.openxmlformats.org/drawingml/2006/main">
               <a:ext uri="{FF2B5EF4-FFF2-40B4-BE49-F238E27FC236}">
                 <a16:creationId xmlns:a16="http://schemas.microsoft.com/office/drawing/2014/main" id="{79F8BC5D-4484-498D-8A0B-15B7A87E39BE}"/>
@@ -3505,7 +4811,7 @@
         </p:spPr>
         <p:txBody>
           <a:bodyPr xmlns:a="http://schemas.openxmlformats.org/drawingml/2006/main" wrap="square" lIns="0" tIns="0" rIns="0" bIns="0" anchor="ctr">
-            <a:normAutofit fontScale="100000"/>
+            <a:normAutofit/>
           </a:bodyPr>
           <a:lstStyle xmlns:a="http://schemas.openxmlformats.org/drawingml/2006/main">
             <a:defPPr>
@@ -3518,9 +4824,100 @@
                 <a:cs typeface="Arial"/>
               </a:defRPr>
             </a:defPPr>
+            <a:lvl1pPr>
+              <a:defRPr sz="1050" b="1">
+                <a:solidFill>
+                  <a:srgbClr val="315BCE"/>
+                </a:solidFill>
+                <a:latin typeface="Arial"/>
+                <a:ea typeface="Arial"/>
+                <a:cs typeface="Arial"/>
+              </a:defRPr>
+            </a:lvl1pPr>
+            <a:lvl2pPr>
+              <a:defRPr sz="1050" b="1">
+                <a:solidFill>
+                  <a:srgbClr val="315BCE"/>
+                </a:solidFill>
+                <a:latin typeface="Arial"/>
+                <a:ea typeface="Arial"/>
+                <a:cs typeface="Arial"/>
+              </a:defRPr>
+            </a:lvl2pPr>
+            <a:lvl3pPr>
+              <a:defRPr sz="1050" b="1">
+                <a:solidFill>
+                  <a:srgbClr val="315BCE"/>
+                </a:solidFill>
+                <a:latin typeface="Arial"/>
+                <a:ea typeface="Arial"/>
+                <a:cs typeface="Arial"/>
+              </a:defRPr>
+            </a:lvl3pPr>
+            <a:lvl4pPr>
+              <a:defRPr sz="1050" b="1">
+                <a:solidFill>
+                  <a:srgbClr val="315BCE"/>
+                </a:solidFill>
+                <a:latin typeface="Arial"/>
+                <a:ea typeface="Arial"/>
+                <a:cs typeface="Arial"/>
+              </a:defRPr>
+            </a:lvl4pPr>
+            <a:lvl5pPr>
+              <a:defRPr sz="1050" b="1">
+                <a:solidFill>
+                  <a:srgbClr val="315BCE"/>
+                </a:solidFill>
+                <a:latin typeface="Arial"/>
+                <a:ea typeface="Arial"/>
+                <a:cs typeface="Arial"/>
+              </a:defRPr>
+            </a:lvl5pPr>
+            <a:lvl6pPr>
+              <a:defRPr sz="1050" b="1">
+                <a:solidFill>
+                  <a:srgbClr val="315BCE"/>
+                </a:solidFill>
+                <a:latin typeface="Arial"/>
+                <a:ea typeface="Arial"/>
+                <a:cs typeface="Arial"/>
+              </a:defRPr>
+            </a:lvl6pPr>
+            <a:lvl7pPr>
+              <a:defRPr sz="1050" b="1">
+                <a:solidFill>
+                  <a:srgbClr val="315BCE"/>
+                </a:solidFill>
+                <a:latin typeface="Arial"/>
+                <a:ea typeface="Arial"/>
+                <a:cs typeface="Arial"/>
+              </a:defRPr>
+            </a:lvl7pPr>
+            <a:lvl8pPr>
+              <a:defRPr sz="1050" b="1">
+                <a:solidFill>
+                  <a:srgbClr val="315BCE"/>
+                </a:solidFill>
+                <a:latin typeface="Arial"/>
+                <a:ea typeface="Arial"/>
+                <a:cs typeface="Arial"/>
+              </a:defRPr>
+            </a:lvl8pPr>
+            <a:lvl9pPr>
+              <a:defRPr sz="1050" b="1">
+                <a:solidFill>
+                  <a:srgbClr val="315BCE"/>
+                </a:solidFill>
+                <a:latin typeface="Arial"/>
+                <a:ea typeface="Arial"/>
+                <a:cs typeface="Arial"/>
+              </a:defRPr>
+            </a:lvl9pPr>
           </a:lstStyle>
           <a:p xmlns:a="http://schemas.openxmlformats.org/drawingml/2006/main">
             <a:pPr>
+              <a:buNone/>
               <a:defRPr sz="1050" b="1">
                 <a:solidFill>
                   <a:srgbClr val="315BCE"/>
@@ -3546,7 +4943,7 @@
       </p:sp>
       <p:sp>
         <p:nvSpPr>
-          <p:cNvPr id="2" name="">
+          <p:cNvPr id="2" name="Rectangle 1">
             <a:extLst xmlns:a="http://schemas.openxmlformats.org/drawingml/2006/main">
               <a:ext uri="{FF2B5EF4-FFF2-40B4-BE49-F238E27FC236}">
                 <a16:creationId xmlns:a16="http://schemas.microsoft.com/office/drawing/2014/main" id="{52EA869A-6625-46D2-9EE1-1FF3E3A2EBD2}"/>
@@ -3574,7 +4971,7 @@
         </p:spPr>
         <p:txBody>
           <a:bodyPr xmlns:a="http://schemas.openxmlformats.org/drawingml/2006/main" wrap="square" lIns="0" tIns="0" rIns="0" bIns="0" anchor="ctr">
-            <a:normAutofit fontScale="100000"/>
+            <a:normAutofit/>
           </a:bodyPr>
           <a:lstStyle xmlns:a="http://schemas.openxmlformats.org/drawingml/2006/main">
             <a:defPPr>
@@ -3587,9 +4984,100 @@
                 <a:cs typeface="Arial"/>
               </a:defRPr>
             </a:defPPr>
+            <a:lvl1pPr>
+              <a:defRPr sz="3000" b="1">
+                <a:solidFill>
+                  <a:srgbClr val="16202B"/>
+                </a:solidFill>
+                <a:latin typeface="Arial"/>
+                <a:ea typeface="Arial"/>
+                <a:cs typeface="Arial"/>
+              </a:defRPr>
+            </a:lvl1pPr>
+            <a:lvl2pPr>
+              <a:defRPr sz="3000" b="1">
+                <a:solidFill>
+                  <a:srgbClr val="16202B"/>
+                </a:solidFill>
+                <a:latin typeface="Arial"/>
+                <a:ea typeface="Arial"/>
+                <a:cs typeface="Arial"/>
+              </a:defRPr>
+            </a:lvl2pPr>
+            <a:lvl3pPr>
+              <a:defRPr sz="3000" b="1">
+                <a:solidFill>
+                  <a:srgbClr val="16202B"/>
+                </a:solidFill>
+                <a:latin typeface="Arial"/>
+                <a:ea typeface="Arial"/>
+                <a:cs typeface="Arial"/>
+              </a:defRPr>
+            </a:lvl3pPr>
+            <a:lvl4pPr>
+              <a:defRPr sz="3000" b="1">
+                <a:solidFill>
+                  <a:srgbClr val="16202B"/>
+                </a:solidFill>
+                <a:latin typeface="Arial"/>
+                <a:ea typeface="Arial"/>
+                <a:cs typeface="Arial"/>
+              </a:defRPr>
+            </a:lvl4pPr>
+            <a:lvl5pPr>
+              <a:defRPr sz="3000" b="1">
+                <a:solidFill>
+                  <a:srgbClr val="16202B"/>
+                </a:solidFill>
+                <a:latin typeface="Arial"/>
+                <a:ea typeface="Arial"/>
+                <a:cs typeface="Arial"/>
+              </a:defRPr>
+            </a:lvl5pPr>
+            <a:lvl6pPr>
+              <a:defRPr sz="3000" b="1">
+                <a:solidFill>
+                  <a:srgbClr val="16202B"/>
+                </a:solidFill>
+                <a:latin typeface="Arial"/>
+                <a:ea typeface="Arial"/>
+                <a:cs typeface="Arial"/>
+              </a:defRPr>
+            </a:lvl6pPr>
+            <a:lvl7pPr>
+              <a:defRPr sz="3000" b="1">
+                <a:solidFill>
+                  <a:srgbClr val="16202B"/>
+                </a:solidFill>
+                <a:latin typeface="Arial"/>
+                <a:ea typeface="Arial"/>
+                <a:cs typeface="Arial"/>
+              </a:defRPr>
+            </a:lvl7pPr>
+            <a:lvl8pPr>
+              <a:defRPr sz="3000" b="1">
+                <a:solidFill>
+                  <a:srgbClr val="16202B"/>
+                </a:solidFill>
+                <a:latin typeface="Arial"/>
+                <a:ea typeface="Arial"/>
+                <a:cs typeface="Arial"/>
+              </a:defRPr>
+            </a:lvl8pPr>
+            <a:lvl9pPr>
+              <a:defRPr sz="3000" b="1">
+                <a:solidFill>
+                  <a:srgbClr val="16202B"/>
+                </a:solidFill>
+                <a:latin typeface="Arial"/>
+                <a:ea typeface="Arial"/>
+                <a:cs typeface="Arial"/>
+              </a:defRPr>
+            </a:lvl9pPr>
           </a:lstStyle>
           <a:p xmlns:a="http://schemas.openxmlformats.org/drawingml/2006/main">
             <a:pPr>
+              <a:buNone/>
               <a:defRPr sz="3000" b="1">
                 <a:solidFill>
                   <a:srgbClr val="16202B"/>
@@ -3615,7 +5103,7 @@
       </p:sp>
       <p:sp>
         <p:nvSpPr>
-          <p:cNvPr id="3" name="">
+          <p:cNvPr id="3" name="Rectangle 2">
             <a:extLst xmlns:a="http://schemas.openxmlformats.org/drawingml/2006/main">
               <a:ext uri="{FF2B5EF4-FFF2-40B4-BE49-F238E27FC236}">
                 <a16:creationId xmlns:a16="http://schemas.microsoft.com/office/drawing/2014/main" id="{16E9577A-991D-4E41-9B06-228EB95B0B12}"/>
@@ -3643,7 +5131,7 @@
         </p:spPr>
         <p:txBody>
           <a:bodyPr xmlns:a="http://schemas.openxmlformats.org/drawingml/2006/main" wrap="square" lIns="0" tIns="0" rIns="0" bIns="0" anchor="ctr">
-            <a:normAutofit fontScale="100000"/>
+            <a:normAutofit/>
           </a:bodyPr>
           <a:lstStyle xmlns:a="http://schemas.openxmlformats.org/drawingml/2006/main">
             <a:defPPr algn="r">
@@ -3656,9 +5144,100 @@
                 <a:cs typeface="Arial"/>
               </a:defRPr>
             </a:defPPr>
+            <a:lvl1pPr algn="r">
+              <a:defRPr sz="1050" b="1">
+                <a:solidFill>
+                  <a:srgbClr val="536170"/>
+                </a:solidFill>
+                <a:latin typeface="Arial"/>
+                <a:ea typeface="Arial"/>
+                <a:cs typeface="Arial"/>
+              </a:defRPr>
+            </a:lvl1pPr>
+            <a:lvl2pPr algn="r">
+              <a:defRPr sz="1050" b="1">
+                <a:solidFill>
+                  <a:srgbClr val="536170"/>
+                </a:solidFill>
+                <a:latin typeface="Arial"/>
+                <a:ea typeface="Arial"/>
+                <a:cs typeface="Arial"/>
+              </a:defRPr>
+            </a:lvl2pPr>
+            <a:lvl3pPr algn="r">
+              <a:defRPr sz="1050" b="1">
+                <a:solidFill>
+                  <a:srgbClr val="536170"/>
+                </a:solidFill>
+                <a:latin typeface="Arial"/>
+                <a:ea typeface="Arial"/>
+                <a:cs typeface="Arial"/>
+              </a:defRPr>
+            </a:lvl3pPr>
+            <a:lvl4pPr algn="r">
+              <a:defRPr sz="1050" b="1">
+                <a:solidFill>
+                  <a:srgbClr val="536170"/>
+                </a:solidFill>
+                <a:latin typeface="Arial"/>
+                <a:ea typeface="Arial"/>
+                <a:cs typeface="Arial"/>
+              </a:defRPr>
+            </a:lvl4pPr>
+            <a:lvl5pPr algn="r">
+              <a:defRPr sz="1050" b="1">
+                <a:solidFill>
+                  <a:srgbClr val="536170"/>
+                </a:solidFill>
+                <a:latin typeface="Arial"/>
+                <a:ea typeface="Arial"/>
+                <a:cs typeface="Arial"/>
+              </a:defRPr>
+            </a:lvl5pPr>
+            <a:lvl6pPr algn="r">
+              <a:defRPr sz="1050" b="1">
+                <a:solidFill>
+                  <a:srgbClr val="536170"/>
+                </a:solidFill>
+                <a:latin typeface="Arial"/>
+                <a:ea typeface="Arial"/>
+                <a:cs typeface="Arial"/>
+              </a:defRPr>
+            </a:lvl6pPr>
+            <a:lvl7pPr algn="r">
+              <a:defRPr sz="1050" b="1">
+                <a:solidFill>
+                  <a:srgbClr val="536170"/>
+                </a:solidFill>
+                <a:latin typeface="Arial"/>
+                <a:ea typeface="Arial"/>
+                <a:cs typeface="Arial"/>
+              </a:defRPr>
+            </a:lvl7pPr>
+            <a:lvl8pPr algn="r">
+              <a:defRPr sz="1050" b="1">
+                <a:solidFill>
+                  <a:srgbClr val="536170"/>
+                </a:solidFill>
+                <a:latin typeface="Arial"/>
+                <a:ea typeface="Arial"/>
+                <a:cs typeface="Arial"/>
+              </a:defRPr>
+            </a:lvl8pPr>
+            <a:lvl9pPr algn="r">
+              <a:defRPr sz="1050" b="1">
+                <a:solidFill>
+                  <a:srgbClr val="536170"/>
+                </a:solidFill>
+                <a:latin typeface="Arial"/>
+                <a:ea typeface="Arial"/>
+                <a:cs typeface="Arial"/>
+              </a:defRPr>
+            </a:lvl9pPr>
           </a:lstStyle>
           <a:p xmlns:a="http://schemas.openxmlformats.org/drawingml/2006/main">
             <a:pPr algn="r">
+              <a:buNone/>
               <a:defRPr sz="1050" b="1">
                 <a:solidFill>
                   <a:srgbClr val="536170"/>
@@ -3684,7 +5263,7 @@
       </p:sp>
       <p:sp>
         <p:nvSpPr>
-          <p:cNvPr id="4" name="">
+          <p:cNvPr id="4" name="Rectangle 3">
             <a:extLst xmlns:a="http://schemas.openxmlformats.org/drawingml/2006/main">
               <a:ext uri="{FF2B5EF4-FFF2-40B4-BE49-F238E27FC236}">
                 <a16:creationId xmlns:a16="http://schemas.microsoft.com/office/drawing/2014/main" id="{08811DF6-48E4-44F6-B134-0C200EE4D667}"/>
@@ -3712,7 +5291,7 @@
         </p:spPr>
         <p:txBody>
           <a:bodyPr xmlns:a="http://schemas.openxmlformats.org/drawingml/2006/main" wrap="square" lIns="0" tIns="0" rIns="0" bIns="0" anchor="ctr">
-            <a:normAutofit fontScale="100000"/>
+            <a:normAutofit/>
           </a:bodyPr>
           <a:lstStyle xmlns:a="http://schemas.openxmlformats.org/drawingml/2006/main">
             <a:defPPr>
@@ -3725,9 +5304,100 @@
                 <a:cs typeface="Arial"/>
               </a:defRPr>
             </a:defPPr>
+            <a:lvl1pPr>
+              <a:defRPr sz="1125" b="1">
+                <a:solidFill>
+                  <a:srgbClr val="315BCE"/>
+                </a:solidFill>
+                <a:latin typeface="Arial"/>
+                <a:ea typeface="Arial"/>
+                <a:cs typeface="Arial"/>
+              </a:defRPr>
+            </a:lvl1pPr>
+            <a:lvl2pPr>
+              <a:defRPr sz="1125" b="1">
+                <a:solidFill>
+                  <a:srgbClr val="315BCE"/>
+                </a:solidFill>
+                <a:latin typeface="Arial"/>
+                <a:ea typeface="Arial"/>
+                <a:cs typeface="Arial"/>
+              </a:defRPr>
+            </a:lvl2pPr>
+            <a:lvl3pPr>
+              <a:defRPr sz="1125" b="1">
+                <a:solidFill>
+                  <a:srgbClr val="315BCE"/>
+                </a:solidFill>
+                <a:latin typeface="Arial"/>
+                <a:ea typeface="Arial"/>
+                <a:cs typeface="Arial"/>
+              </a:defRPr>
+            </a:lvl3pPr>
+            <a:lvl4pPr>
+              <a:defRPr sz="1125" b="1">
+                <a:solidFill>
+                  <a:srgbClr val="315BCE"/>
+                </a:solidFill>
+                <a:latin typeface="Arial"/>
+                <a:ea typeface="Arial"/>
+                <a:cs typeface="Arial"/>
+              </a:defRPr>
+            </a:lvl4pPr>
+            <a:lvl5pPr>
+              <a:defRPr sz="1125" b="1">
+                <a:solidFill>
+                  <a:srgbClr val="315BCE"/>
+                </a:solidFill>
+                <a:latin typeface="Arial"/>
+                <a:ea typeface="Arial"/>
+                <a:cs typeface="Arial"/>
+              </a:defRPr>
+            </a:lvl5pPr>
+            <a:lvl6pPr>
+              <a:defRPr sz="1125" b="1">
+                <a:solidFill>
+                  <a:srgbClr val="315BCE"/>
+                </a:solidFill>
+                <a:latin typeface="Arial"/>
+                <a:ea typeface="Arial"/>
+                <a:cs typeface="Arial"/>
+              </a:defRPr>
+            </a:lvl6pPr>
+            <a:lvl7pPr>
+              <a:defRPr sz="1125" b="1">
+                <a:solidFill>
+                  <a:srgbClr val="315BCE"/>
+                </a:solidFill>
+                <a:latin typeface="Arial"/>
+                <a:ea typeface="Arial"/>
+                <a:cs typeface="Arial"/>
+              </a:defRPr>
+            </a:lvl7pPr>
+            <a:lvl8pPr>
+              <a:defRPr sz="1125" b="1">
+                <a:solidFill>
+                  <a:srgbClr val="315BCE"/>
+                </a:solidFill>
+                <a:latin typeface="Arial"/>
+                <a:ea typeface="Arial"/>
+                <a:cs typeface="Arial"/>
+              </a:defRPr>
+            </a:lvl8pPr>
+            <a:lvl9pPr>
+              <a:defRPr sz="1125" b="1">
+                <a:solidFill>
+                  <a:srgbClr val="315BCE"/>
+                </a:solidFill>
+                <a:latin typeface="Arial"/>
+                <a:ea typeface="Arial"/>
+                <a:cs typeface="Arial"/>
+              </a:defRPr>
+            </a:lvl9pPr>
           </a:lstStyle>
           <a:p xmlns:a="http://schemas.openxmlformats.org/drawingml/2006/main">
             <a:pPr>
+              <a:buNone/>
               <a:defRPr sz="1125" b="1">
                 <a:solidFill>
                   <a:srgbClr val="315BCE"/>
@@ -3753,7 +5423,7 @@
       </p:sp>
       <p:sp>
         <p:nvSpPr>
-          <p:cNvPr id="5" name="">
+          <p:cNvPr id="5" name="Rectangle 4">
             <a:extLst xmlns:a="http://schemas.openxmlformats.org/drawingml/2006/main">
               <a:ext uri="{FF2B5EF4-FFF2-40B4-BE49-F238E27FC236}">
                 <a16:creationId xmlns:a16="http://schemas.microsoft.com/office/drawing/2014/main" id="{654BCE06-49FD-4D87-9FC3-87B0FFC228CA}"/>
@@ -3781,7 +5451,7 @@
         </p:spPr>
         <p:txBody>
           <a:bodyPr xmlns:a="http://schemas.openxmlformats.org/drawingml/2006/main" wrap="square" lIns="0" tIns="0" rIns="0" bIns="0" anchor="ctr">
-            <a:normAutofit fontScale="100000"/>
+            <a:normAutofit/>
           </a:bodyPr>
           <a:lstStyle xmlns:a="http://schemas.openxmlformats.org/drawingml/2006/main">
             <a:defPPr>
@@ -3794,9 +5464,100 @@
                 <a:cs typeface="Arial"/>
               </a:defRPr>
             </a:defPPr>
+            <a:lvl1pPr>
+              <a:defRPr sz="2175" b="1">
+                <a:solidFill>
+                  <a:srgbClr val="16202B"/>
+                </a:solidFill>
+                <a:latin typeface="Arial"/>
+                <a:ea typeface="Arial"/>
+                <a:cs typeface="Arial"/>
+              </a:defRPr>
+            </a:lvl1pPr>
+            <a:lvl2pPr>
+              <a:defRPr sz="2175" b="1">
+                <a:solidFill>
+                  <a:srgbClr val="16202B"/>
+                </a:solidFill>
+                <a:latin typeface="Arial"/>
+                <a:ea typeface="Arial"/>
+                <a:cs typeface="Arial"/>
+              </a:defRPr>
+            </a:lvl2pPr>
+            <a:lvl3pPr>
+              <a:defRPr sz="2175" b="1">
+                <a:solidFill>
+                  <a:srgbClr val="16202B"/>
+                </a:solidFill>
+                <a:latin typeface="Arial"/>
+                <a:ea typeface="Arial"/>
+                <a:cs typeface="Arial"/>
+              </a:defRPr>
+            </a:lvl3pPr>
+            <a:lvl4pPr>
+              <a:defRPr sz="2175" b="1">
+                <a:solidFill>
+                  <a:srgbClr val="16202B"/>
+                </a:solidFill>
+                <a:latin typeface="Arial"/>
+                <a:ea typeface="Arial"/>
+                <a:cs typeface="Arial"/>
+              </a:defRPr>
+            </a:lvl4pPr>
+            <a:lvl5pPr>
+              <a:defRPr sz="2175" b="1">
+                <a:solidFill>
+                  <a:srgbClr val="16202B"/>
+                </a:solidFill>
+                <a:latin typeface="Arial"/>
+                <a:ea typeface="Arial"/>
+                <a:cs typeface="Arial"/>
+              </a:defRPr>
+            </a:lvl5pPr>
+            <a:lvl6pPr>
+              <a:defRPr sz="2175" b="1">
+                <a:solidFill>
+                  <a:srgbClr val="16202B"/>
+                </a:solidFill>
+                <a:latin typeface="Arial"/>
+                <a:ea typeface="Arial"/>
+                <a:cs typeface="Arial"/>
+              </a:defRPr>
+            </a:lvl6pPr>
+            <a:lvl7pPr>
+              <a:defRPr sz="2175" b="1">
+                <a:solidFill>
+                  <a:srgbClr val="16202B"/>
+                </a:solidFill>
+                <a:latin typeface="Arial"/>
+                <a:ea typeface="Arial"/>
+                <a:cs typeface="Arial"/>
+              </a:defRPr>
+            </a:lvl7pPr>
+            <a:lvl8pPr>
+              <a:defRPr sz="2175" b="1">
+                <a:solidFill>
+                  <a:srgbClr val="16202B"/>
+                </a:solidFill>
+                <a:latin typeface="Arial"/>
+                <a:ea typeface="Arial"/>
+                <a:cs typeface="Arial"/>
+              </a:defRPr>
+            </a:lvl8pPr>
+            <a:lvl9pPr>
+              <a:defRPr sz="2175" b="1">
+                <a:solidFill>
+                  <a:srgbClr val="16202B"/>
+                </a:solidFill>
+                <a:latin typeface="Arial"/>
+                <a:ea typeface="Arial"/>
+                <a:cs typeface="Arial"/>
+              </a:defRPr>
+            </a:lvl9pPr>
           </a:lstStyle>
           <a:p xmlns:a="http://schemas.openxmlformats.org/drawingml/2006/main">
             <a:pPr>
+              <a:buNone/>
               <a:defRPr sz="2175" b="1">
                 <a:solidFill>
                   <a:srgbClr val="16202B"/>
@@ -3822,7 +5583,7 @@
       </p:sp>
       <p:sp>
         <p:nvSpPr>
-          <p:cNvPr id="6" name="">
+          <p:cNvPr id="6" name="Rectangle 5">
             <a:extLst xmlns:a="http://schemas.openxmlformats.org/drawingml/2006/main">
               <a:ext uri="{FF2B5EF4-FFF2-40B4-BE49-F238E27FC236}">
                 <a16:creationId xmlns:a16="http://schemas.microsoft.com/office/drawing/2014/main" id="{176491E9-A123-4925-A180-36CE87D89C57}"/>
@@ -3850,7 +5611,7 @@
         </p:spPr>
         <p:txBody>
           <a:bodyPr xmlns:a="http://schemas.openxmlformats.org/drawingml/2006/main" wrap="square" lIns="0" tIns="0" rIns="0" bIns="0" anchor="ctr">
-            <a:normAutofit fontScale="100000"/>
+            <a:normAutofit/>
           </a:bodyPr>
           <a:lstStyle xmlns:a="http://schemas.openxmlformats.org/drawingml/2006/main">
             <a:defPPr>
@@ -3863,9 +5624,100 @@
                 <a:cs typeface="Arial"/>
               </a:defRPr>
             </a:defPPr>
+            <a:lvl1pPr>
+              <a:defRPr sz="1125" b="1">
+                <a:solidFill>
+                  <a:srgbClr val="315BCE"/>
+                </a:solidFill>
+                <a:latin typeface="Arial"/>
+                <a:ea typeface="Arial"/>
+                <a:cs typeface="Arial"/>
+              </a:defRPr>
+            </a:lvl1pPr>
+            <a:lvl2pPr>
+              <a:defRPr sz="1125" b="1">
+                <a:solidFill>
+                  <a:srgbClr val="315BCE"/>
+                </a:solidFill>
+                <a:latin typeface="Arial"/>
+                <a:ea typeface="Arial"/>
+                <a:cs typeface="Arial"/>
+              </a:defRPr>
+            </a:lvl2pPr>
+            <a:lvl3pPr>
+              <a:defRPr sz="1125" b="1">
+                <a:solidFill>
+                  <a:srgbClr val="315BCE"/>
+                </a:solidFill>
+                <a:latin typeface="Arial"/>
+                <a:ea typeface="Arial"/>
+                <a:cs typeface="Arial"/>
+              </a:defRPr>
+            </a:lvl3pPr>
+            <a:lvl4pPr>
+              <a:defRPr sz="1125" b="1">
+                <a:solidFill>
+                  <a:srgbClr val="315BCE"/>
+                </a:solidFill>
+                <a:latin typeface="Arial"/>
+                <a:ea typeface="Arial"/>
+                <a:cs typeface="Arial"/>
+              </a:defRPr>
+            </a:lvl4pPr>
+            <a:lvl5pPr>
+              <a:defRPr sz="1125" b="1">
+                <a:solidFill>
+                  <a:srgbClr val="315BCE"/>
+                </a:solidFill>
+                <a:latin typeface="Arial"/>
+                <a:ea typeface="Arial"/>
+                <a:cs typeface="Arial"/>
+              </a:defRPr>
+            </a:lvl5pPr>
+            <a:lvl6pPr>
+              <a:defRPr sz="1125" b="1">
+                <a:solidFill>
+                  <a:srgbClr val="315BCE"/>
+                </a:solidFill>
+                <a:latin typeface="Arial"/>
+                <a:ea typeface="Arial"/>
+                <a:cs typeface="Arial"/>
+              </a:defRPr>
+            </a:lvl6pPr>
+            <a:lvl7pPr>
+              <a:defRPr sz="1125" b="1">
+                <a:solidFill>
+                  <a:srgbClr val="315BCE"/>
+                </a:solidFill>
+                <a:latin typeface="Arial"/>
+                <a:ea typeface="Arial"/>
+                <a:cs typeface="Arial"/>
+              </a:defRPr>
+            </a:lvl7pPr>
+            <a:lvl8pPr>
+              <a:defRPr sz="1125" b="1">
+                <a:solidFill>
+                  <a:srgbClr val="315BCE"/>
+                </a:solidFill>
+                <a:latin typeface="Arial"/>
+                <a:ea typeface="Arial"/>
+                <a:cs typeface="Arial"/>
+              </a:defRPr>
+            </a:lvl8pPr>
+            <a:lvl9pPr>
+              <a:defRPr sz="1125" b="1">
+                <a:solidFill>
+                  <a:srgbClr val="315BCE"/>
+                </a:solidFill>
+                <a:latin typeface="Arial"/>
+                <a:ea typeface="Arial"/>
+                <a:cs typeface="Arial"/>
+              </a:defRPr>
+            </a:lvl9pPr>
           </a:lstStyle>
           <a:p xmlns:a="http://schemas.openxmlformats.org/drawingml/2006/main">
             <a:pPr>
+              <a:buNone/>
               <a:defRPr sz="1125" b="1">
                 <a:solidFill>
                   <a:srgbClr val="315BCE"/>
@@ -3891,7 +5743,7 @@
       </p:sp>
       <p:sp>
         <p:nvSpPr>
-          <p:cNvPr id="7" name="">
+          <p:cNvPr id="7" name="Rectangle 6">
             <a:extLst xmlns:a="http://schemas.openxmlformats.org/drawingml/2006/main">
               <a:ext uri="{FF2B5EF4-FFF2-40B4-BE49-F238E27FC236}">
                 <a16:creationId xmlns:a16="http://schemas.microsoft.com/office/drawing/2014/main" id="{0427C738-2252-4A84-AFF3-A8FB7275D5F5}"/>
@@ -3919,7 +5771,7 @@
         </p:spPr>
         <p:txBody>
           <a:bodyPr xmlns:a="http://schemas.openxmlformats.org/drawingml/2006/main" wrap="square" lIns="0" tIns="0" rIns="0" bIns="0" anchor="ctr">
-            <a:normAutofit fontScale="100000"/>
+            <a:normAutofit/>
           </a:bodyPr>
           <a:lstStyle xmlns:a="http://schemas.openxmlformats.org/drawingml/2006/main">
             <a:defPPr>
@@ -3932,9 +5784,100 @@
                 <a:cs typeface="Arial"/>
               </a:defRPr>
             </a:defPPr>
+            <a:lvl1pPr>
+              <a:defRPr sz="2175" b="1">
+                <a:solidFill>
+                  <a:srgbClr val="16202B"/>
+                </a:solidFill>
+                <a:latin typeface="Arial"/>
+                <a:ea typeface="Arial"/>
+                <a:cs typeface="Arial"/>
+              </a:defRPr>
+            </a:lvl1pPr>
+            <a:lvl2pPr>
+              <a:defRPr sz="2175" b="1">
+                <a:solidFill>
+                  <a:srgbClr val="16202B"/>
+                </a:solidFill>
+                <a:latin typeface="Arial"/>
+                <a:ea typeface="Arial"/>
+                <a:cs typeface="Arial"/>
+              </a:defRPr>
+            </a:lvl2pPr>
+            <a:lvl3pPr>
+              <a:defRPr sz="2175" b="1">
+                <a:solidFill>
+                  <a:srgbClr val="16202B"/>
+                </a:solidFill>
+                <a:latin typeface="Arial"/>
+                <a:ea typeface="Arial"/>
+                <a:cs typeface="Arial"/>
+              </a:defRPr>
+            </a:lvl3pPr>
+            <a:lvl4pPr>
+              <a:defRPr sz="2175" b="1">
+                <a:solidFill>
+                  <a:srgbClr val="16202B"/>
+                </a:solidFill>
+                <a:latin typeface="Arial"/>
+                <a:ea typeface="Arial"/>
+                <a:cs typeface="Arial"/>
+              </a:defRPr>
+            </a:lvl4pPr>
+            <a:lvl5pPr>
+              <a:defRPr sz="2175" b="1">
+                <a:solidFill>
+                  <a:srgbClr val="16202B"/>
+                </a:solidFill>
+                <a:latin typeface="Arial"/>
+                <a:ea typeface="Arial"/>
+                <a:cs typeface="Arial"/>
+              </a:defRPr>
+            </a:lvl5pPr>
+            <a:lvl6pPr>
+              <a:defRPr sz="2175" b="1">
+                <a:solidFill>
+                  <a:srgbClr val="16202B"/>
+                </a:solidFill>
+                <a:latin typeface="Arial"/>
+                <a:ea typeface="Arial"/>
+                <a:cs typeface="Arial"/>
+              </a:defRPr>
+            </a:lvl6pPr>
+            <a:lvl7pPr>
+              <a:defRPr sz="2175" b="1">
+                <a:solidFill>
+                  <a:srgbClr val="16202B"/>
+                </a:solidFill>
+                <a:latin typeface="Arial"/>
+                <a:ea typeface="Arial"/>
+                <a:cs typeface="Arial"/>
+              </a:defRPr>
+            </a:lvl7pPr>
+            <a:lvl8pPr>
+              <a:defRPr sz="2175" b="1">
+                <a:solidFill>
+                  <a:srgbClr val="16202B"/>
+                </a:solidFill>
+                <a:latin typeface="Arial"/>
+                <a:ea typeface="Arial"/>
+                <a:cs typeface="Arial"/>
+              </a:defRPr>
+            </a:lvl8pPr>
+            <a:lvl9pPr>
+              <a:defRPr sz="2175" b="1">
+                <a:solidFill>
+                  <a:srgbClr val="16202B"/>
+                </a:solidFill>
+                <a:latin typeface="Arial"/>
+                <a:ea typeface="Arial"/>
+                <a:cs typeface="Arial"/>
+              </a:defRPr>
+            </a:lvl9pPr>
           </a:lstStyle>
           <a:p xmlns:a="http://schemas.openxmlformats.org/drawingml/2006/main">
             <a:pPr>
+              <a:buNone/>
               <a:defRPr sz="2175" b="1">
                 <a:solidFill>
                   <a:srgbClr val="16202B"/>
@@ -3960,7 +5903,7 @@
       </p:sp>
       <p:sp>
         <p:nvSpPr>
-          <p:cNvPr id="8" name="">
+          <p:cNvPr id="8" name="Straight Connector 7">
             <a:extLst xmlns:a="http://schemas.openxmlformats.org/drawingml/2006/main">
               <a:ext uri="{FF2B5EF4-FFF2-40B4-BE49-F238E27FC236}">
                 <a16:creationId xmlns:a16="http://schemas.microsoft.com/office/drawing/2014/main" id="{9029EAE8-5A5C-4573-9457-3A53EA32226D}"/>
@@ -3987,10 +5930,17 @@
             <a:prstDash val="solid"/>
           </a:ln>
         </p:spPr>
+        <p:txBody>
+          <a:bodyPr xmlns:a="http://schemas.openxmlformats.org/drawingml/2006/main"/>
+          <a:lstStyle xmlns:a="http://schemas.openxmlformats.org/drawingml/2006/main"/>
+          <a:p xmlns:a="http://schemas.openxmlformats.org/drawingml/2006/main">
+            <a:endParaRPr/>
+          </a:p>
+        </p:txBody>
       </p:sp>
       <p:sp>
         <p:nvSpPr>
-          <p:cNvPr id="9" name="">
+          <p:cNvPr id="9" name="Rectangle 8">
             <a:extLst xmlns:a="http://schemas.openxmlformats.org/drawingml/2006/main">
               <a:ext uri="{FF2B5EF4-FFF2-40B4-BE49-F238E27FC236}">
                 <a16:creationId xmlns:a16="http://schemas.microsoft.com/office/drawing/2014/main" id="{9D049E6B-8EFB-49D5-81E5-68B33F88B4D5}"/>
@@ -4018,7 +5968,7 @@
         </p:spPr>
         <p:txBody>
           <a:bodyPr xmlns:a="http://schemas.openxmlformats.org/drawingml/2006/main" wrap="square" lIns="0" tIns="0" rIns="0" bIns="0" anchor="ctr">
-            <a:normAutofit fontScale="100000"/>
+            <a:normAutofit/>
           </a:bodyPr>
           <a:lstStyle xmlns:a="http://schemas.openxmlformats.org/drawingml/2006/main">
             <a:defPPr>
@@ -4031,9 +5981,100 @@
                 <a:cs typeface="Arial"/>
               </a:defRPr>
             </a:defPPr>
+            <a:lvl1pPr>
+              <a:defRPr sz="2100" b="0">
+                <a:solidFill>
+                  <a:srgbClr val="536170"/>
+                </a:solidFill>
+                <a:latin typeface="Arial"/>
+                <a:ea typeface="Arial"/>
+                <a:cs typeface="Arial"/>
+              </a:defRPr>
+            </a:lvl1pPr>
+            <a:lvl2pPr>
+              <a:defRPr sz="2100" b="0">
+                <a:solidFill>
+                  <a:srgbClr val="536170"/>
+                </a:solidFill>
+                <a:latin typeface="Arial"/>
+                <a:ea typeface="Arial"/>
+                <a:cs typeface="Arial"/>
+              </a:defRPr>
+            </a:lvl2pPr>
+            <a:lvl3pPr>
+              <a:defRPr sz="2100" b="0">
+                <a:solidFill>
+                  <a:srgbClr val="536170"/>
+                </a:solidFill>
+                <a:latin typeface="Arial"/>
+                <a:ea typeface="Arial"/>
+                <a:cs typeface="Arial"/>
+              </a:defRPr>
+            </a:lvl3pPr>
+            <a:lvl4pPr>
+              <a:defRPr sz="2100" b="0">
+                <a:solidFill>
+                  <a:srgbClr val="536170"/>
+                </a:solidFill>
+                <a:latin typeface="Arial"/>
+                <a:ea typeface="Arial"/>
+                <a:cs typeface="Arial"/>
+              </a:defRPr>
+            </a:lvl4pPr>
+            <a:lvl5pPr>
+              <a:defRPr sz="2100" b="0">
+                <a:solidFill>
+                  <a:srgbClr val="536170"/>
+                </a:solidFill>
+                <a:latin typeface="Arial"/>
+                <a:ea typeface="Arial"/>
+                <a:cs typeface="Arial"/>
+              </a:defRPr>
+            </a:lvl5pPr>
+            <a:lvl6pPr>
+              <a:defRPr sz="2100" b="0">
+                <a:solidFill>
+                  <a:srgbClr val="536170"/>
+                </a:solidFill>
+                <a:latin typeface="Arial"/>
+                <a:ea typeface="Arial"/>
+                <a:cs typeface="Arial"/>
+              </a:defRPr>
+            </a:lvl6pPr>
+            <a:lvl7pPr>
+              <a:defRPr sz="2100" b="0">
+                <a:solidFill>
+                  <a:srgbClr val="536170"/>
+                </a:solidFill>
+                <a:latin typeface="Arial"/>
+                <a:ea typeface="Arial"/>
+                <a:cs typeface="Arial"/>
+              </a:defRPr>
+            </a:lvl7pPr>
+            <a:lvl8pPr>
+              <a:defRPr sz="2100" b="0">
+                <a:solidFill>
+                  <a:srgbClr val="536170"/>
+                </a:solidFill>
+                <a:latin typeface="Arial"/>
+                <a:ea typeface="Arial"/>
+                <a:cs typeface="Arial"/>
+              </a:defRPr>
+            </a:lvl8pPr>
+            <a:lvl9pPr>
+              <a:defRPr sz="2100" b="0">
+                <a:solidFill>
+                  <a:srgbClr val="536170"/>
+                </a:solidFill>
+                <a:latin typeface="Arial"/>
+                <a:ea typeface="Arial"/>
+                <a:cs typeface="Arial"/>
+              </a:defRPr>
+            </a:lvl9pPr>
           </a:lstStyle>
           <a:p xmlns:a="http://schemas.openxmlformats.org/drawingml/2006/main">
             <a:pPr>
+              <a:buNone/>
               <a:defRPr sz="2100" b="0">
                 <a:solidFill>
                   <a:srgbClr val="536170"/>
@@ -4088,7 +6129,7 @@
       </p:grpSpPr>
       <p:sp>
         <p:nvSpPr>
-          <p:cNvPr id="14" name="">
+          <p:cNvPr id="14" name="Rectangle 13">
             <a:extLst xmlns:a="http://schemas.openxmlformats.org/drawingml/2006/main">
               <a:ext uri="{FF2B5EF4-FFF2-40B4-BE49-F238E27FC236}">
                 <a16:creationId xmlns:a16="http://schemas.microsoft.com/office/drawing/2014/main" id="{33D32411-2343-4655-9572-9413E2B17698}"/>
@@ -4116,7 +6157,7 @@
         </p:spPr>
         <p:txBody>
           <a:bodyPr xmlns:a="http://schemas.openxmlformats.org/drawingml/2006/main" wrap="square" lIns="0" tIns="0" rIns="0" bIns="0" anchor="ctr">
-            <a:normAutofit fontScale="100000"/>
+            <a:normAutofit/>
           </a:bodyPr>
           <a:lstStyle xmlns:a="http://schemas.openxmlformats.org/drawingml/2006/main">
             <a:defPPr>
@@ -4129,9 +6170,100 @@
                 <a:cs typeface="Arial"/>
               </a:defRPr>
             </a:defPPr>
+            <a:lvl1pPr>
+              <a:defRPr sz="1050" b="1">
+                <a:solidFill>
+                  <a:srgbClr val="315BCE"/>
+                </a:solidFill>
+                <a:latin typeface="Arial"/>
+                <a:ea typeface="Arial"/>
+                <a:cs typeface="Arial"/>
+              </a:defRPr>
+            </a:lvl1pPr>
+            <a:lvl2pPr>
+              <a:defRPr sz="1050" b="1">
+                <a:solidFill>
+                  <a:srgbClr val="315BCE"/>
+                </a:solidFill>
+                <a:latin typeface="Arial"/>
+                <a:ea typeface="Arial"/>
+                <a:cs typeface="Arial"/>
+              </a:defRPr>
+            </a:lvl2pPr>
+            <a:lvl3pPr>
+              <a:defRPr sz="1050" b="1">
+                <a:solidFill>
+                  <a:srgbClr val="315BCE"/>
+                </a:solidFill>
+                <a:latin typeface="Arial"/>
+                <a:ea typeface="Arial"/>
+                <a:cs typeface="Arial"/>
+              </a:defRPr>
+            </a:lvl3pPr>
+            <a:lvl4pPr>
+              <a:defRPr sz="1050" b="1">
+                <a:solidFill>
+                  <a:srgbClr val="315BCE"/>
+                </a:solidFill>
+                <a:latin typeface="Arial"/>
+                <a:ea typeface="Arial"/>
+                <a:cs typeface="Arial"/>
+              </a:defRPr>
+            </a:lvl4pPr>
+            <a:lvl5pPr>
+              <a:defRPr sz="1050" b="1">
+                <a:solidFill>
+                  <a:srgbClr val="315BCE"/>
+                </a:solidFill>
+                <a:latin typeface="Arial"/>
+                <a:ea typeface="Arial"/>
+                <a:cs typeface="Arial"/>
+              </a:defRPr>
+            </a:lvl5pPr>
+            <a:lvl6pPr>
+              <a:defRPr sz="1050" b="1">
+                <a:solidFill>
+                  <a:srgbClr val="315BCE"/>
+                </a:solidFill>
+                <a:latin typeface="Arial"/>
+                <a:ea typeface="Arial"/>
+                <a:cs typeface="Arial"/>
+              </a:defRPr>
+            </a:lvl6pPr>
+            <a:lvl7pPr>
+              <a:defRPr sz="1050" b="1">
+                <a:solidFill>
+                  <a:srgbClr val="315BCE"/>
+                </a:solidFill>
+                <a:latin typeface="Arial"/>
+                <a:ea typeface="Arial"/>
+                <a:cs typeface="Arial"/>
+              </a:defRPr>
+            </a:lvl7pPr>
+            <a:lvl8pPr>
+              <a:defRPr sz="1050" b="1">
+                <a:solidFill>
+                  <a:srgbClr val="315BCE"/>
+                </a:solidFill>
+                <a:latin typeface="Arial"/>
+                <a:ea typeface="Arial"/>
+                <a:cs typeface="Arial"/>
+              </a:defRPr>
+            </a:lvl8pPr>
+            <a:lvl9pPr>
+              <a:defRPr sz="1050" b="1">
+                <a:solidFill>
+                  <a:srgbClr val="315BCE"/>
+                </a:solidFill>
+                <a:latin typeface="Arial"/>
+                <a:ea typeface="Arial"/>
+                <a:cs typeface="Arial"/>
+              </a:defRPr>
+            </a:lvl9pPr>
           </a:lstStyle>
           <a:p xmlns:a="http://schemas.openxmlformats.org/drawingml/2006/main">
             <a:pPr>
+              <a:buNone/>
               <a:defRPr sz="1050" b="1">
                 <a:solidFill>
                   <a:srgbClr val="315BCE"/>
@@ -4157,7 +6289,7 @@
       </p:sp>
       <p:sp>
         <p:nvSpPr>
-          <p:cNvPr id="2" name="">
+          <p:cNvPr id="2" name="Rectangle 1">
             <a:extLst xmlns:a="http://schemas.openxmlformats.org/drawingml/2006/main">
               <a:ext uri="{FF2B5EF4-FFF2-40B4-BE49-F238E27FC236}">
                 <a16:creationId xmlns:a16="http://schemas.microsoft.com/office/drawing/2014/main" id="{9CE59DFB-28BE-4096-8A76-9F0D1424579D}"/>
@@ -4198,9 +6330,100 @@
                 <a:cs typeface="Arial"/>
               </a:defRPr>
             </a:defPPr>
+            <a:lvl1pPr>
+              <a:defRPr sz="3000" b="1">
+                <a:solidFill>
+                  <a:srgbClr val="16202B"/>
+                </a:solidFill>
+                <a:latin typeface="Arial"/>
+                <a:ea typeface="Arial"/>
+                <a:cs typeface="Arial"/>
+              </a:defRPr>
+            </a:lvl1pPr>
+            <a:lvl2pPr>
+              <a:defRPr sz="3000" b="1">
+                <a:solidFill>
+                  <a:srgbClr val="16202B"/>
+                </a:solidFill>
+                <a:latin typeface="Arial"/>
+                <a:ea typeface="Arial"/>
+                <a:cs typeface="Arial"/>
+              </a:defRPr>
+            </a:lvl2pPr>
+            <a:lvl3pPr>
+              <a:defRPr sz="3000" b="1">
+                <a:solidFill>
+                  <a:srgbClr val="16202B"/>
+                </a:solidFill>
+                <a:latin typeface="Arial"/>
+                <a:ea typeface="Arial"/>
+                <a:cs typeface="Arial"/>
+              </a:defRPr>
+            </a:lvl3pPr>
+            <a:lvl4pPr>
+              <a:defRPr sz="3000" b="1">
+                <a:solidFill>
+                  <a:srgbClr val="16202B"/>
+                </a:solidFill>
+                <a:latin typeface="Arial"/>
+                <a:ea typeface="Arial"/>
+                <a:cs typeface="Arial"/>
+              </a:defRPr>
+            </a:lvl4pPr>
+            <a:lvl5pPr>
+              <a:defRPr sz="3000" b="1">
+                <a:solidFill>
+                  <a:srgbClr val="16202B"/>
+                </a:solidFill>
+                <a:latin typeface="Arial"/>
+                <a:ea typeface="Arial"/>
+                <a:cs typeface="Arial"/>
+              </a:defRPr>
+            </a:lvl5pPr>
+            <a:lvl6pPr>
+              <a:defRPr sz="3000" b="1">
+                <a:solidFill>
+                  <a:srgbClr val="16202B"/>
+                </a:solidFill>
+                <a:latin typeface="Arial"/>
+                <a:ea typeface="Arial"/>
+                <a:cs typeface="Arial"/>
+              </a:defRPr>
+            </a:lvl6pPr>
+            <a:lvl7pPr>
+              <a:defRPr sz="3000" b="1">
+                <a:solidFill>
+                  <a:srgbClr val="16202B"/>
+                </a:solidFill>
+                <a:latin typeface="Arial"/>
+                <a:ea typeface="Arial"/>
+                <a:cs typeface="Arial"/>
+              </a:defRPr>
+            </a:lvl7pPr>
+            <a:lvl8pPr>
+              <a:defRPr sz="3000" b="1">
+                <a:solidFill>
+                  <a:srgbClr val="16202B"/>
+                </a:solidFill>
+                <a:latin typeface="Arial"/>
+                <a:ea typeface="Arial"/>
+                <a:cs typeface="Arial"/>
+              </a:defRPr>
+            </a:lvl8pPr>
+            <a:lvl9pPr>
+              <a:defRPr sz="3000" b="1">
+                <a:solidFill>
+                  <a:srgbClr val="16202B"/>
+                </a:solidFill>
+                <a:latin typeface="Arial"/>
+                <a:ea typeface="Arial"/>
+                <a:cs typeface="Arial"/>
+              </a:defRPr>
+            </a:lvl9pPr>
           </a:lstStyle>
           <a:p xmlns:a="http://schemas.openxmlformats.org/drawingml/2006/main">
             <a:pPr>
+              <a:buNone/>
               <a:defRPr sz="3000" b="1">
                 <a:solidFill>
                   <a:srgbClr val="16202B"/>
@@ -4219,14 +6442,14 @@
                 <a:ea typeface="Arial"/>
                 <a:cs typeface="Arial"/>
               </a:rPr>
-              <a:t>From transaction history to a reviewed action</a:t>
+              <a:t>How Rhythm turns sales history into a review queue</a:t>
             </a:r>
           </a:p>
         </p:txBody>
       </p:sp>
       <p:sp>
         <p:nvSpPr>
-          <p:cNvPr id="3" name="">
+          <p:cNvPr id="3" name="Rectangle 2">
             <a:extLst xmlns:a="http://schemas.openxmlformats.org/drawingml/2006/main">
               <a:ext uri="{FF2B5EF4-FFF2-40B4-BE49-F238E27FC236}">
                 <a16:creationId xmlns:a16="http://schemas.microsoft.com/office/drawing/2014/main" id="{D9911209-3E9D-4217-BC4A-D4E3FCB6BC58}"/>
@@ -4254,7 +6477,7 @@
         </p:spPr>
         <p:txBody>
           <a:bodyPr xmlns:a="http://schemas.openxmlformats.org/drawingml/2006/main" wrap="square" lIns="0" tIns="0" rIns="0" bIns="0" anchor="ctr">
-            <a:normAutofit fontScale="100000"/>
+            <a:normAutofit/>
           </a:bodyPr>
           <a:lstStyle xmlns:a="http://schemas.openxmlformats.org/drawingml/2006/main">
             <a:defPPr algn="r">
@@ -4267,9 +6490,100 @@
                 <a:cs typeface="Arial"/>
               </a:defRPr>
             </a:defPPr>
+            <a:lvl1pPr algn="r">
+              <a:defRPr sz="1050" b="1">
+                <a:solidFill>
+                  <a:srgbClr val="536170"/>
+                </a:solidFill>
+                <a:latin typeface="Arial"/>
+                <a:ea typeface="Arial"/>
+                <a:cs typeface="Arial"/>
+              </a:defRPr>
+            </a:lvl1pPr>
+            <a:lvl2pPr algn="r">
+              <a:defRPr sz="1050" b="1">
+                <a:solidFill>
+                  <a:srgbClr val="536170"/>
+                </a:solidFill>
+                <a:latin typeface="Arial"/>
+                <a:ea typeface="Arial"/>
+                <a:cs typeface="Arial"/>
+              </a:defRPr>
+            </a:lvl2pPr>
+            <a:lvl3pPr algn="r">
+              <a:defRPr sz="1050" b="1">
+                <a:solidFill>
+                  <a:srgbClr val="536170"/>
+                </a:solidFill>
+                <a:latin typeface="Arial"/>
+                <a:ea typeface="Arial"/>
+                <a:cs typeface="Arial"/>
+              </a:defRPr>
+            </a:lvl3pPr>
+            <a:lvl4pPr algn="r">
+              <a:defRPr sz="1050" b="1">
+                <a:solidFill>
+                  <a:srgbClr val="536170"/>
+                </a:solidFill>
+                <a:latin typeface="Arial"/>
+                <a:ea typeface="Arial"/>
+                <a:cs typeface="Arial"/>
+              </a:defRPr>
+            </a:lvl4pPr>
+            <a:lvl5pPr algn="r">
+              <a:defRPr sz="1050" b="1">
+                <a:solidFill>
+                  <a:srgbClr val="536170"/>
+                </a:solidFill>
+                <a:latin typeface="Arial"/>
+                <a:ea typeface="Arial"/>
+                <a:cs typeface="Arial"/>
+              </a:defRPr>
+            </a:lvl5pPr>
+            <a:lvl6pPr algn="r">
+              <a:defRPr sz="1050" b="1">
+                <a:solidFill>
+                  <a:srgbClr val="536170"/>
+                </a:solidFill>
+                <a:latin typeface="Arial"/>
+                <a:ea typeface="Arial"/>
+                <a:cs typeface="Arial"/>
+              </a:defRPr>
+            </a:lvl6pPr>
+            <a:lvl7pPr algn="r">
+              <a:defRPr sz="1050" b="1">
+                <a:solidFill>
+                  <a:srgbClr val="536170"/>
+                </a:solidFill>
+                <a:latin typeface="Arial"/>
+                <a:ea typeface="Arial"/>
+                <a:cs typeface="Arial"/>
+              </a:defRPr>
+            </a:lvl7pPr>
+            <a:lvl8pPr algn="r">
+              <a:defRPr sz="1050" b="1">
+                <a:solidFill>
+                  <a:srgbClr val="536170"/>
+                </a:solidFill>
+                <a:latin typeface="Arial"/>
+                <a:ea typeface="Arial"/>
+                <a:cs typeface="Arial"/>
+              </a:defRPr>
+            </a:lvl8pPr>
+            <a:lvl9pPr algn="r">
+              <a:defRPr sz="1050" b="1">
+                <a:solidFill>
+                  <a:srgbClr val="536170"/>
+                </a:solidFill>
+                <a:latin typeface="Arial"/>
+                <a:ea typeface="Arial"/>
+                <a:cs typeface="Arial"/>
+              </a:defRPr>
+            </a:lvl9pPr>
           </a:lstStyle>
           <a:p xmlns:a="http://schemas.openxmlformats.org/drawingml/2006/main">
             <a:pPr algn="r">
+              <a:buNone/>
               <a:defRPr sz="1050" b="1">
                 <a:solidFill>
                   <a:srgbClr val="536170"/>
@@ -4295,7 +6609,7 @@
       </p:sp>
       <p:sp>
         <p:nvSpPr>
-          <p:cNvPr id="4" name="">
+          <p:cNvPr id="4" name="Rectangle 3">
             <a:extLst xmlns:a="http://schemas.openxmlformats.org/drawingml/2006/main">
               <a:ext uri="{FF2B5EF4-FFF2-40B4-BE49-F238E27FC236}">
                 <a16:creationId xmlns:a16="http://schemas.microsoft.com/office/drawing/2014/main" id="{A9480323-AC64-46EC-A2C9-983BB7455941}"/>
@@ -4336,9 +6650,100 @@
                 <a:cs typeface="Arial"/>
               </a:defRPr>
             </a:defPPr>
+            <a:lvl1pPr>
+              <a:defRPr sz="1800" b="1">
+                <a:solidFill>
+                  <a:srgbClr val="315BCE"/>
+                </a:solidFill>
+                <a:latin typeface="Arial"/>
+                <a:ea typeface="Arial"/>
+                <a:cs typeface="Arial"/>
+              </a:defRPr>
+            </a:lvl1pPr>
+            <a:lvl2pPr>
+              <a:defRPr sz="1800" b="1">
+                <a:solidFill>
+                  <a:srgbClr val="315BCE"/>
+                </a:solidFill>
+                <a:latin typeface="Arial"/>
+                <a:ea typeface="Arial"/>
+                <a:cs typeface="Arial"/>
+              </a:defRPr>
+            </a:lvl2pPr>
+            <a:lvl3pPr>
+              <a:defRPr sz="1800" b="1">
+                <a:solidFill>
+                  <a:srgbClr val="315BCE"/>
+                </a:solidFill>
+                <a:latin typeface="Arial"/>
+                <a:ea typeface="Arial"/>
+                <a:cs typeface="Arial"/>
+              </a:defRPr>
+            </a:lvl3pPr>
+            <a:lvl4pPr>
+              <a:defRPr sz="1800" b="1">
+                <a:solidFill>
+                  <a:srgbClr val="315BCE"/>
+                </a:solidFill>
+                <a:latin typeface="Arial"/>
+                <a:ea typeface="Arial"/>
+                <a:cs typeface="Arial"/>
+              </a:defRPr>
+            </a:lvl4pPr>
+            <a:lvl5pPr>
+              <a:defRPr sz="1800" b="1">
+                <a:solidFill>
+                  <a:srgbClr val="315BCE"/>
+                </a:solidFill>
+                <a:latin typeface="Arial"/>
+                <a:ea typeface="Arial"/>
+                <a:cs typeface="Arial"/>
+              </a:defRPr>
+            </a:lvl5pPr>
+            <a:lvl6pPr>
+              <a:defRPr sz="1800" b="1">
+                <a:solidFill>
+                  <a:srgbClr val="315BCE"/>
+                </a:solidFill>
+                <a:latin typeface="Arial"/>
+                <a:ea typeface="Arial"/>
+                <a:cs typeface="Arial"/>
+              </a:defRPr>
+            </a:lvl6pPr>
+            <a:lvl7pPr>
+              <a:defRPr sz="1800" b="1">
+                <a:solidFill>
+                  <a:srgbClr val="315BCE"/>
+                </a:solidFill>
+                <a:latin typeface="Arial"/>
+                <a:ea typeface="Arial"/>
+                <a:cs typeface="Arial"/>
+              </a:defRPr>
+            </a:lvl7pPr>
+            <a:lvl8pPr>
+              <a:defRPr sz="1800" b="1">
+                <a:solidFill>
+                  <a:srgbClr val="315BCE"/>
+                </a:solidFill>
+                <a:latin typeface="Arial"/>
+                <a:ea typeface="Arial"/>
+                <a:cs typeface="Arial"/>
+              </a:defRPr>
+            </a:lvl8pPr>
+            <a:lvl9pPr>
+              <a:defRPr sz="1800" b="1">
+                <a:solidFill>
+                  <a:srgbClr val="315BCE"/>
+                </a:solidFill>
+                <a:latin typeface="Arial"/>
+                <a:ea typeface="Arial"/>
+                <a:cs typeface="Arial"/>
+              </a:defRPr>
+            </a:lvl9pPr>
           </a:lstStyle>
           <a:p xmlns:a="http://schemas.openxmlformats.org/drawingml/2006/main">
             <a:pPr>
+              <a:buNone/>
               <a:defRPr sz="1800" b="1">
                 <a:solidFill>
                   <a:srgbClr val="315BCE"/>
@@ -4357,14 +6762,14 @@
                 <a:ea typeface="Arial"/>
                 <a:cs typeface="Arial"/>
               </a:rPr>
-              <a:t>1  Find a changed cadence</a:t>
+              <a:t>1  Flag overdue shoppers</a:t>
             </a:r>
           </a:p>
         </p:txBody>
       </p:sp>
       <p:sp>
         <p:nvSpPr>
-          <p:cNvPr id="5" name="">
+          <p:cNvPr id="5" name="Straight Connector 4">
             <a:extLst xmlns:a="http://schemas.openxmlformats.org/drawingml/2006/main">
               <a:ext uri="{FF2B5EF4-FFF2-40B4-BE49-F238E27FC236}">
                 <a16:creationId xmlns:a16="http://schemas.microsoft.com/office/drawing/2014/main" id="{137659FD-28DB-46C0-9FB5-C53F1C03070C}"/>
@@ -4391,10 +6796,17 @@
             <a:prstDash val="solid"/>
           </a:ln>
         </p:spPr>
+        <p:txBody>
+          <a:bodyPr xmlns:a="http://schemas.openxmlformats.org/drawingml/2006/main"/>
+          <a:lstStyle xmlns:a="http://schemas.openxmlformats.org/drawingml/2006/main"/>
+          <a:p xmlns:a="http://schemas.openxmlformats.org/drawingml/2006/main">
+            <a:endParaRPr/>
+          </a:p>
+        </p:txBody>
       </p:sp>
       <p:sp>
         <p:nvSpPr>
-          <p:cNvPr id="6" name="">
+          <p:cNvPr id="6" name="Rectangle 5">
             <a:extLst xmlns:a="http://schemas.openxmlformats.org/drawingml/2006/main">
               <a:ext uri="{FF2B5EF4-FFF2-40B4-BE49-F238E27FC236}">
                 <a16:creationId xmlns:a16="http://schemas.microsoft.com/office/drawing/2014/main" id="{48E4B5B7-6B50-40F1-94B6-F15FFE00AEC3}"/>
@@ -4435,9 +6847,100 @@
                 <a:cs typeface="Arial"/>
               </a:defRPr>
             </a:defPPr>
+            <a:lvl1pPr>
+              <a:defRPr sz="1650" b="0">
+                <a:solidFill>
+                  <a:srgbClr val="16202B"/>
+                </a:solidFill>
+                <a:latin typeface="Arial"/>
+                <a:ea typeface="Arial"/>
+                <a:cs typeface="Arial"/>
+              </a:defRPr>
+            </a:lvl1pPr>
+            <a:lvl2pPr>
+              <a:defRPr sz="1650" b="0">
+                <a:solidFill>
+                  <a:srgbClr val="16202B"/>
+                </a:solidFill>
+                <a:latin typeface="Arial"/>
+                <a:ea typeface="Arial"/>
+                <a:cs typeface="Arial"/>
+              </a:defRPr>
+            </a:lvl2pPr>
+            <a:lvl3pPr>
+              <a:defRPr sz="1650" b="0">
+                <a:solidFill>
+                  <a:srgbClr val="16202B"/>
+                </a:solidFill>
+                <a:latin typeface="Arial"/>
+                <a:ea typeface="Arial"/>
+                <a:cs typeface="Arial"/>
+              </a:defRPr>
+            </a:lvl3pPr>
+            <a:lvl4pPr>
+              <a:defRPr sz="1650" b="0">
+                <a:solidFill>
+                  <a:srgbClr val="16202B"/>
+                </a:solidFill>
+                <a:latin typeface="Arial"/>
+                <a:ea typeface="Arial"/>
+                <a:cs typeface="Arial"/>
+              </a:defRPr>
+            </a:lvl4pPr>
+            <a:lvl5pPr>
+              <a:defRPr sz="1650" b="0">
+                <a:solidFill>
+                  <a:srgbClr val="16202B"/>
+                </a:solidFill>
+                <a:latin typeface="Arial"/>
+                <a:ea typeface="Arial"/>
+                <a:cs typeface="Arial"/>
+              </a:defRPr>
+            </a:lvl5pPr>
+            <a:lvl6pPr>
+              <a:defRPr sz="1650" b="0">
+                <a:solidFill>
+                  <a:srgbClr val="16202B"/>
+                </a:solidFill>
+                <a:latin typeface="Arial"/>
+                <a:ea typeface="Arial"/>
+                <a:cs typeface="Arial"/>
+              </a:defRPr>
+            </a:lvl6pPr>
+            <a:lvl7pPr>
+              <a:defRPr sz="1650" b="0">
+                <a:solidFill>
+                  <a:srgbClr val="16202B"/>
+                </a:solidFill>
+                <a:latin typeface="Arial"/>
+                <a:ea typeface="Arial"/>
+                <a:cs typeface="Arial"/>
+              </a:defRPr>
+            </a:lvl7pPr>
+            <a:lvl8pPr>
+              <a:defRPr sz="1650" b="0">
+                <a:solidFill>
+                  <a:srgbClr val="16202B"/>
+                </a:solidFill>
+                <a:latin typeface="Arial"/>
+                <a:ea typeface="Arial"/>
+                <a:cs typeface="Arial"/>
+              </a:defRPr>
+            </a:lvl8pPr>
+            <a:lvl9pPr>
+              <a:defRPr sz="1650" b="0">
+                <a:solidFill>
+                  <a:srgbClr val="16202B"/>
+                </a:solidFill>
+                <a:latin typeface="Arial"/>
+                <a:ea typeface="Arial"/>
+                <a:cs typeface="Arial"/>
+              </a:defRPr>
+            </a:lvl9pPr>
           </a:lstStyle>
           <a:p xmlns:a="http://schemas.openxmlformats.org/drawingml/2006/main">
             <a:pPr>
+              <a:buNone/>
               <a:defRPr sz="1650" b="0">
                 <a:solidFill>
                   <a:srgbClr val="16202B"/>
@@ -4456,14 +6959,14 @@
                 <a:ea typeface="Arial"/>
                 <a:cs typeface="Arial"/>
               </a:rPr>
-              <a:t>Analyze a sales CSV in the browser. The attention list surfaces repeat shoppers beyond their own threshold.</a:t>
+              <a:t>A fixed rule compares each repeat shopper’s last order with their median purchase gap.</a:t>
             </a:r>
           </a:p>
         </p:txBody>
       </p:sp>
       <p:sp>
         <p:nvSpPr>
-          <p:cNvPr id="7" name="">
+          <p:cNvPr id="7" name="Rectangle 6">
             <a:extLst xmlns:a="http://schemas.openxmlformats.org/drawingml/2006/main">
               <a:ext uri="{FF2B5EF4-FFF2-40B4-BE49-F238E27FC236}">
                 <a16:creationId xmlns:a16="http://schemas.microsoft.com/office/drawing/2014/main" id="{8C8CCA25-FD70-4005-9F49-EC188E7CEA94}"/>
@@ -4491,7 +6994,7 @@
         </p:spPr>
         <p:txBody>
           <a:bodyPr xmlns:a="http://schemas.openxmlformats.org/drawingml/2006/main" wrap="square" lIns="0" tIns="0" rIns="0" bIns="0" anchor="ctr">
-            <a:normAutofit fontScale="100000"/>
+            <a:normAutofit/>
           </a:bodyPr>
           <a:lstStyle xmlns:a="http://schemas.openxmlformats.org/drawingml/2006/main">
             <a:defPPr>
@@ -4504,9 +7007,100 @@
                 <a:cs typeface="Arial"/>
               </a:defRPr>
             </a:defPPr>
+            <a:lvl1pPr>
+              <a:defRPr sz="1800" b="1">
+                <a:solidFill>
+                  <a:srgbClr val="315BCE"/>
+                </a:solidFill>
+                <a:latin typeface="Arial"/>
+                <a:ea typeface="Arial"/>
+                <a:cs typeface="Arial"/>
+              </a:defRPr>
+            </a:lvl1pPr>
+            <a:lvl2pPr>
+              <a:defRPr sz="1800" b="1">
+                <a:solidFill>
+                  <a:srgbClr val="315BCE"/>
+                </a:solidFill>
+                <a:latin typeface="Arial"/>
+                <a:ea typeface="Arial"/>
+                <a:cs typeface="Arial"/>
+              </a:defRPr>
+            </a:lvl2pPr>
+            <a:lvl3pPr>
+              <a:defRPr sz="1800" b="1">
+                <a:solidFill>
+                  <a:srgbClr val="315BCE"/>
+                </a:solidFill>
+                <a:latin typeface="Arial"/>
+                <a:ea typeface="Arial"/>
+                <a:cs typeface="Arial"/>
+              </a:defRPr>
+            </a:lvl3pPr>
+            <a:lvl4pPr>
+              <a:defRPr sz="1800" b="1">
+                <a:solidFill>
+                  <a:srgbClr val="315BCE"/>
+                </a:solidFill>
+                <a:latin typeface="Arial"/>
+                <a:ea typeface="Arial"/>
+                <a:cs typeface="Arial"/>
+              </a:defRPr>
+            </a:lvl4pPr>
+            <a:lvl5pPr>
+              <a:defRPr sz="1800" b="1">
+                <a:solidFill>
+                  <a:srgbClr val="315BCE"/>
+                </a:solidFill>
+                <a:latin typeface="Arial"/>
+                <a:ea typeface="Arial"/>
+                <a:cs typeface="Arial"/>
+              </a:defRPr>
+            </a:lvl5pPr>
+            <a:lvl6pPr>
+              <a:defRPr sz="1800" b="1">
+                <a:solidFill>
+                  <a:srgbClr val="315BCE"/>
+                </a:solidFill>
+                <a:latin typeface="Arial"/>
+                <a:ea typeface="Arial"/>
+                <a:cs typeface="Arial"/>
+              </a:defRPr>
+            </a:lvl6pPr>
+            <a:lvl7pPr>
+              <a:defRPr sz="1800" b="1">
+                <a:solidFill>
+                  <a:srgbClr val="315BCE"/>
+                </a:solidFill>
+                <a:latin typeface="Arial"/>
+                <a:ea typeface="Arial"/>
+                <a:cs typeface="Arial"/>
+              </a:defRPr>
+            </a:lvl7pPr>
+            <a:lvl8pPr>
+              <a:defRPr sz="1800" b="1">
+                <a:solidFill>
+                  <a:srgbClr val="315BCE"/>
+                </a:solidFill>
+                <a:latin typeface="Arial"/>
+                <a:ea typeface="Arial"/>
+                <a:cs typeface="Arial"/>
+              </a:defRPr>
+            </a:lvl8pPr>
+            <a:lvl9pPr>
+              <a:defRPr sz="1800" b="1">
+                <a:solidFill>
+                  <a:srgbClr val="315BCE"/>
+                </a:solidFill>
+                <a:latin typeface="Arial"/>
+                <a:ea typeface="Arial"/>
+                <a:cs typeface="Arial"/>
+              </a:defRPr>
+            </a:lvl9pPr>
           </a:lstStyle>
           <a:p xmlns:a="http://schemas.openxmlformats.org/drawingml/2006/main">
             <a:pPr>
+              <a:buNone/>
               <a:defRPr sz="1800" b="1">
                 <a:solidFill>
                   <a:srgbClr val="315BCE"/>
@@ -4532,7 +7126,7 @@
       </p:sp>
       <p:sp>
         <p:nvSpPr>
-          <p:cNvPr id="8" name="">
+          <p:cNvPr id="8" name="Straight Connector 7">
             <a:extLst xmlns:a="http://schemas.openxmlformats.org/drawingml/2006/main">
               <a:ext uri="{FF2B5EF4-FFF2-40B4-BE49-F238E27FC236}">
                 <a16:creationId xmlns:a16="http://schemas.microsoft.com/office/drawing/2014/main" id="{2FD6422C-4100-4C6F-BD42-A4884315C52E}"/>
@@ -4559,10 +7153,17 @@
             <a:prstDash val="solid"/>
           </a:ln>
         </p:spPr>
+        <p:txBody>
+          <a:bodyPr xmlns:a="http://schemas.openxmlformats.org/drawingml/2006/main"/>
+          <a:lstStyle xmlns:a="http://schemas.openxmlformats.org/drawingml/2006/main"/>
+          <a:p xmlns:a="http://schemas.openxmlformats.org/drawingml/2006/main">
+            <a:endParaRPr/>
+          </a:p>
+        </p:txBody>
       </p:sp>
       <p:sp>
         <p:nvSpPr>
-          <p:cNvPr id="9" name="">
+          <p:cNvPr id="9" name="Rectangle 8">
             <a:extLst xmlns:a="http://schemas.openxmlformats.org/drawingml/2006/main">
               <a:ext uri="{FF2B5EF4-FFF2-40B4-BE49-F238E27FC236}">
                 <a16:creationId xmlns:a16="http://schemas.microsoft.com/office/drawing/2014/main" id="{C7E259CB-B1F2-4D44-94BE-ABA33B9EDE15}"/>
@@ -4603,9 +7204,100 @@
                 <a:cs typeface="Arial"/>
               </a:defRPr>
             </a:defPPr>
+            <a:lvl1pPr>
+              <a:defRPr sz="1650" b="0">
+                <a:solidFill>
+                  <a:srgbClr val="16202B"/>
+                </a:solidFill>
+                <a:latin typeface="Arial"/>
+                <a:ea typeface="Arial"/>
+                <a:cs typeface="Arial"/>
+              </a:defRPr>
+            </a:lvl1pPr>
+            <a:lvl2pPr>
+              <a:defRPr sz="1650" b="0">
+                <a:solidFill>
+                  <a:srgbClr val="16202B"/>
+                </a:solidFill>
+                <a:latin typeface="Arial"/>
+                <a:ea typeface="Arial"/>
+                <a:cs typeface="Arial"/>
+              </a:defRPr>
+            </a:lvl2pPr>
+            <a:lvl3pPr>
+              <a:defRPr sz="1650" b="0">
+                <a:solidFill>
+                  <a:srgbClr val="16202B"/>
+                </a:solidFill>
+                <a:latin typeface="Arial"/>
+                <a:ea typeface="Arial"/>
+                <a:cs typeface="Arial"/>
+              </a:defRPr>
+            </a:lvl3pPr>
+            <a:lvl4pPr>
+              <a:defRPr sz="1650" b="0">
+                <a:solidFill>
+                  <a:srgbClr val="16202B"/>
+                </a:solidFill>
+                <a:latin typeface="Arial"/>
+                <a:ea typeface="Arial"/>
+                <a:cs typeface="Arial"/>
+              </a:defRPr>
+            </a:lvl4pPr>
+            <a:lvl5pPr>
+              <a:defRPr sz="1650" b="0">
+                <a:solidFill>
+                  <a:srgbClr val="16202B"/>
+                </a:solidFill>
+                <a:latin typeface="Arial"/>
+                <a:ea typeface="Arial"/>
+                <a:cs typeface="Arial"/>
+              </a:defRPr>
+            </a:lvl5pPr>
+            <a:lvl6pPr>
+              <a:defRPr sz="1650" b="0">
+                <a:solidFill>
+                  <a:srgbClr val="16202B"/>
+                </a:solidFill>
+                <a:latin typeface="Arial"/>
+                <a:ea typeface="Arial"/>
+                <a:cs typeface="Arial"/>
+              </a:defRPr>
+            </a:lvl6pPr>
+            <a:lvl7pPr>
+              <a:defRPr sz="1650" b="0">
+                <a:solidFill>
+                  <a:srgbClr val="16202B"/>
+                </a:solidFill>
+                <a:latin typeface="Arial"/>
+                <a:ea typeface="Arial"/>
+                <a:cs typeface="Arial"/>
+              </a:defRPr>
+            </a:lvl7pPr>
+            <a:lvl8pPr>
+              <a:defRPr sz="1650" b="0">
+                <a:solidFill>
+                  <a:srgbClr val="16202B"/>
+                </a:solidFill>
+                <a:latin typeface="Arial"/>
+                <a:ea typeface="Arial"/>
+                <a:cs typeface="Arial"/>
+              </a:defRPr>
+            </a:lvl8pPr>
+            <a:lvl9pPr>
+              <a:defRPr sz="1650" b="0">
+                <a:solidFill>
+                  <a:srgbClr val="16202B"/>
+                </a:solidFill>
+                <a:latin typeface="Arial"/>
+                <a:ea typeface="Arial"/>
+                <a:cs typeface="Arial"/>
+              </a:defRPr>
+            </a:lvl9pPr>
           </a:lstStyle>
           <a:p xmlns:a="http://schemas.openxmlformats.org/drawingml/2006/main">
             <a:pPr>
+              <a:buNone/>
               <a:defRPr sz="1650" b="0">
                 <a:solidFill>
                   <a:srgbClr val="16202B"/>
@@ -4624,14 +7316,14 @@
                 <a:ea typeface="Arial"/>
                 <a:cs typeface="Arial"/>
               </a:rPr>
-              <a:t>Review the shopper’s last order, usual gap, time elapsed, and most repeated item. IDs stay masked in the interface.</a:t>
+              <a:t>Check the purchase timeline, last order, usual gap and repeated item. IDs are masked.</a:t>
             </a:r>
           </a:p>
         </p:txBody>
       </p:sp>
       <p:sp>
         <p:nvSpPr>
-          <p:cNvPr id="10" name="">
+          <p:cNvPr id="10" name="Rectangle 9">
             <a:extLst xmlns:a="http://schemas.openxmlformats.org/drawingml/2006/main">
               <a:ext uri="{FF2B5EF4-FFF2-40B4-BE49-F238E27FC236}">
                 <a16:creationId xmlns:a16="http://schemas.microsoft.com/office/drawing/2014/main" id="{306A24E8-0CD3-4D78-9949-7EF77B298B69}"/>
@@ -4672,9 +7364,100 @@
                 <a:cs typeface="Arial"/>
               </a:defRPr>
             </a:defPPr>
+            <a:lvl1pPr>
+              <a:defRPr sz="1800" b="1">
+                <a:solidFill>
+                  <a:srgbClr val="315BCE"/>
+                </a:solidFill>
+                <a:latin typeface="Arial"/>
+                <a:ea typeface="Arial"/>
+                <a:cs typeface="Arial"/>
+              </a:defRPr>
+            </a:lvl1pPr>
+            <a:lvl2pPr>
+              <a:defRPr sz="1800" b="1">
+                <a:solidFill>
+                  <a:srgbClr val="315BCE"/>
+                </a:solidFill>
+                <a:latin typeface="Arial"/>
+                <a:ea typeface="Arial"/>
+                <a:cs typeface="Arial"/>
+              </a:defRPr>
+            </a:lvl2pPr>
+            <a:lvl3pPr>
+              <a:defRPr sz="1800" b="1">
+                <a:solidFill>
+                  <a:srgbClr val="315BCE"/>
+                </a:solidFill>
+                <a:latin typeface="Arial"/>
+                <a:ea typeface="Arial"/>
+                <a:cs typeface="Arial"/>
+              </a:defRPr>
+            </a:lvl3pPr>
+            <a:lvl4pPr>
+              <a:defRPr sz="1800" b="1">
+                <a:solidFill>
+                  <a:srgbClr val="315BCE"/>
+                </a:solidFill>
+                <a:latin typeface="Arial"/>
+                <a:ea typeface="Arial"/>
+                <a:cs typeface="Arial"/>
+              </a:defRPr>
+            </a:lvl4pPr>
+            <a:lvl5pPr>
+              <a:defRPr sz="1800" b="1">
+                <a:solidFill>
+                  <a:srgbClr val="315BCE"/>
+                </a:solidFill>
+                <a:latin typeface="Arial"/>
+                <a:ea typeface="Arial"/>
+                <a:cs typeface="Arial"/>
+              </a:defRPr>
+            </a:lvl5pPr>
+            <a:lvl6pPr>
+              <a:defRPr sz="1800" b="1">
+                <a:solidFill>
+                  <a:srgbClr val="315BCE"/>
+                </a:solidFill>
+                <a:latin typeface="Arial"/>
+                <a:ea typeface="Arial"/>
+                <a:cs typeface="Arial"/>
+              </a:defRPr>
+            </a:lvl6pPr>
+            <a:lvl7pPr>
+              <a:defRPr sz="1800" b="1">
+                <a:solidFill>
+                  <a:srgbClr val="315BCE"/>
+                </a:solidFill>
+                <a:latin typeface="Arial"/>
+                <a:ea typeface="Arial"/>
+                <a:cs typeface="Arial"/>
+              </a:defRPr>
+            </a:lvl7pPr>
+            <a:lvl8pPr>
+              <a:defRPr sz="1800" b="1">
+                <a:solidFill>
+                  <a:srgbClr val="315BCE"/>
+                </a:solidFill>
+                <a:latin typeface="Arial"/>
+                <a:ea typeface="Arial"/>
+                <a:cs typeface="Arial"/>
+              </a:defRPr>
+            </a:lvl8pPr>
+            <a:lvl9pPr>
+              <a:defRPr sz="1800" b="1">
+                <a:solidFill>
+                  <a:srgbClr val="315BCE"/>
+                </a:solidFill>
+                <a:latin typeface="Arial"/>
+                <a:ea typeface="Arial"/>
+                <a:cs typeface="Arial"/>
+              </a:defRPr>
+            </a:lvl9pPr>
           </a:lstStyle>
           <a:p xmlns:a="http://schemas.openxmlformats.org/drawingml/2006/main">
             <a:pPr>
+              <a:buNone/>
               <a:defRPr sz="1800" b="1">
                 <a:solidFill>
                   <a:srgbClr val="315BCE"/>
@@ -4693,14 +7476,14 @@
                 <a:ea typeface="Arial"/>
                 <a:cs typeface="Arial"/>
               </a:rPr>
-              <a:t>3  Draft with a human</a:t>
+              <a:t>3  Draft for review</a:t>
             </a:r>
           </a:p>
         </p:txBody>
       </p:sp>
       <p:sp>
         <p:nvSpPr>
-          <p:cNvPr id="11" name="">
+          <p:cNvPr id="11" name="Straight Connector 10">
             <a:extLst xmlns:a="http://schemas.openxmlformats.org/drawingml/2006/main">
               <a:ext uri="{FF2B5EF4-FFF2-40B4-BE49-F238E27FC236}">
                 <a16:creationId xmlns:a16="http://schemas.microsoft.com/office/drawing/2014/main" id="{45C1022B-66AD-4C79-BBA6-FD3CD062EF69}"/>
@@ -4727,10 +7510,17 @@
             <a:prstDash val="solid"/>
           </a:ln>
         </p:spPr>
+        <p:txBody>
+          <a:bodyPr xmlns:a="http://schemas.openxmlformats.org/drawingml/2006/main"/>
+          <a:lstStyle xmlns:a="http://schemas.openxmlformats.org/drawingml/2006/main"/>
+          <a:p xmlns:a="http://schemas.openxmlformats.org/drawingml/2006/main">
+            <a:endParaRPr/>
+          </a:p>
+        </p:txBody>
       </p:sp>
       <p:sp>
         <p:nvSpPr>
-          <p:cNvPr id="12" name="">
+          <p:cNvPr id="12" name="Rectangle 11">
             <a:extLst xmlns:a="http://schemas.openxmlformats.org/drawingml/2006/main">
               <a:ext uri="{FF2B5EF4-FFF2-40B4-BE49-F238E27FC236}">
                 <a16:creationId xmlns:a16="http://schemas.microsoft.com/office/drawing/2014/main" id="{1A78F9FA-40D0-48DD-AD5F-0CBB3EA16B88}"/>
@@ -4771,9 +7561,100 @@
                 <a:cs typeface="Arial"/>
               </a:defRPr>
             </a:defPPr>
+            <a:lvl1pPr>
+              <a:defRPr sz="1650" b="0">
+                <a:solidFill>
+                  <a:srgbClr val="16202B"/>
+                </a:solidFill>
+                <a:latin typeface="Arial"/>
+                <a:ea typeface="Arial"/>
+                <a:cs typeface="Arial"/>
+              </a:defRPr>
+            </a:lvl1pPr>
+            <a:lvl2pPr>
+              <a:defRPr sz="1650" b="0">
+                <a:solidFill>
+                  <a:srgbClr val="16202B"/>
+                </a:solidFill>
+                <a:latin typeface="Arial"/>
+                <a:ea typeface="Arial"/>
+                <a:cs typeface="Arial"/>
+              </a:defRPr>
+            </a:lvl2pPr>
+            <a:lvl3pPr>
+              <a:defRPr sz="1650" b="0">
+                <a:solidFill>
+                  <a:srgbClr val="16202B"/>
+                </a:solidFill>
+                <a:latin typeface="Arial"/>
+                <a:ea typeface="Arial"/>
+                <a:cs typeface="Arial"/>
+              </a:defRPr>
+            </a:lvl3pPr>
+            <a:lvl4pPr>
+              <a:defRPr sz="1650" b="0">
+                <a:solidFill>
+                  <a:srgbClr val="16202B"/>
+                </a:solidFill>
+                <a:latin typeface="Arial"/>
+                <a:ea typeface="Arial"/>
+                <a:cs typeface="Arial"/>
+              </a:defRPr>
+            </a:lvl4pPr>
+            <a:lvl5pPr>
+              <a:defRPr sz="1650" b="0">
+                <a:solidFill>
+                  <a:srgbClr val="16202B"/>
+                </a:solidFill>
+                <a:latin typeface="Arial"/>
+                <a:ea typeface="Arial"/>
+                <a:cs typeface="Arial"/>
+              </a:defRPr>
+            </a:lvl5pPr>
+            <a:lvl6pPr>
+              <a:defRPr sz="1650" b="0">
+                <a:solidFill>
+                  <a:srgbClr val="16202B"/>
+                </a:solidFill>
+                <a:latin typeface="Arial"/>
+                <a:ea typeface="Arial"/>
+                <a:cs typeface="Arial"/>
+              </a:defRPr>
+            </a:lvl6pPr>
+            <a:lvl7pPr>
+              <a:defRPr sz="1650" b="0">
+                <a:solidFill>
+                  <a:srgbClr val="16202B"/>
+                </a:solidFill>
+                <a:latin typeface="Arial"/>
+                <a:ea typeface="Arial"/>
+                <a:cs typeface="Arial"/>
+              </a:defRPr>
+            </a:lvl7pPr>
+            <a:lvl8pPr>
+              <a:defRPr sz="1650" b="0">
+                <a:solidFill>
+                  <a:srgbClr val="16202B"/>
+                </a:solidFill>
+                <a:latin typeface="Arial"/>
+                <a:ea typeface="Arial"/>
+                <a:cs typeface="Arial"/>
+              </a:defRPr>
+            </a:lvl8pPr>
+            <a:lvl9pPr>
+              <a:defRPr sz="1650" b="0">
+                <a:solidFill>
+                  <a:srgbClr val="16202B"/>
+                </a:solidFill>
+                <a:latin typeface="Arial"/>
+                <a:ea typeface="Arial"/>
+                <a:cs typeface="Arial"/>
+              </a:defRPr>
+            </a:lvl9pPr>
           </a:lstStyle>
           <a:p xmlns:a="http://schemas.openxmlformats.org/drawingml/2006/main">
             <a:pPr>
+              <a:buNone/>
               <a:defRPr sz="1650" b="0">
                 <a:solidFill>
                   <a:srgbClr val="16202B"/>
@@ -4792,14 +7673,14 @@
                 <a:ea typeface="Arial"/>
                 <a:cs typeface="Arial"/>
               </a:rPr>
-              <a:t>Optionally ask Gemma for a low-pressure reorder reminder. A person reviews it. Rhythm never sends messages.</a:t>
+              <a:t>Gemma can draft a reminder. Automated checks screen it; the merchant reviews it. Rhythm does not send messages.</a:t>
             </a:r>
           </a:p>
         </p:txBody>
       </p:sp>
       <p:sp>
         <p:nvSpPr>
-          <p:cNvPr id="13" name="">
+          <p:cNvPr id="13" name="Rectangle 12">
             <a:extLst xmlns:a="http://schemas.openxmlformats.org/drawingml/2006/main">
               <a:ext uri="{FF2B5EF4-FFF2-40B4-BE49-F238E27FC236}">
                 <a16:creationId xmlns:a16="http://schemas.microsoft.com/office/drawing/2014/main" id="{4E358F0D-4231-4ADA-B052-D2E94CBD9973}"/>
@@ -4840,9 +7721,100 @@
                 <a:cs typeface="Arial"/>
               </a:defRPr>
             </a:defPPr>
+            <a:lvl1pPr>
+              <a:defRPr sz="1800" b="1">
+                <a:solidFill>
+                  <a:srgbClr val="536170"/>
+                </a:solidFill>
+                <a:latin typeface="Arial"/>
+                <a:ea typeface="Arial"/>
+                <a:cs typeface="Arial"/>
+              </a:defRPr>
+            </a:lvl1pPr>
+            <a:lvl2pPr>
+              <a:defRPr sz="1800" b="1">
+                <a:solidFill>
+                  <a:srgbClr val="536170"/>
+                </a:solidFill>
+                <a:latin typeface="Arial"/>
+                <a:ea typeface="Arial"/>
+                <a:cs typeface="Arial"/>
+              </a:defRPr>
+            </a:lvl2pPr>
+            <a:lvl3pPr>
+              <a:defRPr sz="1800" b="1">
+                <a:solidFill>
+                  <a:srgbClr val="536170"/>
+                </a:solidFill>
+                <a:latin typeface="Arial"/>
+                <a:ea typeface="Arial"/>
+                <a:cs typeface="Arial"/>
+              </a:defRPr>
+            </a:lvl3pPr>
+            <a:lvl4pPr>
+              <a:defRPr sz="1800" b="1">
+                <a:solidFill>
+                  <a:srgbClr val="536170"/>
+                </a:solidFill>
+                <a:latin typeface="Arial"/>
+                <a:ea typeface="Arial"/>
+                <a:cs typeface="Arial"/>
+              </a:defRPr>
+            </a:lvl4pPr>
+            <a:lvl5pPr>
+              <a:defRPr sz="1800" b="1">
+                <a:solidFill>
+                  <a:srgbClr val="536170"/>
+                </a:solidFill>
+                <a:latin typeface="Arial"/>
+                <a:ea typeface="Arial"/>
+                <a:cs typeface="Arial"/>
+              </a:defRPr>
+            </a:lvl5pPr>
+            <a:lvl6pPr>
+              <a:defRPr sz="1800" b="1">
+                <a:solidFill>
+                  <a:srgbClr val="536170"/>
+                </a:solidFill>
+                <a:latin typeface="Arial"/>
+                <a:ea typeface="Arial"/>
+                <a:cs typeface="Arial"/>
+              </a:defRPr>
+            </a:lvl6pPr>
+            <a:lvl7pPr>
+              <a:defRPr sz="1800" b="1">
+                <a:solidFill>
+                  <a:srgbClr val="536170"/>
+                </a:solidFill>
+                <a:latin typeface="Arial"/>
+                <a:ea typeface="Arial"/>
+                <a:cs typeface="Arial"/>
+              </a:defRPr>
+            </a:lvl7pPr>
+            <a:lvl8pPr>
+              <a:defRPr sz="1800" b="1">
+                <a:solidFill>
+                  <a:srgbClr val="536170"/>
+                </a:solidFill>
+                <a:latin typeface="Arial"/>
+                <a:ea typeface="Arial"/>
+                <a:cs typeface="Arial"/>
+              </a:defRPr>
+            </a:lvl8pPr>
+            <a:lvl9pPr>
+              <a:defRPr sz="1800" b="1">
+                <a:solidFill>
+                  <a:srgbClr val="536170"/>
+                </a:solidFill>
+                <a:latin typeface="Arial"/>
+                <a:ea typeface="Arial"/>
+                <a:cs typeface="Arial"/>
+              </a:defRPr>
+            </a:lvl9pPr>
           </a:lstStyle>
           <a:p xmlns:a="http://schemas.openxmlformats.org/drawingml/2006/main">
             <a:pPr>
+              <a:buNone/>
               <a:defRPr sz="1800" b="1">
                 <a:solidFill>
                   <a:srgbClr val="536170"/>
@@ -4861,7 +7833,7 @@
                 <a:ea typeface="Arial"/>
                 <a:cs typeface="Arial"/>
               </a:rPr>
-              <a:t>The model writes wording. A deterministic rule creates the review signal.</a:t>
+              <a:t>A fixed rule flags shoppers. Gemma only drafts the follow-up wording.</a:t>
             </a:r>
           </a:p>
         </p:txBody>
@@ -4897,7 +7869,7 @@
       </p:grpSpPr>
       <p:sp>
         <p:nvSpPr>
-          <p:cNvPr id="12" name="">
+          <p:cNvPr id="12" name="Rectangle 11">
             <a:extLst xmlns:a="http://schemas.openxmlformats.org/drawingml/2006/main">
               <a:ext uri="{FF2B5EF4-FFF2-40B4-BE49-F238E27FC236}">
                 <a16:creationId xmlns:a16="http://schemas.microsoft.com/office/drawing/2014/main" id="{DAB3DA18-CB60-4AC1-A71F-F369022885B0}"/>
@@ -4925,7 +7897,7 @@
         </p:spPr>
         <p:txBody>
           <a:bodyPr xmlns:a="http://schemas.openxmlformats.org/drawingml/2006/main" wrap="square" lIns="0" tIns="0" rIns="0" bIns="0" anchor="ctr">
-            <a:normAutofit fontScale="100000"/>
+            <a:normAutofit/>
           </a:bodyPr>
           <a:lstStyle xmlns:a="http://schemas.openxmlformats.org/drawingml/2006/main">
             <a:defPPr>
@@ -4938,9 +7910,100 @@
                 <a:cs typeface="Arial"/>
               </a:defRPr>
             </a:defPPr>
+            <a:lvl1pPr>
+              <a:defRPr sz="1050" b="1">
+                <a:solidFill>
+                  <a:srgbClr val="315BCE"/>
+                </a:solidFill>
+                <a:latin typeface="Arial"/>
+                <a:ea typeface="Arial"/>
+                <a:cs typeface="Arial"/>
+              </a:defRPr>
+            </a:lvl1pPr>
+            <a:lvl2pPr>
+              <a:defRPr sz="1050" b="1">
+                <a:solidFill>
+                  <a:srgbClr val="315BCE"/>
+                </a:solidFill>
+                <a:latin typeface="Arial"/>
+                <a:ea typeface="Arial"/>
+                <a:cs typeface="Arial"/>
+              </a:defRPr>
+            </a:lvl2pPr>
+            <a:lvl3pPr>
+              <a:defRPr sz="1050" b="1">
+                <a:solidFill>
+                  <a:srgbClr val="315BCE"/>
+                </a:solidFill>
+                <a:latin typeface="Arial"/>
+                <a:ea typeface="Arial"/>
+                <a:cs typeface="Arial"/>
+              </a:defRPr>
+            </a:lvl3pPr>
+            <a:lvl4pPr>
+              <a:defRPr sz="1050" b="1">
+                <a:solidFill>
+                  <a:srgbClr val="315BCE"/>
+                </a:solidFill>
+                <a:latin typeface="Arial"/>
+                <a:ea typeface="Arial"/>
+                <a:cs typeface="Arial"/>
+              </a:defRPr>
+            </a:lvl4pPr>
+            <a:lvl5pPr>
+              <a:defRPr sz="1050" b="1">
+                <a:solidFill>
+                  <a:srgbClr val="315BCE"/>
+                </a:solidFill>
+                <a:latin typeface="Arial"/>
+                <a:ea typeface="Arial"/>
+                <a:cs typeface="Arial"/>
+              </a:defRPr>
+            </a:lvl5pPr>
+            <a:lvl6pPr>
+              <a:defRPr sz="1050" b="1">
+                <a:solidFill>
+                  <a:srgbClr val="315BCE"/>
+                </a:solidFill>
+                <a:latin typeface="Arial"/>
+                <a:ea typeface="Arial"/>
+                <a:cs typeface="Arial"/>
+              </a:defRPr>
+            </a:lvl6pPr>
+            <a:lvl7pPr>
+              <a:defRPr sz="1050" b="1">
+                <a:solidFill>
+                  <a:srgbClr val="315BCE"/>
+                </a:solidFill>
+                <a:latin typeface="Arial"/>
+                <a:ea typeface="Arial"/>
+                <a:cs typeface="Arial"/>
+              </a:defRPr>
+            </a:lvl7pPr>
+            <a:lvl8pPr>
+              <a:defRPr sz="1050" b="1">
+                <a:solidFill>
+                  <a:srgbClr val="315BCE"/>
+                </a:solidFill>
+                <a:latin typeface="Arial"/>
+                <a:ea typeface="Arial"/>
+                <a:cs typeface="Arial"/>
+              </a:defRPr>
+            </a:lvl8pPr>
+            <a:lvl9pPr>
+              <a:defRPr sz="1050" b="1">
+                <a:solidFill>
+                  <a:srgbClr val="315BCE"/>
+                </a:solidFill>
+                <a:latin typeface="Arial"/>
+                <a:ea typeface="Arial"/>
+                <a:cs typeface="Arial"/>
+              </a:defRPr>
+            </a:lvl9pPr>
           </a:lstStyle>
           <a:p xmlns:a="http://schemas.openxmlformats.org/drawingml/2006/main">
             <a:pPr>
+              <a:buNone/>
               <a:defRPr sz="1050" b="1">
                 <a:solidFill>
                   <a:srgbClr val="315BCE"/>
@@ -4966,7 +8029,7 @@
       </p:sp>
       <p:sp>
         <p:nvSpPr>
-          <p:cNvPr id="2" name="">
+          <p:cNvPr id="2" name="Rectangle 1">
             <a:extLst xmlns:a="http://schemas.openxmlformats.org/drawingml/2006/main">
               <a:ext uri="{FF2B5EF4-FFF2-40B4-BE49-F238E27FC236}">
                 <a16:creationId xmlns:a16="http://schemas.microsoft.com/office/drawing/2014/main" id="{DA608729-6613-422D-A41A-D008DE6B971B}"/>
@@ -4994,7 +8057,7 @@
         </p:spPr>
         <p:txBody>
           <a:bodyPr xmlns:a="http://schemas.openxmlformats.org/drawingml/2006/main" wrap="square" lIns="0" tIns="0" rIns="0" bIns="0" anchor="ctr">
-            <a:normAutofit fontScale="100000"/>
+            <a:normAutofit/>
           </a:bodyPr>
           <a:lstStyle xmlns:a="http://schemas.openxmlformats.org/drawingml/2006/main">
             <a:defPPr>
@@ -5007,9 +8070,100 @@
                 <a:cs typeface="Arial"/>
               </a:defRPr>
             </a:defPPr>
+            <a:lvl1pPr>
+              <a:defRPr sz="3000" b="1">
+                <a:solidFill>
+                  <a:srgbClr val="16202B"/>
+                </a:solidFill>
+                <a:latin typeface="Arial"/>
+                <a:ea typeface="Arial"/>
+                <a:cs typeface="Arial"/>
+              </a:defRPr>
+            </a:lvl1pPr>
+            <a:lvl2pPr>
+              <a:defRPr sz="3000" b="1">
+                <a:solidFill>
+                  <a:srgbClr val="16202B"/>
+                </a:solidFill>
+                <a:latin typeface="Arial"/>
+                <a:ea typeface="Arial"/>
+                <a:cs typeface="Arial"/>
+              </a:defRPr>
+            </a:lvl2pPr>
+            <a:lvl3pPr>
+              <a:defRPr sz="3000" b="1">
+                <a:solidFill>
+                  <a:srgbClr val="16202B"/>
+                </a:solidFill>
+                <a:latin typeface="Arial"/>
+                <a:ea typeface="Arial"/>
+                <a:cs typeface="Arial"/>
+              </a:defRPr>
+            </a:lvl3pPr>
+            <a:lvl4pPr>
+              <a:defRPr sz="3000" b="1">
+                <a:solidFill>
+                  <a:srgbClr val="16202B"/>
+                </a:solidFill>
+                <a:latin typeface="Arial"/>
+                <a:ea typeface="Arial"/>
+                <a:cs typeface="Arial"/>
+              </a:defRPr>
+            </a:lvl4pPr>
+            <a:lvl5pPr>
+              <a:defRPr sz="3000" b="1">
+                <a:solidFill>
+                  <a:srgbClr val="16202B"/>
+                </a:solidFill>
+                <a:latin typeface="Arial"/>
+                <a:ea typeface="Arial"/>
+                <a:cs typeface="Arial"/>
+              </a:defRPr>
+            </a:lvl5pPr>
+            <a:lvl6pPr>
+              <a:defRPr sz="3000" b="1">
+                <a:solidFill>
+                  <a:srgbClr val="16202B"/>
+                </a:solidFill>
+                <a:latin typeface="Arial"/>
+                <a:ea typeface="Arial"/>
+                <a:cs typeface="Arial"/>
+              </a:defRPr>
+            </a:lvl6pPr>
+            <a:lvl7pPr>
+              <a:defRPr sz="3000" b="1">
+                <a:solidFill>
+                  <a:srgbClr val="16202B"/>
+                </a:solidFill>
+                <a:latin typeface="Arial"/>
+                <a:ea typeface="Arial"/>
+                <a:cs typeface="Arial"/>
+              </a:defRPr>
+            </a:lvl7pPr>
+            <a:lvl8pPr>
+              <a:defRPr sz="3000" b="1">
+                <a:solidFill>
+                  <a:srgbClr val="16202B"/>
+                </a:solidFill>
+                <a:latin typeface="Arial"/>
+                <a:ea typeface="Arial"/>
+                <a:cs typeface="Arial"/>
+              </a:defRPr>
+            </a:lvl8pPr>
+            <a:lvl9pPr>
+              <a:defRPr sz="3000" b="1">
+                <a:solidFill>
+                  <a:srgbClr val="16202B"/>
+                </a:solidFill>
+                <a:latin typeface="Arial"/>
+                <a:ea typeface="Arial"/>
+                <a:cs typeface="Arial"/>
+              </a:defRPr>
+            </a:lvl9pPr>
           </a:lstStyle>
           <a:p xmlns:a="http://schemas.openxmlformats.org/drawingml/2006/main">
             <a:pPr>
+              <a:buNone/>
               <a:defRPr sz="3000" b="1">
                 <a:solidFill>
                   <a:srgbClr val="16202B"/>
@@ -5035,7 +8189,7 @@
       </p:sp>
       <p:sp>
         <p:nvSpPr>
-          <p:cNvPr id="3" name="">
+          <p:cNvPr id="3" name="Rectangle 2">
             <a:extLst xmlns:a="http://schemas.openxmlformats.org/drawingml/2006/main">
               <a:ext uri="{FF2B5EF4-FFF2-40B4-BE49-F238E27FC236}">
                 <a16:creationId xmlns:a16="http://schemas.microsoft.com/office/drawing/2014/main" id="{9AF7AFBB-6CC4-4FC2-91C0-ED7D91AA97D5}"/>
@@ -5063,7 +8217,7 @@
         </p:spPr>
         <p:txBody>
           <a:bodyPr xmlns:a="http://schemas.openxmlformats.org/drawingml/2006/main" wrap="square" lIns="0" tIns="0" rIns="0" bIns="0" anchor="ctr">
-            <a:normAutofit fontScale="100000"/>
+            <a:normAutofit/>
           </a:bodyPr>
           <a:lstStyle xmlns:a="http://schemas.openxmlformats.org/drawingml/2006/main">
             <a:defPPr algn="r">
@@ -5076,9 +8230,100 @@
                 <a:cs typeface="Arial"/>
               </a:defRPr>
             </a:defPPr>
+            <a:lvl1pPr algn="r">
+              <a:defRPr sz="1050" b="1">
+                <a:solidFill>
+                  <a:srgbClr val="536170"/>
+                </a:solidFill>
+                <a:latin typeface="Arial"/>
+                <a:ea typeface="Arial"/>
+                <a:cs typeface="Arial"/>
+              </a:defRPr>
+            </a:lvl1pPr>
+            <a:lvl2pPr algn="r">
+              <a:defRPr sz="1050" b="1">
+                <a:solidFill>
+                  <a:srgbClr val="536170"/>
+                </a:solidFill>
+                <a:latin typeface="Arial"/>
+                <a:ea typeface="Arial"/>
+                <a:cs typeface="Arial"/>
+              </a:defRPr>
+            </a:lvl2pPr>
+            <a:lvl3pPr algn="r">
+              <a:defRPr sz="1050" b="1">
+                <a:solidFill>
+                  <a:srgbClr val="536170"/>
+                </a:solidFill>
+                <a:latin typeface="Arial"/>
+                <a:ea typeface="Arial"/>
+                <a:cs typeface="Arial"/>
+              </a:defRPr>
+            </a:lvl3pPr>
+            <a:lvl4pPr algn="r">
+              <a:defRPr sz="1050" b="1">
+                <a:solidFill>
+                  <a:srgbClr val="536170"/>
+                </a:solidFill>
+                <a:latin typeface="Arial"/>
+                <a:ea typeface="Arial"/>
+                <a:cs typeface="Arial"/>
+              </a:defRPr>
+            </a:lvl4pPr>
+            <a:lvl5pPr algn="r">
+              <a:defRPr sz="1050" b="1">
+                <a:solidFill>
+                  <a:srgbClr val="536170"/>
+                </a:solidFill>
+                <a:latin typeface="Arial"/>
+                <a:ea typeface="Arial"/>
+                <a:cs typeface="Arial"/>
+              </a:defRPr>
+            </a:lvl5pPr>
+            <a:lvl6pPr algn="r">
+              <a:defRPr sz="1050" b="1">
+                <a:solidFill>
+                  <a:srgbClr val="536170"/>
+                </a:solidFill>
+                <a:latin typeface="Arial"/>
+                <a:ea typeface="Arial"/>
+                <a:cs typeface="Arial"/>
+              </a:defRPr>
+            </a:lvl6pPr>
+            <a:lvl7pPr algn="r">
+              <a:defRPr sz="1050" b="1">
+                <a:solidFill>
+                  <a:srgbClr val="536170"/>
+                </a:solidFill>
+                <a:latin typeface="Arial"/>
+                <a:ea typeface="Arial"/>
+                <a:cs typeface="Arial"/>
+              </a:defRPr>
+            </a:lvl7pPr>
+            <a:lvl8pPr algn="r">
+              <a:defRPr sz="1050" b="1">
+                <a:solidFill>
+                  <a:srgbClr val="536170"/>
+                </a:solidFill>
+                <a:latin typeface="Arial"/>
+                <a:ea typeface="Arial"/>
+                <a:cs typeface="Arial"/>
+              </a:defRPr>
+            </a:lvl8pPr>
+            <a:lvl9pPr algn="r">
+              <a:defRPr sz="1050" b="1">
+                <a:solidFill>
+                  <a:srgbClr val="536170"/>
+                </a:solidFill>
+                <a:latin typeface="Arial"/>
+                <a:ea typeface="Arial"/>
+                <a:cs typeface="Arial"/>
+              </a:defRPr>
+            </a:lvl9pPr>
           </a:lstStyle>
           <a:p xmlns:a="http://schemas.openxmlformats.org/drawingml/2006/main">
             <a:pPr algn="r">
+              <a:buNone/>
               <a:defRPr sz="1050" b="1">
                 <a:solidFill>
                   <a:srgbClr val="536170"/>
@@ -5104,7 +8349,7 @@
       </p:sp>
       <p:sp>
         <p:nvSpPr>
-          <p:cNvPr id="4" name="">
+          <p:cNvPr id="4" name="Rectangle 3">
             <a:extLst xmlns:a="http://schemas.openxmlformats.org/drawingml/2006/main">
               <a:ext uri="{FF2B5EF4-FFF2-40B4-BE49-F238E27FC236}">
                 <a16:creationId xmlns:a16="http://schemas.microsoft.com/office/drawing/2014/main" id="{94223111-A8DC-484A-9172-CB26BECA4563}"/>
@@ -5132,7 +8377,7 @@
         </p:spPr>
         <p:txBody>
           <a:bodyPr xmlns:a="http://schemas.openxmlformats.org/drawingml/2006/main" wrap="square" lIns="0" tIns="0" rIns="0" bIns="0" anchor="ctr">
-            <a:normAutofit fontScale="100000"/>
+            <a:normAutofit/>
           </a:bodyPr>
           <a:lstStyle xmlns:a="http://schemas.openxmlformats.org/drawingml/2006/main">
             <a:defPPr>
@@ -5145,9 +8390,100 @@
                 <a:cs typeface="Arial"/>
               </a:defRPr>
             </a:defPPr>
+            <a:lvl1pPr>
+              <a:defRPr sz="1125" b="1">
+                <a:solidFill>
+                  <a:srgbClr val="315BCE"/>
+                </a:solidFill>
+                <a:latin typeface="Arial"/>
+                <a:ea typeface="Arial"/>
+                <a:cs typeface="Arial"/>
+              </a:defRPr>
+            </a:lvl1pPr>
+            <a:lvl2pPr>
+              <a:defRPr sz="1125" b="1">
+                <a:solidFill>
+                  <a:srgbClr val="315BCE"/>
+                </a:solidFill>
+                <a:latin typeface="Arial"/>
+                <a:ea typeface="Arial"/>
+                <a:cs typeface="Arial"/>
+              </a:defRPr>
+            </a:lvl2pPr>
+            <a:lvl3pPr>
+              <a:defRPr sz="1125" b="1">
+                <a:solidFill>
+                  <a:srgbClr val="315BCE"/>
+                </a:solidFill>
+                <a:latin typeface="Arial"/>
+                <a:ea typeface="Arial"/>
+                <a:cs typeface="Arial"/>
+              </a:defRPr>
+            </a:lvl3pPr>
+            <a:lvl4pPr>
+              <a:defRPr sz="1125" b="1">
+                <a:solidFill>
+                  <a:srgbClr val="315BCE"/>
+                </a:solidFill>
+                <a:latin typeface="Arial"/>
+                <a:ea typeface="Arial"/>
+                <a:cs typeface="Arial"/>
+              </a:defRPr>
+            </a:lvl4pPr>
+            <a:lvl5pPr>
+              <a:defRPr sz="1125" b="1">
+                <a:solidFill>
+                  <a:srgbClr val="315BCE"/>
+                </a:solidFill>
+                <a:latin typeface="Arial"/>
+                <a:ea typeface="Arial"/>
+                <a:cs typeface="Arial"/>
+              </a:defRPr>
+            </a:lvl5pPr>
+            <a:lvl6pPr>
+              <a:defRPr sz="1125" b="1">
+                <a:solidFill>
+                  <a:srgbClr val="315BCE"/>
+                </a:solidFill>
+                <a:latin typeface="Arial"/>
+                <a:ea typeface="Arial"/>
+                <a:cs typeface="Arial"/>
+              </a:defRPr>
+            </a:lvl6pPr>
+            <a:lvl7pPr>
+              <a:defRPr sz="1125" b="1">
+                <a:solidFill>
+                  <a:srgbClr val="315BCE"/>
+                </a:solidFill>
+                <a:latin typeface="Arial"/>
+                <a:ea typeface="Arial"/>
+                <a:cs typeface="Arial"/>
+              </a:defRPr>
+            </a:lvl7pPr>
+            <a:lvl8pPr>
+              <a:defRPr sz="1125" b="1">
+                <a:solidFill>
+                  <a:srgbClr val="315BCE"/>
+                </a:solidFill>
+                <a:latin typeface="Arial"/>
+                <a:ea typeface="Arial"/>
+                <a:cs typeface="Arial"/>
+              </a:defRPr>
+            </a:lvl8pPr>
+            <a:lvl9pPr>
+              <a:defRPr sz="1125" b="1">
+                <a:solidFill>
+                  <a:srgbClr val="315BCE"/>
+                </a:solidFill>
+                <a:latin typeface="Arial"/>
+                <a:ea typeface="Arial"/>
+                <a:cs typeface="Arial"/>
+              </a:defRPr>
+            </a:lvl9pPr>
           </a:lstStyle>
           <a:p xmlns:a="http://schemas.openxmlformats.org/drawingml/2006/main">
             <a:pPr>
+              <a:buNone/>
               <a:defRPr sz="1125" b="1">
                 <a:solidFill>
                   <a:srgbClr val="315BCE"/>
@@ -5173,7 +8509,7 @@
       </p:sp>
       <p:sp>
         <p:nvSpPr>
-          <p:cNvPr id="5" name="">
+          <p:cNvPr id="5" name="Rectangle 4">
             <a:extLst xmlns:a="http://schemas.openxmlformats.org/drawingml/2006/main">
               <a:ext uri="{FF2B5EF4-FFF2-40B4-BE49-F238E27FC236}">
                 <a16:creationId xmlns:a16="http://schemas.microsoft.com/office/drawing/2014/main" id="{9BC93365-EAC2-42B5-8697-EEB31AD40825}"/>
@@ -5214,9 +8550,100 @@
                 <a:cs typeface="Arial"/>
               </a:defRPr>
             </a:defPPr>
+            <a:lvl1pPr>
+              <a:defRPr sz="2100" b="1">
+                <a:solidFill>
+                  <a:srgbClr val="16202B"/>
+                </a:solidFill>
+                <a:latin typeface="Arial"/>
+                <a:ea typeface="Arial"/>
+                <a:cs typeface="Arial"/>
+              </a:defRPr>
+            </a:lvl1pPr>
+            <a:lvl2pPr>
+              <a:defRPr sz="2100" b="1">
+                <a:solidFill>
+                  <a:srgbClr val="16202B"/>
+                </a:solidFill>
+                <a:latin typeface="Arial"/>
+                <a:ea typeface="Arial"/>
+                <a:cs typeface="Arial"/>
+              </a:defRPr>
+            </a:lvl2pPr>
+            <a:lvl3pPr>
+              <a:defRPr sz="2100" b="1">
+                <a:solidFill>
+                  <a:srgbClr val="16202B"/>
+                </a:solidFill>
+                <a:latin typeface="Arial"/>
+                <a:ea typeface="Arial"/>
+                <a:cs typeface="Arial"/>
+              </a:defRPr>
+            </a:lvl3pPr>
+            <a:lvl4pPr>
+              <a:defRPr sz="2100" b="1">
+                <a:solidFill>
+                  <a:srgbClr val="16202B"/>
+                </a:solidFill>
+                <a:latin typeface="Arial"/>
+                <a:ea typeface="Arial"/>
+                <a:cs typeface="Arial"/>
+              </a:defRPr>
+            </a:lvl4pPr>
+            <a:lvl5pPr>
+              <a:defRPr sz="2100" b="1">
+                <a:solidFill>
+                  <a:srgbClr val="16202B"/>
+                </a:solidFill>
+                <a:latin typeface="Arial"/>
+                <a:ea typeface="Arial"/>
+                <a:cs typeface="Arial"/>
+              </a:defRPr>
+            </a:lvl5pPr>
+            <a:lvl6pPr>
+              <a:defRPr sz="2100" b="1">
+                <a:solidFill>
+                  <a:srgbClr val="16202B"/>
+                </a:solidFill>
+                <a:latin typeface="Arial"/>
+                <a:ea typeface="Arial"/>
+                <a:cs typeface="Arial"/>
+              </a:defRPr>
+            </a:lvl6pPr>
+            <a:lvl7pPr>
+              <a:defRPr sz="2100" b="1">
+                <a:solidFill>
+                  <a:srgbClr val="16202B"/>
+                </a:solidFill>
+                <a:latin typeface="Arial"/>
+                <a:ea typeface="Arial"/>
+                <a:cs typeface="Arial"/>
+              </a:defRPr>
+            </a:lvl7pPr>
+            <a:lvl8pPr>
+              <a:defRPr sz="2100" b="1">
+                <a:solidFill>
+                  <a:srgbClr val="16202B"/>
+                </a:solidFill>
+                <a:latin typeface="Arial"/>
+                <a:ea typeface="Arial"/>
+                <a:cs typeface="Arial"/>
+              </a:defRPr>
+            </a:lvl8pPr>
+            <a:lvl9pPr>
+              <a:defRPr sz="2100" b="1">
+                <a:solidFill>
+                  <a:srgbClr val="16202B"/>
+                </a:solidFill>
+                <a:latin typeface="Arial"/>
+                <a:ea typeface="Arial"/>
+                <a:cs typeface="Arial"/>
+              </a:defRPr>
+            </a:lvl9pPr>
           </a:lstStyle>
           <a:p xmlns:a="http://schemas.openxmlformats.org/drawingml/2006/main">
             <a:pPr>
+              <a:buNone/>
               <a:defRPr sz="2100" b="1">
                 <a:solidFill>
                   <a:srgbClr val="16202B"/>
@@ -5242,7 +8669,7 @@
       </p:sp>
       <p:sp>
         <p:nvSpPr>
-          <p:cNvPr id="6" name="">
+          <p:cNvPr id="6" name="Rectangle 5">
             <a:extLst xmlns:a="http://schemas.openxmlformats.org/drawingml/2006/main">
               <a:ext uri="{FF2B5EF4-FFF2-40B4-BE49-F238E27FC236}">
                 <a16:creationId xmlns:a16="http://schemas.microsoft.com/office/drawing/2014/main" id="{DBC3F546-AA76-443A-97FB-0ECF0BC9CC35}"/>
@@ -5270,7 +8697,7 @@
         </p:spPr>
         <p:txBody>
           <a:bodyPr xmlns:a="http://schemas.openxmlformats.org/drawingml/2006/main" wrap="square" lIns="0" tIns="0" rIns="0" bIns="0" anchor="ctr">
-            <a:normAutofit fontScale="100000"/>
+            <a:normAutofit/>
           </a:bodyPr>
           <a:lstStyle xmlns:a="http://schemas.openxmlformats.org/drawingml/2006/main">
             <a:defPPr>
@@ -5283,9 +8710,100 @@
                 <a:cs typeface="Arial"/>
               </a:defRPr>
             </a:defPPr>
+            <a:lvl1pPr>
+              <a:defRPr sz="1125" b="1">
+                <a:solidFill>
+                  <a:srgbClr val="315BCE"/>
+                </a:solidFill>
+                <a:latin typeface="Arial"/>
+                <a:ea typeface="Arial"/>
+                <a:cs typeface="Arial"/>
+              </a:defRPr>
+            </a:lvl1pPr>
+            <a:lvl2pPr>
+              <a:defRPr sz="1125" b="1">
+                <a:solidFill>
+                  <a:srgbClr val="315BCE"/>
+                </a:solidFill>
+                <a:latin typeface="Arial"/>
+                <a:ea typeface="Arial"/>
+                <a:cs typeface="Arial"/>
+              </a:defRPr>
+            </a:lvl2pPr>
+            <a:lvl3pPr>
+              <a:defRPr sz="1125" b="1">
+                <a:solidFill>
+                  <a:srgbClr val="315BCE"/>
+                </a:solidFill>
+                <a:latin typeface="Arial"/>
+                <a:ea typeface="Arial"/>
+                <a:cs typeface="Arial"/>
+              </a:defRPr>
+            </a:lvl3pPr>
+            <a:lvl4pPr>
+              <a:defRPr sz="1125" b="1">
+                <a:solidFill>
+                  <a:srgbClr val="315BCE"/>
+                </a:solidFill>
+                <a:latin typeface="Arial"/>
+                <a:ea typeface="Arial"/>
+                <a:cs typeface="Arial"/>
+              </a:defRPr>
+            </a:lvl4pPr>
+            <a:lvl5pPr>
+              <a:defRPr sz="1125" b="1">
+                <a:solidFill>
+                  <a:srgbClr val="315BCE"/>
+                </a:solidFill>
+                <a:latin typeface="Arial"/>
+                <a:ea typeface="Arial"/>
+                <a:cs typeface="Arial"/>
+              </a:defRPr>
+            </a:lvl5pPr>
+            <a:lvl6pPr>
+              <a:defRPr sz="1125" b="1">
+                <a:solidFill>
+                  <a:srgbClr val="315BCE"/>
+                </a:solidFill>
+                <a:latin typeface="Arial"/>
+                <a:ea typeface="Arial"/>
+                <a:cs typeface="Arial"/>
+              </a:defRPr>
+            </a:lvl6pPr>
+            <a:lvl7pPr>
+              <a:defRPr sz="1125" b="1">
+                <a:solidFill>
+                  <a:srgbClr val="315BCE"/>
+                </a:solidFill>
+                <a:latin typeface="Arial"/>
+                <a:ea typeface="Arial"/>
+                <a:cs typeface="Arial"/>
+              </a:defRPr>
+            </a:lvl7pPr>
+            <a:lvl8pPr>
+              <a:defRPr sz="1125" b="1">
+                <a:solidFill>
+                  <a:srgbClr val="315BCE"/>
+                </a:solidFill>
+                <a:latin typeface="Arial"/>
+                <a:ea typeface="Arial"/>
+                <a:cs typeface="Arial"/>
+              </a:defRPr>
+            </a:lvl8pPr>
+            <a:lvl9pPr>
+              <a:defRPr sz="1125" b="1">
+                <a:solidFill>
+                  <a:srgbClr val="315BCE"/>
+                </a:solidFill>
+                <a:latin typeface="Arial"/>
+                <a:ea typeface="Arial"/>
+                <a:cs typeface="Arial"/>
+              </a:defRPr>
+            </a:lvl9pPr>
           </a:lstStyle>
           <a:p xmlns:a="http://schemas.openxmlformats.org/drawingml/2006/main">
             <a:pPr>
+              <a:buNone/>
               <a:defRPr sz="1125" b="1">
                 <a:solidFill>
                   <a:srgbClr val="315BCE"/>
@@ -5311,7 +8829,7 @@
       </p:sp>
       <p:sp>
         <p:nvSpPr>
-          <p:cNvPr id="7" name="">
+          <p:cNvPr id="7" name="Rectangle 6">
             <a:extLst xmlns:a="http://schemas.openxmlformats.org/drawingml/2006/main">
               <a:ext uri="{FF2B5EF4-FFF2-40B4-BE49-F238E27FC236}">
                 <a16:creationId xmlns:a16="http://schemas.microsoft.com/office/drawing/2014/main" id="{E8C19C73-52C1-44C1-82C3-FEDF66A7FBEE}"/>
@@ -5339,7 +8857,7 @@
         </p:spPr>
         <p:txBody>
           <a:bodyPr xmlns:a="http://schemas.openxmlformats.org/drawingml/2006/main" wrap="square" lIns="0" tIns="0" rIns="0" bIns="0" anchor="ctr">
-            <a:normAutofit fontScale="100000"/>
+            <a:normAutofit/>
           </a:bodyPr>
           <a:lstStyle xmlns:a="http://schemas.openxmlformats.org/drawingml/2006/main">
             <a:defPPr>
@@ -5352,9 +8870,100 @@
                 <a:cs typeface="Arial"/>
               </a:defRPr>
             </a:defPPr>
+            <a:lvl1pPr>
+              <a:defRPr sz="2325" b="1">
+                <a:solidFill>
+                  <a:srgbClr val="16202B"/>
+                </a:solidFill>
+                <a:latin typeface="Arial"/>
+                <a:ea typeface="Arial"/>
+                <a:cs typeface="Arial"/>
+              </a:defRPr>
+            </a:lvl1pPr>
+            <a:lvl2pPr>
+              <a:defRPr sz="2325" b="1">
+                <a:solidFill>
+                  <a:srgbClr val="16202B"/>
+                </a:solidFill>
+                <a:latin typeface="Arial"/>
+                <a:ea typeface="Arial"/>
+                <a:cs typeface="Arial"/>
+              </a:defRPr>
+            </a:lvl2pPr>
+            <a:lvl3pPr>
+              <a:defRPr sz="2325" b="1">
+                <a:solidFill>
+                  <a:srgbClr val="16202B"/>
+                </a:solidFill>
+                <a:latin typeface="Arial"/>
+                <a:ea typeface="Arial"/>
+                <a:cs typeface="Arial"/>
+              </a:defRPr>
+            </a:lvl3pPr>
+            <a:lvl4pPr>
+              <a:defRPr sz="2325" b="1">
+                <a:solidFill>
+                  <a:srgbClr val="16202B"/>
+                </a:solidFill>
+                <a:latin typeface="Arial"/>
+                <a:ea typeface="Arial"/>
+                <a:cs typeface="Arial"/>
+              </a:defRPr>
+            </a:lvl4pPr>
+            <a:lvl5pPr>
+              <a:defRPr sz="2325" b="1">
+                <a:solidFill>
+                  <a:srgbClr val="16202B"/>
+                </a:solidFill>
+                <a:latin typeface="Arial"/>
+                <a:ea typeface="Arial"/>
+                <a:cs typeface="Arial"/>
+              </a:defRPr>
+            </a:lvl5pPr>
+            <a:lvl6pPr>
+              <a:defRPr sz="2325" b="1">
+                <a:solidFill>
+                  <a:srgbClr val="16202B"/>
+                </a:solidFill>
+                <a:latin typeface="Arial"/>
+                <a:ea typeface="Arial"/>
+                <a:cs typeface="Arial"/>
+              </a:defRPr>
+            </a:lvl6pPr>
+            <a:lvl7pPr>
+              <a:defRPr sz="2325" b="1">
+                <a:solidFill>
+                  <a:srgbClr val="16202B"/>
+                </a:solidFill>
+                <a:latin typeface="Arial"/>
+                <a:ea typeface="Arial"/>
+                <a:cs typeface="Arial"/>
+              </a:defRPr>
+            </a:lvl7pPr>
+            <a:lvl8pPr>
+              <a:defRPr sz="2325" b="1">
+                <a:solidFill>
+                  <a:srgbClr val="16202B"/>
+                </a:solidFill>
+                <a:latin typeface="Arial"/>
+                <a:ea typeface="Arial"/>
+                <a:cs typeface="Arial"/>
+              </a:defRPr>
+            </a:lvl8pPr>
+            <a:lvl9pPr>
+              <a:defRPr sz="2325" b="1">
+                <a:solidFill>
+                  <a:srgbClr val="16202B"/>
+                </a:solidFill>
+                <a:latin typeface="Arial"/>
+                <a:ea typeface="Arial"/>
+                <a:cs typeface="Arial"/>
+              </a:defRPr>
+            </a:lvl9pPr>
           </a:lstStyle>
           <a:p xmlns:a="http://schemas.openxmlformats.org/drawingml/2006/main">
             <a:pPr>
+              <a:buNone/>
               <a:defRPr sz="2325" b="1">
                 <a:solidFill>
                   <a:srgbClr val="16202B"/>
@@ -5380,7 +8989,7 @@
       </p:sp>
       <p:sp>
         <p:nvSpPr>
-          <p:cNvPr id="8" name="">
+          <p:cNvPr id="8" name="Straight Connector 7">
             <a:extLst xmlns:a="http://schemas.openxmlformats.org/drawingml/2006/main">
               <a:ext uri="{FF2B5EF4-FFF2-40B4-BE49-F238E27FC236}">
                 <a16:creationId xmlns:a16="http://schemas.microsoft.com/office/drawing/2014/main" id="{FACAA184-844D-48C9-8D59-FD80A09E6E98}"/>
@@ -5407,10 +9016,17 @@
             <a:prstDash val="solid"/>
           </a:ln>
         </p:spPr>
+        <p:txBody>
+          <a:bodyPr xmlns:a="http://schemas.openxmlformats.org/drawingml/2006/main"/>
+          <a:lstStyle xmlns:a="http://schemas.openxmlformats.org/drawingml/2006/main"/>
+          <a:p xmlns:a="http://schemas.openxmlformats.org/drawingml/2006/main">
+            <a:endParaRPr/>
+          </a:p>
+        </p:txBody>
       </p:sp>
       <p:sp>
         <p:nvSpPr>
-          <p:cNvPr id="9" name="">
+          <p:cNvPr id="9" name="Rectangle 8">
             <a:extLst xmlns:a="http://schemas.openxmlformats.org/drawingml/2006/main">
               <a:ext uri="{FF2B5EF4-FFF2-40B4-BE49-F238E27FC236}">
                 <a16:creationId xmlns:a16="http://schemas.microsoft.com/office/drawing/2014/main" id="{008F7886-1FF6-4D32-B97E-D0997A23ED00}"/>
@@ -5438,7 +9054,7 @@
         </p:spPr>
         <p:txBody>
           <a:bodyPr xmlns:a="http://schemas.openxmlformats.org/drawingml/2006/main" wrap="square" lIns="0" tIns="0" rIns="0" bIns="0" anchor="ctr">
-            <a:normAutofit fontScale="100000"/>
+            <a:normAutofit/>
           </a:bodyPr>
           <a:lstStyle xmlns:a="http://schemas.openxmlformats.org/drawingml/2006/main">
             <a:defPPr>
@@ -5451,9 +9067,100 @@
                 <a:cs typeface="Arial"/>
               </a:defRPr>
             </a:defPPr>
+            <a:lvl1pPr>
+              <a:defRPr sz="1800" b="0">
+                <a:solidFill>
+                  <a:srgbClr val="536170"/>
+                </a:solidFill>
+                <a:latin typeface="Arial"/>
+                <a:ea typeface="Arial"/>
+                <a:cs typeface="Arial"/>
+              </a:defRPr>
+            </a:lvl1pPr>
+            <a:lvl2pPr>
+              <a:defRPr sz="1800" b="0">
+                <a:solidFill>
+                  <a:srgbClr val="536170"/>
+                </a:solidFill>
+                <a:latin typeface="Arial"/>
+                <a:ea typeface="Arial"/>
+                <a:cs typeface="Arial"/>
+              </a:defRPr>
+            </a:lvl2pPr>
+            <a:lvl3pPr>
+              <a:defRPr sz="1800" b="0">
+                <a:solidFill>
+                  <a:srgbClr val="536170"/>
+                </a:solidFill>
+                <a:latin typeface="Arial"/>
+                <a:ea typeface="Arial"/>
+                <a:cs typeface="Arial"/>
+              </a:defRPr>
+            </a:lvl3pPr>
+            <a:lvl4pPr>
+              <a:defRPr sz="1800" b="0">
+                <a:solidFill>
+                  <a:srgbClr val="536170"/>
+                </a:solidFill>
+                <a:latin typeface="Arial"/>
+                <a:ea typeface="Arial"/>
+                <a:cs typeface="Arial"/>
+              </a:defRPr>
+            </a:lvl4pPr>
+            <a:lvl5pPr>
+              <a:defRPr sz="1800" b="0">
+                <a:solidFill>
+                  <a:srgbClr val="536170"/>
+                </a:solidFill>
+                <a:latin typeface="Arial"/>
+                <a:ea typeface="Arial"/>
+                <a:cs typeface="Arial"/>
+              </a:defRPr>
+            </a:lvl5pPr>
+            <a:lvl6pPr>
+              <a:defRPr sz="1800" b="0">
+                <a:solidFill>
+                  <a:srgbClr val="536170"/>
+                </a:solidFill>
+                <a:latin typeface="Arial"/>
+                <a:ea typeface="Arial"/>
+                <a:cs typeface="Arial"/>
+              </a:defRPr>
+            </a:lvl6pPr>
+            <a:lvl7pPr>
+              <a:defRPr sz="1800" b="0">
+                <a:solidFill>
+                  <a:srgbClr val="536170"/>
+                </a:solidFill>
+                <a:latin typeface="Arial"/>
+                <a:ea typeface="Arial"/>
+                <a:cs typeface="Arial"/>
+              </a:defRPr>
+            </a:lvl7pPr>
+            <a:lvl8pPr>
+              <a:defRPr sz="1800" b="0">
+                <a:solidFill>
+                  <a:srgbClr val="536170"/>
+                </a:solidFill>
+                <a:latin typeface="Arial"/>
+                <a:ea typeface="Arial"/>
+                <a:cs typeface="Arial"/>
+              </a:defRPr>
+            </a:lvl8pPr>
+            <a:lvl9pPr>
+              <a:defRPr sz="1800" b="0">
+                <a:solidFill>
+                  <a:srgbClr val="536170"/>
+                </a:solidFill>
+                <a:latin typeface="Arial"/>
+                <a:ea typeface="Arial"/>
+                <a:cs typeface="Arial"/>
+              </a:defRPr>
+            </a:lvl9pPr>
           </a:lstStyle>
           <a:p xmlns:a="http://schemas.openxmlformats.org/drawingml/2006/main">
             <a:pPr>
+              <a:buNone/>
               <a:defRPr sz="1800" b="0">
                 <a:solidFill>
                   <a:srgbClr val="536170"/>
@@ -5479,7 +9186,7 @@
       </p:sp>
       <p:sp>
         <p:nvSpPr>
-          <p:cNvPr id="10" name="">
+          <p:cNvPr id="10" name="Rectangle 9">
             <a:extLst xmlns:a="http://schemas.openxmlformats.org/drawingml/2006/main">
               <a:ext uri="{FF2B5EF4-FFF2-40B4-BE49-F238E27FC236}">
                 <a16:creationId xmlns:a16="http://schemas.microsoft.com/office/drawing/2014/main" id="{BC1A3787-F738-45AB-BF0C-1F0819856C1B}"/>
@@ -5520,9 +9227,100 @@
                 <a:cs typeface="Arial"/>
               </a:defRPr>
             </a:defPPr>
+            <a:lvl1pPr>
+              <a:defRPr sz="1200" b="1">
+                <a:solidFill>
+                  <a:srgbClr val="287A63"/>
+                </a:solidFill>
+                <a:latin typeface="Arial"/>
+                <a:ea typeface="Arial"/>
+                <a:cs typeface="Arial"/>
+              </a:defRPr>
+            </a:lvl1pPr>
+            <a:lvl2pPr>
+              <a:defRPr sz="1200" b="1">
+                <a:solidFill>
+                  <a:srgbClr val="287A63"/>
+                </a:solidFill>
+                <a:latin typeface="Arial"/>
+                <a:ea typeface="Arial"/>
+                <a:cs typeface="Arial"/>
+              </a:defRPr>
+            </a:lvl2pPr>
+            <a:lvl3pPr>
+              <a:defRPr sz="1200" b="1">
+                <a:solidFill>
+                  <a:srgbClr val="287A63"/>
+                </a:solidFill>
+                <a:latin typeface="Arial"/>
+                <a:ea typeface="Arial"/>
+                <a:cs typeface="Arial"/>
+              </a:defRPr>
+            </a:lvl3pPr>
+            <a:lvl4pPr>
+              <a:defRPr sz="1200" b="1">
+                <a:solidFill>
+                  <a:srgbClr val="287A63"/>
+                </a:solidFill>
+                <a:latin typeface="Arial"/>
+                <a:ea typeface="Arial"/>
+                <a:cs typeface="Arial"/>
+              </a:defRPr>
+            </a:lvl4pPr>
+            <a:lvl5pPr>
+              <a:defRPr sz="1200" b="1">
+                <a:solidFill>
+                  <a:srgbClr val="287A63"/>
+                </a:solidFill>
+                <a:latin typeface="Arial"/>
+                <a:ea typeface="Arial"/>
+                <a:cs typeface="Arial"/>
+              </a:defRPr>
+            </a:lvl5pPr>
+            <a:lvl6pPr>
+              <a:defRPr sz="1200" b="1">
+                <a:solidFill>
+                  <a:srgbClr val="287A63"/>
+                </a:solidFill>
+                <a:latin typeface="Arial"/>
+                <a:ea typeface="Arial"/>
+                <a:cs typeface="Arial"/>
+              </a:defRPr>
+            </a:lvl6pPr>
+            <a:lvl7pPr>
+              <a:defRPr sz="1200" b="1">
+                <a:solidFill>
+                  <a:srgbClr val="287A63"/>
+                </a:solidFill>
+                <a:latin typeface="Arial"/>
+                <a:ea typeface="Arial"/>
+                <a:cs typeface="Arial"/>
+              </a:defRPr>
+            </a:lvl7pPr>
+            <a:lvl8pPr>
+              <a:defRPr sz="1200" b="1">
+                <a:solidFill>
+                  <a:srgbClr val="287A63"/>
+                </a:solidFill>
+                <a:latin typeface="Arial"/>
+                <a:ea typeface="Arial"/>
+                <a:cs typeface="Arial"/>
+              </a:defRPr>
+            </a:lvl8pPr>
+            <a:lvl9pPr>
+              <a:defRPr sz="1200" b="1">
+                <a:solidFill>
+                  <a:srgbClr val="287A63"/>
+                </a:solidFill>
+                <a:latin typeface="Arial"/>
+                <a:ea typeface="Arial"/>
+                <a:cs typeface="Arial"/>
+              </a:defRPr>
+            </a:lvl9pPr>
           </a:lstStyle>
           <a:p xmlns:a="http://schemas.openxmlformats.org/drawingml/2006/main">
             <a:pPr>
+              <a:buNone/>
               <a:defRPr sz="1200" b="1">
                 <a:solidFill>
                   <a:srgbClr val="287A63"/>
@@ -5541,14 +9339,14 @@
                 <a:ea typeface="Arial"/>
                 <a:cs typeface="Arial"/>
               </a:rPr>
-              <a:t>NOT A CHURN PREDICTION</a:t>
+              <a:t>REVIEW SIGNAL</a:t>
             </a:r>
           </a:p>
         </p:txBody>
       </p:sp>
       <p:sp>
         <p:nvSpPr>
-          <p:cNvPr id="11" name="">
+          <p:cNvPr id="11" name="Rectangle 10">
             <a:extLst xmlns:a="http://schemas.openxmlformats.org/drawingml/2006/main">
               <a:ext uri="{FF2B5EF4-FFF2-40B4-BE49-F238E27FC236}">
                 <a16:creationId xmlns:a16="http://schemas.microsoft.com/office/drawing/2014/main" id="{68EBA251-EC24-4D8F-8B8B-7C7A1B6E6FBE}"/>
@@ -5589,9 +9387,100 @@
                 <a:cs typeface="Arial"/>
               </a:defRPr>
             </a:defPPr>
+            <a:lvl1pPr>
+              <a:defRPr sz="1425" b="0">
+                <a:solidFill>
+                  <a:srgbClr val="536170"/>
+                </a:solidFill>
+                <a:latin typeface="Arial"/>
+                <a:ea typeface="Arial"/>
+                <a:cs typeface="Arial"/>
+              </a:defRPr>
+            </a:lvl1pPr>
+            <a:lvl2pPr>
+              <a:defRPr sz="1425" b="0">
+                <a:solidFill>
+                  <a:srgbClr val="536170"/>
+                </a:solidFill>
+                <a:latin typeface="Arial"/>
+                <a:ea typeface="Arial"/>
+                <a:cs typeface="Arial"/>
+              </a:defRPr>
+            </a:lvl2pPr>
+            <a:lvl3pPr>
+              <a:defRPr sz="1425" b="0">
+                <a:solidFill>
+                  <a:srgbClr val="536170"/>
+                </a:solidFill>
+                <a:latin typeface="Arial"/>
+                <a:ea typeface="Arial"/>
+                <a:cs typeface="Arial"/>
+              </a:defRPr>
+            </a:lvl3pPr>
+            <a:lvl4pPr>
+              <a:defRPr sz="1425" b="0">
+                <a:solidFill>
+                  <a:srgbClr val="536170"/>
+                </a:solidFill>
+                <a:latin typeface="Arial"/>
+                <a:ea typeface="Arial"/>
+                <a:cs typeface="Arial"/>
+              </a:defRPr>
+            </a:lvl4pPr>
+            <a:lvl5pPr>
+              <a:defRPr sz="1425" b="0">
+                <a:solidFill>
+                  <a:srgbClr val="536170"/>
+                </a:solidFill>
+                <a:latin typeface="Arial"/>
+                <a:ea typeface="Arial"/>
+                <a:cs typeface="Arial"/>
+              </a:defRPr>
+            </a:lvl5pPr>
+            <a:lvl6pPr>
+              <a:defRPr sz="1425" b="0">
+                <a:solidFill>
+                  <a:srgbClr val="536170"/>
+                </a:solidFill>
+                <a:latin typeface="Arial"/>
+                <a:ea typeface="Arial"/>
+                <a:cs typeface="Arial"/>
+              </a:defRPr>
+            </a:lvl6pPr>
+            <a:lvl7pPr>
+              <a:defRPr sz="1425" b="0">
+                <a:solidFill>
+                  <a:srgbClr val="536170"/>
+                </a:solidFill>
+                <a:latin typeface="Arial"/>
+                <a:ea typeface="Arial"/>
+                <a:cs typeface="Arial"/>
+              </a:defRPr>
+            </a:lvl7pPr>
+            <a:lvl8pPr>
+              <a:defRPr sz="1425" b="0">
+                <a:solidFill>
+                  <a:srgbClr val="536170"/>
+                </a:solidFill>
+                <a:latin typeface="Arial"/>
+                <a:ea typeface="Arial"/>
+                <a:cs typeface="Arial"/>
+              </a:defRPr>
+            </a:lvl8pPr>
+            <a:lvl9pPr>
+              <a:defRPr sz="1425" b="0">
+                <a:solidFill>
+                  <a:srgbClr val="536170"/>
+                </a:solidFill>
+                <a:latin typeface="Arial"/>
+                <a:ea typeface="Arial"/>
+                <a:cs typeface="Arial"/>
+              </a:defRPr>
+            </a:lvl9pPr>
           </a:lstStyle>
           <a:p xmlns:a="http://schemas.openxmlformats.org/drawingml/2006/main">
             <a:pPr>
+              <a:buNone/>
               <a:defRPr sz="1425" b="0">
                 <a:solidFill>
                   <a:srgbClr val="536170"/>
@@ -5610,7 +9499,7 @@
                 <a:ea typeface="Arial"/>
                 <a:cs typeface="Arial"/>
               </a:rPr>
-              <a:t>The signal says the interval changed. It does not explain why.</a:t>
+              <a:t>The interval changed. Merchant context helps explain why.</a:t>
             </a:r>
           </a:p>
         </p:txBody>
@@ -5646,7 +9535,7 @@
       </p:grpSpPr>
       <p:sp>
         <p:nvSpPr>
-          <p:cNvPr id="13" name="">
+          <p:cNvPr id="13" name="Rectangle 12">
             <a:extLst xmlns:a="http://schemas.openxmlformats.org/drawingml/2006/main">
               <a:ext uri="{FF2B5EF4-FFF2-40B4-BE49-F238E27FC236}">
                 <a16:creationId xmlns:a16="http://schemas.microsoft.com/office/drawing/2014/main" id="{23D54FB5-B2F5-446F-B247-7B8943F0F847}"/>
@@ -5674,7 +9563,7 @@
         </p:spPr>
         <p:txBody>
           <a:bodyPr xmlns:a="http://schemas.openxmlformats.org/drawingml/2006/main" wrap="square" lIns="0" tIns="0" rIns="0" bIns="0" anchor="ctr">
-            <a:normAutofit fontScale="100000"/>
+            <a:normAutofit/>
           </a:bodyPr>
           <a:lstStyle xmlns:a="http://schemas.openxmlformats.org/drawingml/2006/main">
             <a:defPPr>
@@ -5687,9 +9576,100 @@
                 <a:cs typeface="Arial"/>
               </a:defRPr>
             </a:defPPr>
+            <a:lvl1pPr>
+              <a:defRPr sz="1050" b="1">
+                <a:solidFill>
+                  <a:srgbClr val="315BCE"/>
+                </a:solidFill>
+                <a:latin typeface="Arial"/>
+                <a:ea typeface="Arial"/>
+                <a:cs typeface="Arial"/>
+              </a:defRPr>
+            </a:lvl1pPr>
+            <a:lvl2pPr>
+              <a:defRPr sz="1050" b="1">
+                <a:solidFill>
+                  <a:srgbClr val="315BCE"/>
+                </a:solidFill>
+                <a:latin typeface="Arial"/>
+                <a:ea typeface="Arial"/>
+                <a:cs typeface="Arial"/>
+              </a:defRPr>
+            </a:lvl2pPr>
+            <a:lvl3pPr>
+              <a:defRPr sz="1050" b="1">
+                <a:solidFill>
+                  <a:srgbClr val="315BCE"/>
+                </a:solidFill>
+                <a:latin typeface="Arial"/>
+                <a:ea typeface="Arial"/>
+                <a:cs typeface="Arial"/>
+              </a:defRPr>
+            </a:lvl3pPr>
+            <a:lvl4pPr>
+              <a:defRPr sz="1050" b="1">
+                <a:solidFill>
+                  <a:srgbClr val="315BCE"/>
+                </a:solidFill>
+                <a:latin typeface="Arial"/>
+                <a:ea typeface="Arial"/>
+                <a:cs typeface="Arial"/>
+              </a:defRPr>
+            </a:lvl4pPr>
+            <a:lvl5pPr>
+              <a:defRPr sz="1050" b="1">
+                <a:solidFill>
+                  <a:srgbClr val="315BCE"/>
+                </a:solidFill>
+                <a:latin typeface="Arial"/>
+                <a:ea typeface="Arial"/>
+                <a:cs typeface="Arial"/>
+              </a:defRPr>
+            </a:lvl5pPr>
+            <a:lvl6pPr>
+              <a:defRPr sz="1050" b="1">
+                <a:solidFill>
+                  <a:srgbClr val="315BCE"/>
+                </a:solidFill>
+                <a:latin typeface="Arial"/>
+                <a:ea typeface="Arial"/>
+                <a:cs typeface="Arial"/>
+              </a:defRPr>
+            </a:lvl6pPr>
+            <a:lvl7pPr>
+              <a:defRPr sz="1050" b="1">
+                <a:solidFill>
+                  <a:srgbClr val="315BCE"/>
+                </a:solidFill>
+                <a:latin typeface="Arial"/>
+                <a:ea typeface="Arial"/>
+                <a:cs typeface="Arial"/>
+              </a:defRPr>
+            </a:lvl7pPr>
+            <a:lvl8pPr>
+              <a:defRPr sz="1050" b="1">
+                <a:solidFill>
+                  <a:srgbClr val="315BCE"/>
+                </a:solidFill>
+                <a:latin typeface="Arial"/>
+                <a:ea typeface="Arial"/>
+                <a:cs typeface="Arial"/>
+              </a:defRPr>
+            </a:lvl8pPr>
+            <a:lvl9pPr>
+              <a:defRPr sz="1050" b="1">
+                <a:solidFill>
+                  <a:srgbClr val="315BCE"/>
+                </a:solidFill>
+                <a:latin typeface="Arial"/>
+                <a:ea typeface="Arial"/>
+                <a:cs typeface="Arial"/>
+              </a:defRPr>
+            </a:lvl9pPr>
           </a:lstStyle>
           <a:p xmlns:a="http://schemas.openxmlformats.org/drawingml/2006/main">
             <a:pPr>
+              <a:buNone/>
               <a:defRPr sz="1050" b="1">
                 <a:solidFill>
                   <a:srgbClr val="315BCE"/>
@@ -5715,7 +9695,7 @@
       </p:sp>
       <p:sp>
         <p:nvSpPr>
-          <p:cNvPr id="2" name="">
+          <p:cNvPr id="2" name="Rectangle 1">
             <a:extLst xmlns:a="http://schemas.openxmlformats.org/drawingml/2006/main">
               <a:ext uri="{FF2B5EF4-FFF2-40B4-BE49-F238E27FC236}">
                 <a16:creationId xmlns:a16="http://schemas.microsoft.com/office/drawing/2014/main" id="{2AFE4CE1-DDDE-4F4A-A7B1-C2F328914151}"/>
@@ -5743,7 +9723,7 @@
         </p:spPr>
         <p:txBody>
           <a:bodyPr xmlns:a="http://schemas.openxmlformats.org/drawingml/2006/main" wrap="square" lIns="0" tIns="0" rIns="0" bIns="0" anchor="ctr">
-            <a:normAutofit fontScale="100000"/>
+            <a:normAutofit/>
           </a:bodyPr>
           <a:lstStyle xmlns:a="http://schemas.openxmlformats.org/drawingml/2006/main">
             <a:defPPr>
@@ -5756,9 +9736,100 @@
                 <a:cs typeface="Arial"/>
               </a:defRPr>
             </a:defPPr>
+            <a:lvl1pPr>
+              <a:defRPr sz="3000" b="1">
+                <a:solidFill>
+                  <a:srgbClr val="16202B"/>
+                </a:solidFill>
+                <a:latin typeface="Arial"/>
+                <a:ea typeface="Arial"/>
+                <a:cs typeface="Arial"/>
+              </a:defRPr>
+            </a:lvl1pPr>
+            <a:lvl2pPr>
+              <a:defRPr sz="3000" b="1">
+                <a:solidFill>
+                  <a:srgbClr val="16202B"/>
+                </a:solidFill>
+                <a:latin typeface="Arial"/>
+                <a:ea typeface="Arial"/>
+                <a:cs typeface="Arial"/>
+              </a:defRPr>
+            </a:lvl2pPr>
+            <a:lvl3pPr>
+              <a:defRPr sz="3000" b="1">
+                <a:solidFill>
+                  <a:srgbClr val="16202B"/>
+                </a:solidFill>
+                <a:latin typeface="Arial"/>
+                <a:ea typeface="Arial"/>
+                <a:cs typeface="Arial"/>
+              </a:defRPr>
+            </a:lvl3pPr>
+            <a:lvl4pPr>
+              <a:defRPr sz="3000" b="1">
+                <a:solidFill>
+                  <a:srgbClr val="16202B"/>
+                </a:solidFill>
+                <a:latin typeface="Arial"/>
+                <a:ea typeface="Arial"/>
+                <a:cs typeface="Arial"/>
+              </a:defRPr>
+            </a:lvl4pPr>
+            <a:lvl5pPr>
+              <a:defRPr sz="3000" b="1">
+                <a:solidFill>
+                  <a:srgbClr val="16202B"/>
+                </a:solidFill>
+                <a:latin typeface="Arial"/>
+                <a:ea typeface="Arial"/>
+                <a:cs typeface="Arial"/>
+              </a:defRPr>
+            </a:lvl5pPr>
+            <a:lvl6pPr>
+              <a:defRPr sz="3000" b="1">
+                <a:solidFill>
+                  <a:srgbClr val="16202B"/>
+                </a:solidFill>
+                <a:latin typeface="Arial"/>
+                <a:ea typeface="Arial"/>
+                <a:cs typeface="Arial"/>
+              </a:defRPr>
+            </a:lvl6pPr>
+            <a:lvl7pPr>
+              <a:defRPr sz="3000" b="1">
+                <a:solidFill>
+                  <a:srgbClr val="16202B"/>
+                </a:solidFill>
+                <a:latin typeface="Arial"/>
+                <a:ea typeface="Arial"/>
+                <a:cs typeface="Arial"/>
+              </a:defRPr>
+            </a:lvl7pPr>
+            <a:lvl8pPr>
+              <a:defRPr sz="3000" b="1">
+                <a:solidFill>
+                  <a:srgbClr val="16202B"/>
+                </a:solidFill>
+                <a:latin typeface="Arial"/>
+                <a:ea typeface="Arial"/>
+                <a:cs typeface="Arial"/>
+              </a:defRPr>
+            </a:lvl8pPr>
+            <a:lvl9pPr>
+              <a:defRPr sz="3000" b="1">
+                <a:solidFill>
+                  <a:srgbClr val="16202B"/>
+                </a:solidFill>
+                <a:latin typeface="Arial"/>
+                <a:ea typeface="Arial"/>
+                <a:cs typeface="Arial"/>
+              </a:defRPr>
+            </a:lvl9pPr>
           </a:lstStyle>
           <a:p xmlns:a="http://schemas.openxmlformats.org/drawingml/2006/main">
             <a:pPr>
+              <a:buNone/>
               <a:defRPr sz="3000" b="1">
                 <a:solidFill>
                   <a:srgbClr val="16202B"/>
@@ -5784,7 +9855,7 @@
       </p:sp>
       <p:sp>
         <p:nvSpPr>
-          <p:cNvPr id="3" name="">
+          <p:cNvPr id="3" name="Rectangle 2">
             <a:extLst xmlns:a="http://schemas.openxmlformats.org/drawingml/2006/main">
               <a:ext uri="{FF2B5EF4-FFF2-40B4-BE49-F238E27FC236}">
                 <a16:creationId xmlns:a16="http://schemas.microsoft.com/office/drawing/2014/main" id="{751B8772-385B-4D5D-913E-5A2167A884F1}"/>
@@ -5812,7 +9883,7 @@
         </p:spPr>
         <p:txBody>
           <a:bodyPr xmlns:a="http://schemas.openxmlformats.org/drawingml/2006/main" wrap="square" lIns="0" tIns="0" rIns="0" bIns="0" anchor="ctr">
-            <a:normAutofit fontScale="100000"/>
+            <a:normAutofit/>
           </a:bodyPr>
           <a:lstStyle xmlns:a="http://schemas.openxmlformats.org/drawingml/2006/main">
             <a:defPPr algn="r">
@@ -5825,9 +9896,100 @@
                 <a:cs typeface="Arial"/>
               </a:defRPr>
             </a:defPPr>
+            <a:lvl1pPr algn="r">
+              <a:defRPr sz="1050" b="1">
+                <a:solidFill>
+                  <a:srgbClr val="536170"/>
+                </a:solidFill>
+                <a:latin typeface="Arial"/>
+                <a:ea typeface="Arial"/>
+                <a:cs typeface="Arial"/>
+              </a:defRPr>
+            </a:lvl1pPr>
+            <a:lvl2pPr algn="r">
+              <a:defRPr sz="1050" b="1">
+                <a:solidFill>
+                  <a:srgbClr val="536170"/>
+                </a:solidFill>
+                <a:latin typeface="Arial"/>
+                <a:ea typeface="Arial"/>
+                <a:cs typeface="Arial"/>
+              </a:defRPr>
+            </a:lvl2pPr>
+            <a:lvl3pPr algn="r">
+              <a:defRPr sz="1050" b="1">
+                <a:solidFill>
+                  <a:srgbClr val="536170"/>
+                </a:solidFill>
+                <a:latin typeface="Arial"/>
+                <a:ea typeface="Arial"/>
+                <a:cs typeface="Arial"/>
+              </a:defRPr>
+            </a:lvl3pPr>
+            <a:lvl4pPr algn="r">
+              <a:defRPr sz="1050" b="1">
+                <a:solidFill>
+                  <a:srgbClr val="536170"/>
+                </a:solidFill>
+                <a:latin typeface="Arial"/>
+                <a:ea typeface="Arial"/>
+                <a:cs typeface="Arial"/>
+              </a:defRPr>
+            </a:lvl4pPr>
+            <a:lvl5pPr algn="r">
+              <a:defRPr sz="1050" b="1">
+                <a:solidFill>
+                  <a:srgbClr val="536170"/>
+                </a:solidFill>
+                <a:latin typeface="Arial"/>
+                <a:ea typeface="Arial"/>
+                <a:cs typeface="Arial"/>
+              </a:defRPr>
+            </a:lvl5pPr>
+            <a:lvl6pPr algn="r">
+              <a:defRPr sz="1050" b="1">
+                <a:solidFill>
+                  <a:srgbClr val="536170"/>
+                </a:solidFill>
+                <a:latin typeface="Arial"/>
+                <a:ea typeface="Arial"/>
+                <a:cs typeface="Arial"/>
+              </a:defRPr>
+            </a:lvl6pPr>
+            <a:lvl7pPr algn="r">
+              <a:defRPr sz="1050" b="1">
+                <a:solidFill>
+                  <a:srgbClr val="536170"/>
+                </a:solidFill>
+                <a:latin typeface="Arial"/>
+                <a:ea typeface="Arial"/>
+                <a:cs typeface="Arial"/>
+              </a:defRPr>
+            </a:lvl7pPr>
+            <a:lvl8pPr algn="r">
+              <a:defRPr sz="1050" b="1">
+                <a:solidFill>
+                  <a:srgbClr val="536170"/>
+                </a:solidFill>
+                <a:latin typeface="Arial"/>
+                <a:ea typeface="Arial"/>
+                <a:cs typeface="Arial"/>
+              </a:defRPr>
+            </a:lvl8pPr>
+            <a:lvl9pPr algn="r">
+              <a:defRPr sz="1050" b="1">
+                <a:solidFill>
+                  <a:srgbClr val="536170"/>
+                </a:solidFill>
+                <a:latin typeface="Arial"/>
+                <a:ea typeface="Arial"/>
+                <a:cs typeface="Arial"/>
+              </a:defRPr>
+            </a:lvl9pPr>
           </a:lstStyle>
           <a:p xmlns:a="http://schemas.openxmlformats.org/drawingml/2006/main">
             <a:pPr algn="r">
+              <a:buNone/>
               <a:defRPr sz="1050" b="1">
                 <a:solidFill>
                   <a:srgbClr val="536170"/>
@@ -5853,7 +10015,7 @@
       </p:sp>
       <p:sp>
         <p:nvSpPr>
-          <p:cNvPr id="4" name="">
+          <p:cNvPr id="4" name="Rectangle 3">
             <a:extLst xmlns:a="http://schemas.openxmlformats.org/drawingml/2006/main">
               <a:ext uri="{FF2B5EF4-FFF2-40B4-BE49-F238E27FC236}">
                 <a16:creationId xmlns:a16="http://schemas.microsoft.com/office/drawing/2014/main" id="{13F9B63F-F70A-438B-9DE0-207C22FC975F}"/>
@@ -5881,7 +10043,7 @@
         </p:spPr>
         <p:txBody>
           <a:bodyPr xmlns:a="http://schemas.openxmlformats.org/drawingml/2006/main" wrap="square" lIns="0" tIns="0" rIns="0" bIns="0" anchor="ctr">
-            <a:normAutofit fontScale="100000"/>
+            <a:normAutofit/>
           </a:bodyPr>
           <a:lstStyle xmlns:a="http://schemas.openxmlformats.org/drawingml/2006/main">
             <a:defPPr>
@@ -5894,9 +10056,100 @@
                 <a:cs typeface="Arial"/>
               </a:defRPr>
             </a:defPPr>
+            <a:lvl1pPr>
+              <a:defRPr sz="1125" b="1">
+                <a:solidFill>
+                  <a:srgbClr val="315BCE"/>
+                </a:solidFill>
+                <a:latin typeface="Arial"/>
+                <a:ea typeface="Arial"/>
+                <a:cs typeface="Arial"/>
+              </a:defRPr>
+            </a:lvl1pPr>
+            <a:lvl2pPr>
+              <a:defRPr sz="1125" b="1">
+                <a:solidFill>
+                  <a:srgbClr val="315BCE"/>
+                </a:solidFill>
+                <a:latin typeface="Arial"/>
+                <a:ea typeface="Arial"/>
+                <a:cs typeface="Arial"/>
+              </a:defRPr>
+            </a:lvl2pPr>
+            <a:lvl3pPr>
+              <a:defRPr sz="1125" b="1">
+                <a:solidFill>
+                  <a:srgbClr val="315BCE"/>
+                </a:solidFill>
+                <a:latin typeface="Arial"/>
+                <a:ea typeface="Arial"/>
+                <a:cs typeface="Arial"/>
+              </a:defRPr>
+            </a:lvl3pPr>
+            <a:lvl4pPr>
+              <a:defRPr sz="1125" b="1">
+                <a:solidFill>
+                  <a:srgbClr val="315BCE"/>
+                </a:solidFill>
+                <a:latin typeface="Arial"/>
+                <a:ea typeface="Arial"/>
+                <a:cs typeface="Arial"/>
+              </a:defRPr>
+            </a:lvl4pPr>
+            <a:lvl5pPr>
+              <a:defRPr sz="1125" b="1">
+                <a:solidFill>
+                  <a:srgbClr val="315BCE"/>
+                </a:solidFill>
+                <a:latin typeface="Arial"/>
+                <a:ea typeface="Arial"/>
+                <a:cs typeface="Arial"/>
+              </a:defRPr>
+            </a:lvl5pPr>
+            <a:lvl6pPr>
+              <a:defRPr sz="1125" b="1">
+                <a:solidFill>
+                  <a:srgbClr val="315BCE"/>
+                </a:solidFill>
+                <a:latin typeface="Arial"/>
+                <a:ea typeface="Arial"/>
+                <a:cs typeface="Arial"/>
+              </a:defRPr>
+            </a:lvl6pPr>
+            <a:lvl7pPr>
+              <a:defRPr sz="1125" b="1">
+                <a:solidFill>
+                  <a:srgbClr val="315BCE"/>
+                </a:solidFill>
+                <a:latin typeface="Arial"/>
+                <a:ea typeface="Arial"/>
+                <a:cs typeface="Arial"/>
+              </a:defRPr>
+            </a:lvl7pPr>
+            <a:lvl8pPr>
+              <a:defRPr sz="1125" b="1">
+                <a:solidFill>
+                  <a:srgbClr val="315BCE"/>
+                </a:solidFill>
+                <a:latin typeface="Arial"/>
+                <a:ea typeface="Arial"/>
+                <a:cs typeface="Arial"/>
+              </a:defRPr>
+            </a:lvl8pPr>
+            <a:lvl9pPr>
+              <a:defRPr sz="1125" b="1">
+                <a:solidFill>
+                  <a:srgbClr val="315BCE"/>
+                </a:solidFill>
+                <a:latin typeface="Arial"/>
+                <a:ea typeface="Arial"/>
+                <a:cs typeface="Arial"/>
+              </a:defRPr>
+            </a:lvl9pPr>
           </a:lstStyle>
           <a:p xmlns:a="http://schemas.openxmlformats.org/drawingml/2006/main">
             <a:pPr>
+              <a:buNone/>
               <a:defRPr sz="1125" b="1">
                 <a:solidFill>
                   <a:srgbClr val="315BCE"/>
@@ -5922,7 +10175,7 @@
       </p:sp>
       <p:sp>
         <p:nvSpPr>
-          <p:cNvPr id="5" name="">
+          <p:cNvPr id="5" name="Rectangle 4">
             <a:extLst xmlns:a="http://schemas.openxmlformats.org/drawingml/2006/main">
               <a:ext uri="{FF2B5EF4-FFF2-40B4-BE49-F238E27FC236}">
                 <a16:creationId xmlns:a16="http://schemas.microsoft.com/office/drawing/2014/main" id="{258CCC7A-01B3-45BD-9081-DF937903D0B4}"/>
@@ -5950,7 +10203,7 @@
         </p:spPr>
         <p:txBody>
           <a:bodyPr xmlns:a="http://schemas.openxmlformats.org/drawingml/2006/main" wrap="square" lIns="0" tIns="0" rIns="0" bIns="0" anchor="ctr">
-            <a:normAutofit fontScale="100000"/>
+            <a:normAutofit/>
           </a:bodyPr>
           <a:lstStyle xmlns:a="http://schemas.openxmlformats.org/drawingml/2006/main">
             <a:defPPr>
@@ -5963,9 +10216,100 @@
                 <a:cs typeface="Arial"/>
               </a:defRPr>
             </a:defPPr>
+            <a:lvl1pPr>
+              <a:defRPr sz="1875" b="1">
+                <a:solidFill>
+                  <a:srgbClr val="16202B"/>
+                </a:solidFill>
+                <a:latin typeface="Arial"/>
+                <a:ea typeface="Arial"/>
+                <a:cs typeface="Arial"/>
+              </a:defRPr>
+            </a:lvl1pPr>
+            <a:lvl2pPr>
+              <a:defRPr sz="1875" b="1">
+                <a:solidFill>
+                  <a:srgbClr val="16202B"/>
+                </a:solidFill>
+                <a:latin typeface="Arial"/>
+                <a:ea typeface="Arial"/>
+                <a:cs typeface="Arial"/>
+              </a:defRPr>
+            </a:lvl2pPr>
+            <a:lvl3pPr>
+              <a:defRPr sz="1875" b="1">
+                <a:solidFill>
+                  <a:srgbClr val="16202B"/>
+                </a:solidFill>
+                <a:latin typeface="Arial"/>
+                <a:ea typeface="Arial"/>
+                <a:cs typeface="Arial"/>
+              </a:defRPr>
+            </a:lvl3pPr>
+            <a:lvl4pPr>
+              <a:defRPr sz="1875" b="1">
+                <a:solidFill>
+                  <a:srgbClr val="16202B"/>
+                </a:solidFill>
+                <a:latin typeface="Arial"/>
+                <a:ea typeface="Arial"/>
+                <a:cs typeface="Arial"/>
+              </a:defRPr>
+            </a:lvl4pPr>
+            <a:lvl5pPr>
+              <a:defRPr sz="1875" b="1">
+                <a:solidFill>
+                  <a:srgbClr val="16202B"/>
+                </a:solidFill>
+                <a:latin typeface="Arial"/>
+                <a:ea typeface="Arial"/>
+                <a:cs typeface="Arial"/>
+              </a:defRPr>
+            </a:lvl5pPr>
+            <a:lvl6pPr>
+              <a:defRPr sz="1875" b="1">
+                <a:solidFill>
+                  <a:srgbClr val="16202B"/>
+                </a:solidFill>
+                <a:latin typeface="Arial"/>
+                <a:ea typeface="Arial"/>
+                <a:cs typeface="Arial"/>
+              </a:defRPr>
+            </a:lvl6pPr>
+            <a:lvl7pPr>
+              <a:defRPr sz="1875" b="1">
+                <a:solidFill>
+                  <a:srgbClr val="16202B"/>
+                </a:solidFill>
+                <a:latin typeface="Arial"/>
+                <a:ea typeface="Arial"/>
+                <a:cs typeface="Arial"/>
+              </a:defRPr>
+            </a:lvl7pPr>
+            <a:lvl8pPr>
+              <a:defRPr sz="1875" b="1">
+                <a:solidFill>
+                  <a:srgbClr val="16202B"/>
+                </a:solidFill>
+                <a:latin typeface="Arial"/>
+                <a:ea typeface="Arial"/>
+                <a:cs typeface="Arial"/>
+              </a:defRPr>
+            </a:lvl8pPr>
+            <a:lvl9pPr>
+              <a:defRPr sz="1875" b="1">
+                <a:solidFill>
+                  <a:srgbClr val="16202B"/>
+                </a:solidFill>
+                <a:latin typeface="Arial"/>
+                <a:ea typeface="Arial"/>
+                <a:cs typeface="Arial"/>
+              </a:defRPr>
+            </a:lvl9pPr>
           </a:lstStyle>
           <a:p xmlns:a="http://schemas.openxmlformats.org/drawingml/2006/main">
             <a:pPr>
+              <a:buNone/>
               <a:defRPr sz="1875" b="1">
                 <a:solidFill>
                   <a:srgbClr val="16202B"/>
@@ -5991,7 +10335,7 @@
       </p:sp>
       <p:sp>
         <p:nvSpPr>
-          <p:cNvPr id="6" name="">
+          <p:cNvPr id="6" name="Rectangle 5">
             <a:extLst xmlns:a="http://schemas.openxmlformats.org/drawingml/2006/main">
               <a:ext uri="{FF2B5EF4-FFF2-40B4-BE49-F238E27FC236}">
                 <a16:creationId xmlns:a16="http://schemas.microsoft.com/office/drawing/2014/main" id="{289549D4-2E6A-4B01-AA76-5A477F2E2285}"/>
@@ -6032,9 +10376,100 @@
                 <a:cs typeface="Arial"/>
               </a:defRPr>
             </a:defPPr>
+            <a:lvl1pPr>
+              <a:defRPr sz="1650" b="0">
+                <a:solidFill>
+                  <a:srgbClr val="536170"/>
+                </a:solidFill>
+                <a:latin typeface="Arial"/>
+                <a:ea typeface="Arial"/>
+                <a:cs typeface="Arial"/>
+              </a:defRPr>
+            </a:lvl1pPr>
+            <a:lvl2pPr>
+              <a:defRPr sz="1650" b="0">
+                <a:solidFill>
+                  <a:srgbClr val="536170"/>
+                </a:solidFill>
+                <a:latin typeface="Arial"/>
+                <a:ea typeface="Arial"/>
+                <a:cs typeface="Arial"/>
+              </a:defRPr>
+            </a:lvl2pPr>
+            <a:lvl3pPr>
+              <a:defRPr sz="1650" b="0">
+                <a:solidFill>
+                  <a:srgbClr val="536170"/>
+                </a:solidFill>
+                <a:latin typeface="Arial"/>
+                <a:ea typeface="Arial"/>
+                <a:cs typeface="Arial"/>
+              </a:defRPr>
+            </a:lvl3pPr>
+            <a:lvl4pPr>
+              <a:defRPr sz="1650" b="0">
+                <a:solidFill>
+                  <a:srgbClr val="536170"/>
+                </a:solidFill>
+                <a:latin typeface="Arial"/>
+                <a:ea typeface="Arial"/>
+                <a:cs typeface="Arial"/>
+              </a:defRPr>
+            </a:lvl4pPr>
+            <a:lvl5pPr>
+              <a:defRPr sz="1650" b="0">
+                <a:solidFill>
+                  <a:srgbClr val="536170"/>
+                </a:solidFill>
+                <a:latin typeface="Arial"/>
+                <a:ea typeface="Arial"/>
+                <a:cs typeface="Arial"/>
+              </a:defRPr>
+            </a:lvl5pPr>
+            <a:lvl6pPr>
+              <a:defRPr sz="1650" b="0">
+                <a:solidFill>
+                  <a:srgbClr val="536170"/>
+                </a:solidFill>
+                <a:latin typeface="Arial"/>
+                <a:ea typeface="Arial"/>
+                <a:cs typeface="Arial"/>
+              </a:defRPr>
+            </a:lvl6pPr>
+            <a:lvl7pPr>
+              <a:defRPr sz="1650" b="0">
+                <a:solidFill>
+                  <a:srgbClr val="536170"/>
+                </a:solidFill>
+                <a:latin typeface="Arial"/>
+                <a:ea typeface="Arial"/>
+                <a:cs typeface="Arial"/>
+              </a:defRPr>
+            </a:lvl7pPr>
+            <a:lvl8pPr>
+              <a:defRPr sz="1650" b="0">
+                <a:solidFill>
+                  <a:srgbClr val="536170"/>
+                </a:solidFill>
+                <a:latin typeface="Arial"/>
+                <a:ea typeface="Arial"/>
+                <a:cs typeface="Arial"/>
+              </a:defRPr>
+            </a:lvl8pPr>
+            <a:lvl9pPr>
+              <a:defRPr sz="1650" b="0">
+                <a:solidFill>
+                  <a:srgbClr val="536170"/>
+                </a:solidFill>
+                <a:latin typeface="Arial"/>
+                <a:ea typeface="Arial"/>
+                <a:cs typeface="Arial"/>
+              </a:defRPr>
+            </a:lvl9pPr>
           </a:lstStyle>
           <a:p xmlns:a="http://schemas.openxmlformats.org/drawingml/2006/main">
             <a:pPr>
+              <a:buNone/>
               <a:defRPr sz="1650" b="0">
                 <a:solidFill>
                   <a:srgbClr val="536170"/>
@@ -6053,14 +10488,14 @@
                 <a:ea typeface="Arial"/>
                 <a:cs typeface="Arial"/>
               </a:rPr>
-              <a:t>The working prototype loads the sample, builds the attention queue, shows the evidence for a selected shopper, and accepts a merchant CSV.</a:t>
+              <a:t>The prototype loads research data, builds shopper and item queues, shows purchase evidence, and accepts merchant CSVs.</a:t>
             </a:r>
           </a:p>
         </p:txBody>
       </p:sp>
       <p:sp>
         <p:nvSpPr>
-          <p:cNvPr id="7" name="">
+          <p:cNvPr id="7" name="Straight Connector 6">
             <a:extLst xmlns:a="http://schemas.openxmlformats.org/drawingml/2006/main">
               <a:ext uri="{FF2B5EF4-FFF2-40B4-BE49-F238E27FC236}">
                 <a16:creationId xmlns:a16="http://schemas.microsoft.com/office/drawing/2014/main" id="{BF42A78F-847A-452A-B895-BA84CA6D017B}"/>
@@ -6087,10 +10522,17 @@
             <a:prstDash val="solid"/>
           </a:ln>
         </p:spPr>
+        <p:txBody>
+          <a:bodyPr xmlns:a="http://schemas.openxmlformats.org/drawingml/2006/main"/>
+          <a:lstStyle xmlns:a="http://schemas.openxmlformats.org/drawingml/2006/main"/>
+          <a:p xmlns:a="http://schemas.openxmlformats.org/drawingml/2006/main">
+            <a:endParaRPr/>
+          </a:p>
+        </p:txBody>
       </p:sp>
       <p:sp>
         <p:nvSpPr>
-          <p:cNvPr id="8" name="">
+          <p:cNvPr id="8" name="Rectangle 7">
             <a:extLst xmlns:a="http://schemas.openxmlformats.org/drawingml/2006/main">
               <a:ext uri="{FF2B5EF4-FFF2-40B4-BE49-F238E27FC236}">
                 <a16:creationId xmlns:a16="http://schemas.microsoft.com/office/drawing/2014/main" id="{F2426AB7-F4B1-47E3-8F02-4F396AC116AD}"/>
@@ -6118,7 +10560,7 @@
         </p:spPr>
         <p:txBody>
           <a:bodyPr xmlns:a="http://schemas.openxmlformats.org/drawingml/2006/main" wrap="square" lIns="0" tIns="0" rIns="0" bIns="0" anchor="ctr">
-            <a:normAutofit fontScale="100000"/>
+            <a:normAutofit/>
           </a:bodyPr>
           <a:lstStyle xmlns:a="http://schemas.openxmlformats.org/drawingml/2006/main">
             <a:defPPr>
@@ -6131,9 +10573,100 @@
                 <a:cs typeface="Arial"/>
               </a:defRPr>
             </a:defPPr>
+            <a:lvl1pPr>
+              <a:defRPr sz="1125" b="1">
+                <a:solidFill>
+                  <a:srgbClr val="287A63"/>
+                </a:solidFill>
+                <a:latin typeface="Arial"/>
+                <a:ea typeface="Arial"/>
+                <a:cs typeface="Arial"/>
+              </a:defRPr>
+            </a:lvl1pPr>
+            <a:lvl2pPr>
+              <a:defRPr sz="1125" b="1">
+                <a:solidFill>
+                  <a:srgbClr val="287A63"/>
+                </a:solidFill>
+                <a:latin typeface="Arial"/>
+                <a:ea typeface="Arial"/>
+                <a:cs typeface="Arial"/>
+              </a:defRPr>
+            </a:lvl2pPr>
+            <a:lvl3pPr>
+              <a:defRPr sz="1125" b="1">
+                <a:solidFill>
+                  <a:srgbClr val="287A63"/>
+                </a:solidFill>
+                <a:latin typeface="Arial"/>
+                <a:ea typeface="Arial"/>
+                <a:cs typeface="Arial"/>
+              </a:defRPr>
+            </a:lvl3pPr>
+            <a:lvl4pPr>
+              <a:defRPr sz="1125" b="1">
+                <a:solidFill>
+                  <a:srgbClr val="287A63"/>
+                </a:solidFill>
+                <a:latin typeface="Arial"/>
+                <a:ea typeface="Arial"/>
+                <a:cs typeface="Arial"/>
+              </a:defRPr>
+            </a:lvl4pPr>
+            <a:lvl5pPr>
+              <a:defRPr sz="1125" b="1">
+                <a:solidFill>
+                  <a:srgbClr val="287A63"/>
+                </a:solidFill>
+                <a:latin typeface="Arial"/>
+                <a:ea typeface="Arial"/>
+                <a:cs typeface="Arial"/>
+              </a:defRPr>
+            </a:lvl5pPr>
+            <a:lvl6pPr>
+              <a:defRPr sz="1125" b="1">
+                <a:solidFill>
+                  <a:srgbClr val="287A63"/>
+                </a:solidFill>
+                <a:latin typeface="Arial"/>
+                <a:ea typeface="Arial"/>
+                <a:cs typeface="Arial"/>
+              </a:defRPr>
+            </a:lvl6pPr>
+            <a:lvl7pPr>
+              <a:defRPr sz="1125" b="1">
+                <a:solidFill>
+                  <a:srgbClr val="287A63"/>
+                </a:solidFill>
+                <a:latin typeface="Arial"/>
+                <a:ea typeface="Arial"/>
+                <a:cs typeface="Arial"/>
+              </a:defRPr>
+            </a:lvl7pPr>
+            <a:lvl8pPr>
+              <a:defRPr sz="1125" b="1">
+                <a:solidFill>
+                  <a:srgbClr val="287A63"/>
+                </a:solidFill>
+                <a:latin typeface="Arial"/>
+                <a:ea typeface="Arial"/>
+                <a:cs typeface="Arial"/>
+              </a:defRPr>
+            </a:lvl8pPr>
+            <a:lvl9pPr>
+              <a:defRPr sz="1125" b="1">
+                <a:solidFill>
+                  <a:srgbClr val="287A63"/>
+                </a:solidFill>
+                <a:latin typeface="Arial"/>
+                <a:ea typeface="Arial"/>
+                <a:cs typeface="Arial"/>
+              </a:defRPr>
+            </a:lvl9pPr>
           </a:lstStyle>
           <a:p xmlns:a="http://schemas.openxmlformats.org/drawingml/2006/main">
             <a:pPr>
+              <a:buNone/>
               <a:defRPr sz="1125" b="1">
                 <a:solidFill>
                   <a:srgbClr val="287A63"/>
@@ -6159,7 +10692,7 @@
       </p:sp>
       <p:sp>
         <p:nvSpPr>
-          <p:cNvPr id="9" name="">
+          <p:cNvPr id="9" name="Rectangle 8">
             <a:extLst xmlns:a="http://schemas.openxmlformats.org/drawingml/2006/main">
               <a:ext uri="{FF2B5EF4-FFF2-40B4-BE49-F238E27FC236}">
                 <a16:creationId xmlns:a16="http://schemas.microsoft.com/office/drawing/2014/main" id="{9DABB3E0-5552-410D-886A-FE7F1518F422}"/>
@@ -6200,9 +10733,100 @@
                 <a:cs typeface="Arial"/>
               </a:defRPr>
             </a:defPPr>
+            <a:lvl1pPr>
+              <a:defRPr sz="1500" b="1">
+                <a:solidFill>
+                  <a:srgbClr val="16202B"/>
+                </a:solidFill>
+                <a:latin typeface="Arial"/>
+                <a:ea typeface="Arial"/>
+                <a:cs typeface="Arial"/>
+              </a:defRPr>
+            </a:lvl1pPr>
+            <a:lvl2pPr>
+              <a:defRPr sz="1500" b="1">
+                <a:solidFill>
+                  <a:srgbClr val="16202B"/>
+                </a:solidFill>
+                <a:latin typeface="Arial"/>
+                <a:ea typeface="Arial"/>
+                <a:cs typeface="Arial"/>
+              </a:defRPr>
+            </a:lvl2pPr>
+            <a:lvl3pPr>
+              <a:defRPr sz="1500" b="1">
+                <a:solidFill>
+                  <a:srgbClr val="16202B"/>
+                </a:solidFill>
+                <a:latin typeface="Arial"/>
+                <a:ea typeface="Arial"/>
+                <a:cs typeface="Arial"/>
+              </a:defRPr>
+            </a:lvl3pPr>
+            <a:lvl4pPr>
+              <a:defRPr sz="1500" b="1">
+                <a:solidFill>
+                  <a:srgbClr val="16202B"/>
+                </a:solidFill>
+                <a:latin typeface="Arial"/>
+                <a:ea typeface="Arial"/>
+                <a:cs typeface="Arial"/>
+              </a:defRPr>
+            </a:lvl4pPr>
+            <a:lvl5pPr>
+              <a:defRPr sz="1500" b="1">
+                <a:solidFill>
+                  <a:srgbClr val="16202B"/>
+                </a:solidFill>
+                <a:latin typeface="Arial"/>
+                <a:ea typeface="Arial"/>
+                <a:cs typeface="Arial"/>
+              </a:defRPr>
+            </a:lvl5pPr>
+            <a:lvl6pPr>
+              <a:defRPr sz="1500" b="1">
+                <a:solidFill>
+                  <a:srgbClr val="16202B"/>
+                </a:solidFill>
+                <a:latin typeface="Arial"/>
+                <a:ea typeface="Arial"/>
+                <a:cs typeface="Arial"/>
+              </a:defRPr>
+            </a:lvl6pPr>
+            <a:lvl7pPr>
+              <a:defRPr sz="1500" b="1">
+                <a:solidFill>
+                  <a:srgbClr val="16202B"/>
+                </a:solidFill>
+                <a:latin typeface="Arial"/>
+                <a:ea typeface="Arial"/>
+                <a:cs typeface="Arial"/>
+              </a:defRPr>
+            </a:lvl7pPr>
+            <a:lvl8pPr>
+              <a:defRPr sz="1500" b="1">
+                <a:solidFill>
+                  <a:srgbClr val="16202B"/>
+                </a:solidFill>
+                <a:latin typeface="Arial"/>
+                <a:ea typeface="Arial"/>
+                <a:cs typeface="Arial"/>
+              </a:defRPr>
+            </a:lvl8pPr>
+            <a:lvl9pPr>
+              <a:defRPr sz="1500" b="1">
+                <a:solidFill>
+                  <a:srgbClr val="16202B"/>
+                </a:solidFill>
+                <a:latin typeface="Arial"/>
+                <a:ea typeface="Arial"/>
+                <a:cs typeface="Arial"/>
+              </a:defRPr>
+            </a:lvl9pPr>
           </a:lstStyle>
           <a:p xmlns:a="http://schemas.openxmlformats.org/drawingml/2006/main">
             <a:pPr>
+              <a:buNone/>
               <a:defRPr sz="1500" b="1">
                 <a:solidFill>
                   <a:srgbClr val="16202B"/>
@@ -6221,14 +10845,14 @@
                 <a:ea typeface="Arial"/>
                 <a:cs typeface="Arial"/>
               </a:rPr>
-              <a:t>Historical purchase behavior and an explainable review signal.</a:t>
+              <a:t>Personal cadence flags, item level counts, and evidence for merchant review.</a:t>
             </a:r>
           </a:p>
         </p:txBody>
       </p:sp>
       <p:sp>
         <p:nvSpPr>
-          <p:cNvPr id="10" name="">
+          <p:cNvPr id="10" name="Rectangle 9">
             <a:extLst xmlns:a="http://schemas.openxmlformats.org/drawingml/2006/main">
               <a:ext uri="{FF2B5EF4-FFF2-40B4-BE49-F238E27FC236}">
                 <a16:creationId xmlns:a16="http://schemas.microsoft.com/office/drawing/2014/main" id="{ABDBDFEB-5CA2-404A-B780-D7C68B3AA97B}"/>
@@ -6269,9 +10893,100 @@
                 <a:cs typeface="Arial"/>
               </a:defRPr>
             </a:defPPr>
+            <a:lvl1pPr>
+              <a:defRPr sz="1125" b="1">
+                <a:solidFill>
+                  <a:srgbClr val="315BCE"/>
+                </a:solidFill>
+                <a:latin typeface="Arial"/>
+                <a:ea typeface="Arial"/>
+                <a:cs typeface="Arial"/>
+              </a:defRPr>
+            </a:lvl1pPr>
+            <a:lvl2pPr>
+              <a:defRPr sz="1125" b="1">
+                <a:solidFill>
+                  <a:srgbClr val="315BCE"/>
+                </a:solidFill>
+                <a:latin typeface="Arial"/>
+                <a:ea typeface="Arial"/>
+                <a:cs typeface="Arial"/>
+              </a:defRPr>
+            </a:lvl2pPr>
+            <a:lvl3pPr>
+              <a:defRPr sz="1125" b="1">
+                <a:solidFill>
+                  <a:srgbClr val="315BCE"/>
+                </a:solidFill>
+                <a:latin typeface="Arial"/>
+                <a:ea typeface="Arial"/>
+                <a:cs typeface="Arial"/>
+              </a:defRPr>
+            </a:lvl3pPr>
+            <a:lvl4pPr>
+              <a:defRPr sz="1125" b="1">
+                <a:solidFill>
+                  <a:srgbClr val="315BCE"/>
+                </a:solidFill>
+                <a:latin typeface="Arial"/>
+                <a:ea typeface="Arial"/>
+                <a:cs typeface="Arial"/>
+              </a:defRPr>
+            </a:lvl4pPr>
+            <a:lvl5pPr>
+              <a:defRPr sz="1125" b="1">
+                <a:solidFill>
+                  <a:srgbClr val="315BCE"/>
+                </a:solidFill>
+                <a:latin typeface="Arial"/>
+                <a:ea typeface="Arial"/>
+                <a:cs typeface="Arial"/>
+              </a:defRPr>
+            </a:lvl5pPr>
+            <a:lvl6pPr>
+              <a:defRPr sz="1125" b="1">
+                <a:solidFill>
+                  <a:srgbClr val="315BCE"/>
+                </a:solidFill>
+                <a:latin typeface="Arial"/>
+                <a:ea typeface="Arial"/>
+                <a:cs typeface="Arial"/>
+              </a:defRPr>
+            </a:lvl6pPr>
+            <a:lvl7pPr>
+              <a:defRPr sz="1125" b="1">
+                <a:solidFill>
+                  <a:srgbClr val="315BCE"/>
+                </a:solidFill>
+                <a:latin typeface="Arial"/>
+                <a:ea typeface="Arial"/>
+                <a:cs typeface="Arial"/>
+              </a:defRPr>
+            </a:lvl7pPr>
+            <a:lvl8pPr>
+              <a:defRPr sz="1125" b="1">
+                <a:solidFill>
+                  <a:srgbClr val="315BCE"/>
+                </a:solidFill>
+                <a:latin typeface="Arial"/>
+                <a:ea typeface="Arial"/>
+                <a:cs typeface="Arial"/>
+              </a:defRPr>
+            </a:lvl8pPr>
+            <a:lvl9pPr>
+              <a:defRPr sz="1125" b="1">
+                <a:solidFill>
+                  <a:srgbClr val="315BCE"/>
+                </a:solidFill>
+                <a:latin typeface="Arial"/>
+                <a:ea typeface="Arial"/>
+                <a:cs typeface="Arial"/>
+              </a:defRPr>
+            </a:lvl9pPr>
           </a:lstStyle>
           <a:p xmlns:a="http://schemas.openxmlformats.org/drawingml/2006/main">
             <a:pPr>
+              <a:buNone/>
               <a:defRPr sz="1125" b="1">
                 <a:solidFill>
                   <a:srgbClr val="315BCE"/>
@@ -6290,14 +11005,14 @@
                 <a:ea typeface="Arial"/>
                 <a:cs typeface="Arial"/>
               </a:rPr>
-              <a:t>WHAT IT DOES NOT SHOW</a:t>
+              <a:t>EVIDENCE LIMITS</a:t>
             </a:r>
           </a:p>
         </p:txBody>
       </p:sp>
       <p:sp>
         <p:nvSpPr>
-          <p:cNvPr id="11" name="">
+          <p:cNvPr id="11" name="Rectangle 10">
             <a:extLst xmlns:a="http://schemas.openxmlformats.org/drawingml/2006/main">
               <a:ext uri="{FF2B5EF4-FFF2-40B4-BE49-F238E27FC236}">
                 <a16:creationId xmlns:a16="http://schemas.microsoft.com/office/drawing/2014/main" id="{8F0BD07C-45E0-4B0D-A06B-72994952CD6E}"/>
@@ -6338,9 +11053,100 @@
                 <a:cs typeface="Arial"/>
               </a:defRPr>
             </a:defPPr>
+            <a:lvl1pPr>
+              <a:defRPr sz="1500" b="1">
+                <a:solidFill>
+                  <a:srgbClr val="16202B"/>
+                </a:solidFill>
+                <a:latin typeface="Arial"/>
+                <a:ea typeface="Arial"/>
+                <a:cs typeface="Arial"/>
+              </a:defRPr>
+            </a:lvl1pPr>
+            <a:lvl2pPr>
+              <a:defRPr sz="1500" b="1">
+                <a:solidFill>
+                  <a:srgbClr val="16202B"/>
+                </a:solidFill>
+                <a:latin typeface="Arial"/>
+                <a:ea typeface="Arial"/>
+                <a:cs typeface="Arial"/>
+              </a:defRPr>
+            </a:lvl2pPr>
+            <a:lvl3pPr>
+              <a:defRPr sz="1500" b="1">
+                <a:solidFill>
+                  <a:srgbClr val="16202B"/>
+                </a:solidFill>
+                <a:latin typeface="Arial"/>
+                <a:ea typeface="Arial"/>
+                <a:cs typeface="Arial"/>
+              </a:defRPr>
+            </a:lvl3pPr>
+            <a:lvl4pPr>
+              <a:defRPr sz="1500" b="1">
+                <a:solidFill>
+                  <a:srgbClr val="16202B"/>
+                </a:solidFill>
+                <a:latin typeface="Arial"/>
+                <a:ea typeface="Arial"/>
+                <a:cs typeface="Arial"/>
+              </a:defRPr>
+            </a:lvl4pPr>
+            <a:lvl5pPr>
+              <a:defRPr sz="1500" b="1">
+                <a:solidFill>
+                  <a:srgbClr val="16202B"/>
+                </a:solidFill>
+                <a:latin typeface="Arial"/>
+                <a:ea typeface="Arial"/>
+                <a:cs typeface="Arial"/>
+              </a:defRPr>
+            </a:lvl5pPr>
+            <a:lvl6pPr>
+              <a:defRPr sz="1500" b="1">
+                <a:solidFill>
+                  <a:srgbClr val="16202B"/>
+                </a:solidFill>
+                <a:latin typeface="Arial"/>
+                <a:ea typeface="Arial"/>
+                <a:cs typeface="Arial"/>
+              </a:defRPr>
+            </a:lvl6pPr>
+            <a:lvl7pPr>
+              <a:defRPr sz="1500" b="1">
+                <a:solidFill>
+                  <a:srgbClr val="16202B"/>
+                </a:solidFill>
+                <a:latin typeface="Arial"/>
+                <a:ea typeface="Arial"/>
+                <a:cs typeface="Arial"/>
+              </a:defRPr>
+            </a:lvl7pPr>
+            <a:lvl8pPr>
+              <a:defRPr sz="1500" b="1">
+                <a:solidFill>
+                  <a:srgbClr val="16202B"/>
+                </a:solidFill>
+                <a:latin typeface="Arial"/>
+                <a:ea typeface="Arial"/>
+                <a:cs typeface="Arial"/>
+              </a:defRPr>
+            </a:lvl8pPr>
+            <a:lvl9pPr>
+              <a:defRPr sz="1500" b="1">
+                <a:solidFill>
+                  <a:srgbClr val="16202B"/>
+                </a:solidFill>
+                <a:latin typeface="Arial"/>
+                <a:ea typeface="Arial"/>
+                <a:cs typeface="Arial"/>
+              </a:defRPr>
+            </a:lvl9pPr>
           </a:lstStyle>
           <a:p xmlns:a="http://schemas.openxmlformats.org/drawingml/2006/main">
             <a:pPr>
+              <a:buNone/>
               <a:defRPr sz="1500" b="1">
                 <a:solidFill>
                   <a:srgbClr val="16202B"/>
@@ -6359,14 +11165,14 @@
                 <a:ea typeface="Arial"/>
                 <a:cs typeface="Arial"/>
               </a:rPr>
-              <a:t>Live merchant results or proof that a message increases sales.</a:t>
+              <a:t>Historical transactions; live merchant results and sales impact remain unmeasured.</a:t>
             </a:r>
           </a:p>
         </p:txBody>
       </p:sp>
       <p:sp>
         <p:nvSpPr>
-          <p:cNvPr id="12" name="">
+          <p:cNvPr id="12" name="Rectangle 11">
             <a:extLst xmlns:a="http://schemas.openxmlformats.org/drawingml/2006/main">
               <a:ext uri="{FF2B5EF4-FFF2-40B4-BE49-F238E27FC236}">
                 <a16:creationId xmlns:a16="http://schemas.microsoft.com/office/drawing/2014/main" id="{58DD9B29-91B1-427C-8869-B73545693B24}"/>
@@ -6394,7 +11200,7 @@
         </p:spPr>
         <p:txBody>
           <a:bodyPr xmlns:a="http://schemas.openxmlformats.org/drawingml/2006/main" wrap="square" lIns="0" tIns="0" rIns="0" bIns="0" anchor="ctr">
-            <a:normAutofit fontScale="100000"/>
+            <a:normAutofit/>
           </a:bodyPr>
           <a:lstStyle xmlns:a="http://schemas.openxmlformats.org/drawingml/2006/main">
             <a:defPPr>
@@ -6407,9 +11213,100 @@
                 <a:cs typeface="Arial"/>
               </a:defRPr>
             </a:defPPr>
+            <a:lvl1pPr>
+              <a:defRPr sz="1050" b="0">
+                <a:solidFill>
+                  <a:srgbClr val="536170"/>
+                </a:solidFill>
+                <a:latin typeface="Arial"/>
+                <a:ea typeface="Arial"/>
+                <a:cs typeface="Arial"/>
+              </a:defRPr>
+            </a:lvl1pPr>
+            <a:lvl2pPr>
+              <a:defRPr sz="1050" b="0">
+                <a:solidFill>
+                  <a:srgbClr val="536170"/>
+                </a:solidFill>
+                <a:latin typeface="Arial"/>
+                <a:ea typeface="Arial"/>
+                <a:cs typeface="Arial"/>
+              </a:defRPr>
+            </a:lvl2pPr>
+            <a:lvl3pPr>
+              <a:defRPr sz="1050" b="0">
+                <a:solidFill>
+                  <a:srgbClr val="536170"/>
+                </a:solidFill>
+                <a:latin typeface="Arial"/>
+                <a:ea typeface="Arial"/>
+                <a:cs typeface="Arial"/>
+              </a:defRPr>
+            </a:lvl3pPr>
+            <a:lvl4pPr>
+              <a:defRPr sz="1050" b="0">
+                <a:solidFill>
+                  <a:srgbClr val="536170"/>
+                </a:solidFill>
+                <a:latin typeface="Arial"/>
+                <a:ea typeface="Arial"/>
+                <a:cs typeface="Arial"/>
+              </a:defRPr>
+            </a:lvl4pPr>
+            <a:lvl5pPr>
+              <a:defRPr sz="1050" b="0">
+                <a:solidFill>
+                  <a:srgbClr val="536170"/>
+                </a:solidFill>
+                <a:latin typeface="Arial"/>
+                <a:ea typeface="Arial"/>
+                <a:cs typeface="Arial"/>
+              </a:defRPr>
+            </a:lvl5pPr>
+            <a:lvl6pPr>
+              <a:defRPr sz="1050" b="0">
+                <a:solidFill>
+                  <a:srgbClr val="536170"/>
+                </a:solidFill>
+                <a:latin typeface="Arial"/>
+                <a:ea typeface="Arial"/>
+                <a:cs typeface="Arial"/>
+              </a:defRPr>
+            </a:lvl6pPr>
+            <a:lvl7pPr>
+              <a:defRPr sz="1050" b="0">
+                <a:solidFill>
+                  <a:srgbClr val="536170"/>
+                </a:solidFill>
+                <a:latin typeface="Arial"/>
+                <a:ea typeface="Arial"/>
+                <a:cs typeface="Arial"/>
+              </a:defRPr>
+            </a:lvl7pPr>
+            <a:lvl8pPr>
+              <a:defRPr sz="1050" b="0">
+                <a:solidFill>
+                  <a:srgbClr val="536170"/>
+                </a:solidFill>
+                <a:latin typeface="Arial"/>
+                <a:ea typeface="Arial"/>
+                <a:cs typeface="Arial"/>
+              </a:defRPr>
+            </a:lvl8pPr>
+            <a:lvl9pPr>
+              <a:defRPr sz="1050" b="0">
+                <a:solidFill>
+                  <a:srgbClr val="536170"/>
+                </a:solidFill>
+                <a:latin typeface="Arial"/>
+                <a:ea typeface="Arial"/>
+                <a:cs typeface="Arial"/>
+              </a:defRPr>
+            </a:lvl9pPr>
           </a:lstStyle>
           <a:p xmlns:a="http://schemas.openxmlformats.org/drawingml/2006/main">
             <a:pPr>
+              <a:buNone/>
               <a:defRPr sz="1050" b="0">
                 <a:solidFill>
                   <a:srgbClr val="536170"/>
@@ -6464,7 +11361,7 @@
       </p:grpSpPr>
       <p:sp>
         <p:nvSpPr>
-          <p:cNvPr id="13" name="">
+          <p:cNvPr id="13" name="Rectangle 12">
             <a:extLst xmlns:a="http://schemas.openxmlformats.org/drawingml/2006/main">
               <a:ext uri="{FF2B5EF4-FFF2-40B4-BE49-F238E27FC236}">
                 <a16:creationId xmlns:a16="http://schemas.microsoft.com/office/drawing/2014/main" id="{06F55AA3-CDEE-4582-A2F4-CFE4437DEF6B}"/>
@@ -6492,7 +11389,7 @@
         </p:spPr>
         <p:txBody>
           <a:bodyPr xmlns:a="http://schemas.openxmlformats.org/drawingml/2006/main" wrap="square" lIns="0" tIns="0" rIns="0" bIns="0" anchor="ctr">
-            <a:normAutofit fontScale="100000"/>
+            <a:normAutofit/>
           </a:bodyPr>
           <a:lstStyle xmlns:a="http://schemas.openxmlformats.org/drawingml/2006/main">
             <a:defPPr>
@@ -6505,9 +11402,100 @@
                 <a:cs typeface="Arial"/>
               </a:defRPr>
             </a:defPPr>
+            <a:lvl1pPr>
+              <a:defRPr sz="1050" b="1">
+                <a:solidFill>
+                  <a:srgbClr val="315BCE"/>
+                </a:solidFill>
+                <a:latin typeface="Arial"/>
+                <a:ea typeface="Arial"/>
+                <a:cs typeface="Arial"/>
+              </a:defRPr>
+            </a:lvl1pPr>
+            <a:lvl2pPr>
+              <a:defRPr sz="1050" b="1">
+                <a:solidFill>
+                  <a:srgbClr val="315BCE"/>
+                </a:solidFill>
+                <a:latin typeface="Arial"/>
+                <a:ea typeface="Arial"/>
+                <a:cs typeface="Arial"/>
+              </a:defRPr>
+            </a:lvl2pPr>
+            <a:lvl3pPr>
+              <a:defRPr sz="1050" b="1">
+                <a:solidFill>
+                  <a:srgbClr val="315BCE"/>
+                </a:solidFill>
+                <a:latin typeface="Arial"/>
+                <a:ea typeface="Arial"/>
+                <a:cs typeface="Arial"/>
+              </a:defRPr>
+            </a:lvl3pPr>
+            <a:lvl4pPr>
+              <a:defRPr sz="1050" b="1">
+                <a:solidFill>
+                  <a:srgbClr val="315BCE"/>
+                </a:solidFill>
+                <a:latin typeface="Arial"/>
+                <a:ea typeface="Arial"/>
+                <a:cs typeface="Arial"/>
+              </a:defRPr>
+            </a:lvl4pPr>
+            <a:lvl5pPr>
+              <a:defRPr sz="1050" b="1">
+                <a:solidFill>
+                  <a:srgbClr val="315BCE"/>
+                </a:solidFill>
+                <a:latin typeface="Arial"/>
+                <a:ea typeface="Arial"/>
+                <a:cs typeface="Arial"/>
+              </a:defRPr>
+            </a:lvl5pPr>
+            <a:lvl6pPr>
+              <a:defRPr sz="1050" b="1">
+                <a:solidFill>
+                  <a:srgbClr val="315BCE"/>
+                </a:solidFill>
+                <a:latin typeface="Arial"/>
+                <a:ea typeface="Arial"/>
+                <a:cs typeface="Arial"/>
+              </a:defRPr>
+            </a:lvl6pPr>
+            <a:lvl7pPr>
+              <a:defRPr sz="1050" b="1">
+                <a:solidFill>
+                  <a:srgbClr val="315BCE"/>
+                </a:solidFill>
+                <a:latin typeface="Arial"/>
+                <a:ea typeface="Arial"/>
+                <a:cs typeface="Arial"/>
+              </a:defRPr>
+            </a:lvl7pPr>
+            <a:lvl8pPr>
+              <a:defRPr sz="1050" b="1">
+                <a:solidFill>
+                  <a:srgbClr val="315BCE"/>
+                </a:solidFill>
+                <a:latin typeface="Arial"/>
+                <a:ea typeface="Arial"/>
+                <a:cs typeface="Arial"/>
+              </a:defRPr>
+            </a:lvl8pPr>
+            <a:lvl9pPr>
+              <a:defRPr sz="1050" b="1">
+                <a:solidFill>
+                  <a:srgbClr val="315BCE"/>
+                </a:solidFill>
+                <a:latin typeface="Arial"/>
+                <a:ea typeface="Arial"/>
+                <a:cs typeface="Arial"/>
+              </a:defRPr>
+            </a:lvl9pPr>
           </a:lstStyle>
           <a:p xmlns:a="http://schemas.openxmlformats.org/drawingml/2006/main">
             <a:pPr>
+              <a:buNone/>
               <a:defRPr sz="1050" b="1">
                 <a:solidFill>
                   <a:srgbClr val="315BCE"/>
@@ -6533,7 +11521,7 @@
       </p:sp>
       <p:sp>
         <p:nvSpPr>
-          <p:cNvPr id="2" name="">
+          <p:cNvPr id="2" name="Rectangle 1">
             <a:extLst xmlns:a="http://schemas.openxmlformats.org/drawingml/2006/main">
               <a:ext uri="{FF2B5EF4-FFF2-40B4-BE49-F238E27FC236}">
                 <a16:creationId xmlns:a16="http://schemas.microsoft.com/office/drawing/2014/main" id="{FD63F2CF-6AA5-4864-BECB-3F176C3D3268}"/>
@@ -6574,9 +11562,100 @@
                 <a:cs typeface="Arial"/>
               </a:defRPr>
             </a:defPPr>
+            <a:lvl1pPr>
+              <a:defRPr sz="3000" b="1">
+                <a:solidFill>
+                  <a:srgbClr val="16202B"/>
+                </a:solidFill>
+                <a:latin typeface="Arial"/>
+                <a:ea typeface="Arial"/>
+                <a:cs typeface="Arial"/>
+              </a:defRPr>
+            </a:lvl1pPr>
+            <a:lvl2pPr>
+              <a:defRPr sz="3000" b="1">
+                <a:solidFill>
+                  <a:srgbClr val="16202B"/>
+                </a:solidFill>
+                <a:latin typeface="Arial"/>
+                <a:ea typeface="Arial"/>
+                <a:cs typeface="Arial"/>
+              </a:defRPr>
+            </a:lvl2pPr>
+            <a:lvl3pPr>
+              <a:defRPr sz="3000" b="1">
+                <a:solidFill>
+                  <a:srgbClr val="16202B"/>
+                </a:solidFill>
+                <a:latin typeface="Arial"/>
+                <a:ea typeface="Arial"/>
+                <a:cs typeface="Arial"/>
+              </a:defRPr>
+            </a:lvl3pPr>
+            <a:lvl4pPr>
+              <a:defRPr sz="3000" b="1">
+                <a:solidFill>
+                  <a:srgbClr val="16202B"/>
+                </a:solidFill>
+                <a:latin typeface="Arial"/>
+                <a:ea typeface="Arial"/>
+                <a:cs typeface="Arial"/>
+              </a:defRPr>
+            </a:lvl4pPr>
+            <a:lvl5pPr>
+              <a:defRPr sz="3000" b="1">
+                <a:solidFill>
+                  <a:srgbClr val="16202B"/>
+                </a:solidFill>
+                <a:latin typeface="Arial"/>
+                <a:ea typeface="Arial"/>
+                <a:cs typeface="Arial"/>
+              </a:defRPr>
+            </a:lvl5pPr>
+            <a:lvl6pPr>
+              <a:defRPr sz="3000" b="1">
+                <a:solidFill>
+                  <a:srgbClr val="16202B"/>
+                </a:solidFill>
+                <a:latin typeface="Arial"/>
+                <a:ea typeface="Arial"/>
+                <a:cs typeface="Arial"/>
+              </a:defRPr>
+            </a:lvl6pPr>
+            <a:lvl7pPr>
+              <a:defRPr sz="3000" b="1">
+                <a:solidFill>
+                  <a:srgbClr val="16202B"/>
+                </a:solidFill>
+                <a:latin typeface="Arial"/>
+                <a:ea typeface="Arial"/>
+                <a:cs typeface="Arial"/>
+              </a:defRPr>
+            </a:lvl7pPr>
+            <a:lvl8pPr>
+              <a:defRPr sz="3000" b="1">
+                <a:solidFill>
+                  <a:srgbClr val="16202B"/>
+                </a:solidFill>
+                <a:latin typeface="Arial"/>
+                <a:ea typeface="Arial"/>
+                <a:cs typeface="Arial"/>
+              </a:defRPr>
+            </a:lvl8pPr>
+            <a:lvl9pPr>
+              <a:defRPr sz="3000" b="1">
+                <a:solidFill>
+                  <a:srgbClr val="16202B"/>
+                </a:solidFill>
+                <a:latin typeface="Arial"/>
+                <a:ea typeface="Arial"/>
+                <a:cs typeface="Arial"/>
+              </a:defRPr>
+            </a:lvl9pPr>
           </a:lstStyle>
           <a:p xmlns:a="http://schemas.openxmlformats.org/drawingml/2006/main">
             <a:pPr>
+              <a:buNone/>
               <a:defRPr sz="3000" b="1">
                 <a:solidFill>
                   <a:srgbClr val="16202B"/>
@@ -6595,14 +11674,14 @@
                 <a:ea typeface="Arial"/>
                 <a:cs typeface="Arial"/>
               </a:rPr>
-              <a:t>Measure the intervention before claiming impact</a:t>
+              <a:t>Item watchlist for merchant review</a:t>
             </a:r>
           </a:p>
         </p:txBody>
       </p:sp>
       <p:sp>
         <p:nvSpPr>
-          <p:cNvPr id="3" name="">
+          <p:cNvPr id="3" name="Rectangle 2">
             <a:extLst xmlns:a="http://schemas.openxmlformats.org/drawingml/2006/main">
               <a:ext uri="{FF2B5EF4-FFF2-40B4-BE49-F238E27FC236}">
                 <a16:creationId xmlns:a16="http://schemas.microsoft.com/office/drawing/2014/main" id="{C137C7E8-4BE6-410B-8D94-F1660933A5C8}"/>
@@ -6630,7 +11709,7 @@
         </p:spPr>
         <p:txBody>
           <a:bodyPr xmlns:a="http://schemas.openxmlformats.org/drawingml/2006/main" wrap="square" lIns="0" tIns="0" rIns="0" bIns="0" anchor="ctr">
-            <a:normAutofit fontScale="100000"/>
+            <a:normAutofit/>
           </a:bodyPr>
           <a:lstStyle xmlns:a="http://schemas.openxmlformats.org/drawingml/2006/main">
             <a:defPPr algn="r">
@@ -6643,9 +11722,100 @@
                 <a:cs typeface="Arial"/>
               </a:defRPr>
             </a:defPPr>
+            <a:lvl1pPr algn="r">
+              <a:defRPr sz="1050" b="1">
+                <a:solidFill>
+                  <a:srgbClr val="536170"/>
+                </a:solidFill>
+                <a:latin typeface="Arial"/>
+                <a:ea typeface="Arial"/>
+                <a:cs typeface="Arial"/>
+              </a:defRPr>
+            </a:lvl1pPr>
+            <a:lvl2pPr algn="r">
+              <a:defRPr sz="1050" b="1">
+                <a:solidFill>
+                  <a:srgbClr val="536170"/>
+                </a:solidFill>
+                <a:latin typeface="Arial"/>
+                <a:ea typeface="Arial"/>
+                <a:cs typeface="Arial"/>
+              </a:defRPr>
+            </a:lvl2pPr>
+            <a:lvl3pPr algn="r">
+              <a:defRPr sz="1050" b="1">
+                <a:solidFill>
+                  <a:srgbClr val="536170"/>
+                </a:solidFill>
+                <a:latin typeface="Arial"/>
+                <a:ea typeface="Arial"/>
+                <a:cs typeface="Arial"/>
+              </a:defRPr>
+            </a:lvl3pPr>
+            <a:lvl4pPr algn="r">
+              <a:defRPr sz="1050" b="1">
+                <a:solidFill>
+                  <a:srgbClr val="536170"/>
+                </a:solidFill>
+                <a:latin typeface="Arial"/>
+                <a:ea typeface="Arial"/>
+                <a:cs typeface="Arial"/>
+              </a:defRPr>
+            </a:lvl4pPr>
+            <a:lvl5pPr algn="r">
+              <a:defRPr sz="1050" b="1">
+                <a:solidFill>
+                  <a:srgbClr val="536170"/>
+                </a:solidFill>
+                <a:latin typeface="Arial"/>
+                <a:ea typeface="Arial"/>
+                <a:cs typeface="Arial"/>
+              </a:defRPr>
+            </a:lvl5pPr>
+            <a:lvl6pPr algn="r">
+              <a:defRPr sz="1050" b="1">
+                <a:solidFill>
+                  <a:srgbClr val="536170"/>
+                </a:solidFill>
+                <a:latin typeface="Arial"/>
+                <a:ea typeface="Arial"/>
+                <a:cs typeface="Arial"/>
+              </a:defRPr>
+            </a:lvl6pPr>
+            <a:lvl7pPr algn="r">
+              <a:defRPr sz="1050" b="1">
+                <a:solidFill>
+                  <a:srgbClr val="536170"/>
+                </a:solidFill>
+                <a:latin typeface="Arial"/>
+                <a:ea typeface="Arial"/>
+                <a:cs typeface="Arial"/>
+              </a:defRPr>
+            </a:lvl7pPr>
+            <a:lvl8pPr algn="r">
+              <a:defRPr sz="1050" b="1">
+                <a:solidFill>
+                  <a:srgbClr val="536170"/>
+                </a:solidFill>
+                <a:latin typeface="Arial"/>
+                <a:ea typeface="Arial"/>
+                <a:cs typeface="Arial"/>
+              </a:defRPr>
+            </a:lvl8pPr>
+            <a:lvl9pPr algn="r">
+              <a:defRPr sz="1050" b="1">
+                <a:solidFill>
+                  <a:srgbClr val="536170"/>
+                </a:solidFill>
+                <a:latin typeface="Arial"/>
+                <a:ea typeface="Arial"/>
+                <a:cs typeface="Arial"/>
+              </a:defRPr>
+            </a:lvl9pPr>
           </a:lstStyle>
           <a:p xmlns:a="http://schemas.openxmlformats.org/drawingml/2006/main">
             <a:pPr algn="r">
+              <a:buNone/>
               <a:defRPr sz="1050" b="1">
                 <a:solidFill>
                   <a:srgbClr val="536170"/>
@@ -6671,7 +11841,7 @@
       </p:sp>
       <p:sp>
         <p:nvSpPr>
-          <p:cNvPr id="4" name="">
+          <p:cNvPr id="4" name="Rectangle 3">
             <a:extLst xmlns:a="http://schemas.openxmlformats.org/drawingml/2006/main">
               <a:ext uri="{FF2B5EF4-FFF2-40B4-BE49-F238E27FC236}">
                 <a16:creationId xmlns:a16="http://schemas.microsoft.com/office/drawing/2014/main" id="{633BCC82-9C56-4FE4-81B7-0A0B37AC06D1}"/>
@@ -6712,9 +11882,100 @@
                 <a:cs typeface="Arial"/>
               </a:defRPr>
             </a:defPPr>
+            <a:lvl1pPr>
+              <a:defRPr sz="1125" b="1">
+                <a:solidFill>
+                  <a:srgbClr val="315BCE"/>
+                </a:solidFill>
+                <a:latin typeface="Arial"/>
+                <a:ea typeface="Arial"/>
+                <a:cs typeface="Arial"/>
+              </a:defRPr>
+            </a:lvl1pPr>
+            <a:lvl2pPr>
+              <a:defRPr sz="1125" b="1">
+                <a:solidFill>
+                  <a:srgbClr val="315BCE"/>
+                </a:solidFill>
+                <a:latin typeface="Arial"/>
+                <a:ea typeface="Arial"/>
+                <a:cs typeface="Arial"/>
+              </a:defRPr>
+            </a:lvl2pPr>
+            <a:lvl3pPr>
+              <a:defRPr sz="1125" b="1">
+                <a:solidFill>
+                  <a:srgbClr val="315BCE"/>
+                </a:solidFill>
+                <a:latin typeface="Arial"/>
+                <a:ea typeface="Arial"/>
+                <a:cs typeface="Arial"/>
+              </a:defRPr>
+            </a:lvl3pPr>
+            <a:lvl4pPr>
+              <a:defRPr sz="1125" b="1">
+                <a:solidFill>
+                  <a:srgbClr val="315BCE"/>
+                </a:solidFill>
+                <a:latin typeface="Arial"/>
+                <a:ea typeface="Arial"/>
+                <a:cs typeface="Arial"/>
+              </a:defRPr>
+            </a:lvl4pPr>
+            <a:lvl5pPr>
+              <a:defRPr sz="1125" b="1">
+                <a:solidFill>
+                  <a:srgbClr val="315BCE"/>
+                </a:solidFill>
+                <a:latin typeface="Arial"/>
+                <a:ea typeface="Arial"/>
+                <a:cs typeface="Arial"/>
+              </a:defRPr>
+            </a:lvl5pPr>
+            <a:lvl6pPr>
+              <a:defRPr sz="1125" b="1">
+                <a:solidFill>
+                  <a:srgbClr val="315BCE"/>
+                </a:solidFill>
+                <a:latin typeface="Arial"/>
+                <a:ea typeface="Arial"/>
+                <a:cs typeface="Arial"/>
+              </a:defRPr>
+            </a:lvl6pPr>
+            <a:lvl7pPr>
+              <a:defRPr sz="1125" b="1">
+                <a:solidFill>
+                  <a:srgbClr val="315BCE"/>
+                </a:solidFill>
+                <a:latin typeface="Arial"/>
+                <a:ea typeface="Arial"/>
+                <a:cs typeface="Arial"/>
+              </a:defRPr>
+            </a:lvl7pPr>
+            <a:lvl8pPr>
+              <a:defRPr sz="1125" b="1">
+                <a:solidFill>
+                  <a:srgbClr val="315BCE"/>
+                </a:solidFill>
+                <a:latin typeface="Arial"/>
+                <a:ea typeface="Arial"/>
+                <a:cs typeface="Arial"/>
+              </a:defRPr>
+            </a:lvl8pPr>
+            <a:lvl9pPr>
+              <a:defRPr sz="1125" b="1">
+                <a:solidFill>
+                  <a:srgbClr val="315BCE"/>
+                </a:solidFill>
+                <a:latin typeface="Arial"/>
+                <a:ea typeface="Arial"/>
+                <a:cs typeface="Arial"/>
+              </a:defRPr>
+            </a:lvl9pPr>
           </a:lstStyle>
           <a:p xmlns:a="http://schemas.openxmlformats.org/drawingml/2006/main">
             <a:pPr>
+              <a:buNone/>
               <a:defRPr sz="1125" b="1">
                 <a:solidFill>
                   <a:srgbClr val="315BCE"/>
@@ -6733,14 +11994,14 @@
                 <a:ea typeface="Arial"/>
                 <a:cs typeface="Arial"/>
               </a:rPr>
-              <a:t>PILOT DESIGN</a:t>
+              <a:t>ITEM SIGNAL</a:t>
             </a:r>
           </a:p>
         </p:txBody>
       </p:sp>
       <p:sp>
         <p:nvSpPr>
-          <p:cNvPr id="5" name="">
+          <p:cNvPr id="5" name="Rectangle 4">
             <a:extLst xmlns:a="http://schemas.openxmlformats.org/drawingml/2006/main">
               <a:ext uri="{FF2B5EF4-FFF2-40B4-BE49-F238E27FC236}">
                 <a16:creationId xmlns:a16="http://schemas.microsoft.com/office/drawing/2014/main" id="{4D4A667A-998F-4224-BE30-9B4FF8B28FD5}"/>
@@ -6768,7 +12029,7 @@
         </p:spPr>
         <p:txBody>
           <a:bodyPr xmlns:a="http://schemas.openxmlformats.org/drawingml/2006/main" wrap="square" lIns="0" tIns="0" rIns="0" bIns="0" anchor="ctr">
-            <a:normAutofit fontScale="95962"/>
+            <a:normAutofit fontScale="95238"/>
           </a:bodyPr>
           <a:lstStyle xmlns:a="http://schemas.openxmlformats.org/drawingml/2006/main">
             <a:defPPr>
@@ -6781,9 +12042,100 @@
                 <a:cs typeface="Arial"/>
               </a:defRPr>
             </a:defPPr>
+            <a:lvl1pPr>
+              <a:defRPr sz="2100" b="1">
+                <a:solidFill>
+                  <a:srgbClr val="16202B"/>
+                </a:solidFill>
+                <a:latin typeface="Arial"/>
+                <a:ea typeface="Arial"/>
+                <a:cs typeface="Arial"/>
+              </a:defRPr>
+            </a:lvl1pPr>
+            <a:lvl2pPr>
+              <a:defRPr sz="2100" b="1">
+                <a:solidFill>
+                  <a:srgbClr val="16202B"/>
+                </a:solidFill>
+                <a:latin typeface="Arial"/>
+                <a:ea typeface="Arial"/>
+                <a:cs typeface="Arial"/>
+              </a:defRPr>
+            </a:lvl2pPr>
+            <a:lvl3pPr>
+              <a:defRPr sz="2100" b="1">
+                <a:solidFill>
+                  <a:srgbClr val="16202B"/>
+                </a:solidFill>
+                <a:latin typeface="Arial"/>
+                <a:ea typeface="Arial"/>
+                <a:cs typeface="Arial"/>
+              </a:defRPr>
+            </a:lvl3pPr>
+            <a:lvl4pPr>
+              <a:defRPr sz="2100" b="1">
+                <a:solidFill>
+                  <a:srgbClr val="16202B"/>
+                </a:solidFill>
+                <a:latin typeface="Arial"/>
+                <a:ea typeface="Arial"/>
+                <a:cs typeface="Arial"/>
+              </a:defRPr>
+            </a:lvl4pPr>
+            <a:lvl5pPr>
+              <a:defRPr sz="2100" b="1">
+                <a:solidFill>
+                  <a:srgbClr val="16202B"/>
+                </a:solidFill>
+                <a:latin typeface="Arial"/>
+                <a:ea typeface="Arial"/>
+                <a:cs typeface="Arial"/>
+              </a:defRPr>
+            </a:lvl5pPr>
+            <a:lvl6pPr>
+              <a:defRPr sz="2100" b="1">
+                <a:solidFill>
+                  <a:srgbClr val="16202B"/>
+                </a:solidFill>
+                <a:latin typeface="Arial"/>
+                <a:ea typeface="Arial"/>
+                <a:cs typeface="Arial"/>
+              </a:defRPr>
+            </a:lvl6pPr>
+            <a:lvl7pPr>
+              <a:defRPr sz="2100" b="1">
+                <a:solidFill>
+                  <a:srgbClr val="16202B"/>
+                </a:solidFill>
+                <a:latin typeface="Arial"/>
+                <a:ea typeface="Arial"/>
+                <a:cs typeface="Arial"/>
+              </a:defRPr>
+            </a:lvl7pPr>
+            <a:lvl8pPr>
+              <a:defRPr sz="2100" b="1">
+                <a:solidFill>
+                  <a:srgbClr val="16202B"/>
+                </a:solidFill>
+                <a:latin typeface="Arial"/>
+                <a:ea typeface="Arial"/>
+                <a:cs typeface="Arial"/>
+              </a:defRPr>
+            </a:lvl8pPr>
+            <a:lvl9pPr>
+              <a:defRPr sz="2100" b="1">
+                <a:solidFill>
+                  <a:srgbClr val="16202B"/>
+                </a:solidFill>
+                <a:latin typeface="Arial"/>
+                <a:ea typeface="Arial"/>
+                <a:cs typeface="Arial"/>
+              </a:defRPr>
+            </a:lvl9pPr>
           </a:lstStyle>
           <a:p xmlns:a="http://schemas.openxmlformats.org/drawingml/2006/main">
             <a:pPr>
+              <a:buNone/>
               <a:defRPr sz="2100" b="1">
                 <a:solidFill>
                   <a:srgbClr val="16202B"/>
@@ -6802,14 +12154,14 @@
                 <a:ea typeface="Arial"/>
                 <a:cs typeface="Arial"/>
               </a:rPr>
-              <a:t>Randomly hold out eligible shoppers.</a:t>
+              <a:t>Rank repeat items with overdue shoppers.</a:t>
             </a:r>
           </a:p>
         </p:txBody>
       </p:sp>
       <p:sp>
         <p:nvSpPr>
-          <p:cNvPr id="6" name="">
+          <p:cNvPr id="6" name="Rectangle 5">
             <a:extLst xmlns:a="http://schemas.openxmlformats.org/drawingml/2006/main">
               <a:ext uri="{FF2B5EF4-FFF2-40B4-BE49-F238E27FC236}">
                 <a16:creationId xmlns:a16="http://schemas.microsoft.com/office/drawing/2014/main" id="{57089AAE-3B60-4091-B031-57A8DA488353}"/>
@@ -6850,9 +12202,100 @@
                 <a:cs typeface="Arial"/>
               </a:defRPr>
             </a:defPPr>
+            <a:lvl1pPr>
+              <a:defRPr sz="1725" b="0">
+                <a:solidFill>
+                  <a:srgbClr val="536170"/>
+                </a:solidFill>
+                <a:latin typeface="Arial"/>
+                <a:ea typeface="Arial"/>
+                <a:cs typeface="Arial"/>
+              </a:defRPr>
+            </a:lvl1pPr>
+            <a:lvl2pPr>
+              <a:defRPr sz="1725" b="0">
+                <a:solidFill>
+                  <a:srgbClr val="536170"/>
+                </a:solidFill>
+                <a:latin typeface="Arial"/>
+                <a:ea typeface="Arial"/>
+                <a:cs typeface="Arial"/>
+              </a:defRPr>
+            </a:lvl2pPr>
+            <a:lvl3pPr>
+              <a:defRPr sz="1725" b="0">
+                <a:solidFill>
+                  <a:srgbClr val="536170"/>
+                </a:solidFill>
+                <a:latin typeface="Arial"/>
+                <a:ea typeface="Arial"/>
+                <a:cs typeface="Arial"/>
+              </a:defRPr>
+            </a:lvl3pPr>
+            <a:lvl4pPr>
+              <a:defRPr sz="1725" b="0">
+                <a:solidFill>
+                  <a:srgbClr val="536170"/>
+                </a:solidFill>
+                <a:latin typeface="Arial"/>
+                <a:ea typeface="Arial"/>
+                <a:cs typeface="Arial"/>
+              </a:defRPr>
+            </a:lvl4pPr>
+            <a:lvl5pPr>
+              <a:defRPr sz="1725" b="0">
+                <a:solidFill>
+                  <a:srgbClr val="536170"/>
+                </a:solidFill>
+                <a:latin typeface="Arial"/>
+                <a:ea typeface="Arial"/>
+                <a:cs typeface="Arial"/>
+              </a:defRPr>
+            </a:lvl5pPr>
+            <a:lvl6pPr>
+              <a:defRPr sz="1725" b="0">
+                <a:solidFill>
+                  <a:srgbClr val="536170"/>
+                </a:solidFill>
+                <a:latin typeface="Arial"/>
+                <a:ea typeface="Arial"/>
+                <a:cs typeface="Arial"/>
+              </a:defRPr>
+            </a:lvl6pPr>
+            <a:lvl7pPr>
+              <a:defRPr sz="1725" b="0">
+                <a:solidFill>
+                  <a:srgbClr val="536170"/>
+                </a:solidFill>
+                <a:latin typeface="Arial"/>
+                <a:ea typeface="Arial"/>
+                <a:cs typeface="Arial"/>
+              </a:defRPr>
+            </a:lvl7pPr>
+            <a:lvl8pPr>
+              <a:defRPr sz="1725" b="0">
+                <a:solidFill>
+                  <a:srgbClr val="536170"/>
+                </a:solidFill>
+                <a:latin typeface="Arial"/>
+                <a:ea typeface="Arial"/>
+                <a:cs typeface="Arial"/>
+              </a:defRPr>
+            </a:lvl8pPr>
+            <a:lvl9pPr>
+              <a:defRPr sz="1725" b="0">
+                <a:solidFill>
+                  <a:srgbClr val="536170"/>
+                </a:solidFill>
+                <a:latin typeface="Arial"/>
+                <a:ea typeface="Arial"/>
+                <a:cs typeface="Arial"/>
+              </a:defRPr>
+            </a:lvl9pPr>
           </a:lstStyle>
           <a:p xmlns:a="http://schemas.openxmlformats.org/drawingml/2006/main">
             <a:pPr>
+              <a:buNone/>
               <a:defRPr sz="1725" b="0">
                 <a:solidFill>
                   <a:srgbClr val="536170"/>
@@ -6871,14 +12314,14 @@
                 <a:ea typeface="Arial"/>
                 <a:cs typeface="Arial"/>
               </a:rPr>
-              <a:t>Compare 30-day repeat purchase and gross margin between contacted and holdout groups.</a:t>
+              <a:t>Show the typical repeat interval and median lateness. Open matching shoppers to inspect their purchase evidence.</a:t>
             </a:r>
           </a:p>
         </p:txBody>
       </p:sp>
       <p:sp>
         <p:nvSpPr>
-          <p:cNvPr id="7" name="">
+          <p:cNvPr id="7" name="Rectangle 6">
             <a:extLst xmlns:a="http://schemas.openxmlformats.org/drawingml/2006/main">
               <a:ext uri="{FF2B5EF4-FFF2-40B4-BE49-F238E27FC236}">
                 <a16:creationId xmlns:a16="http://schemas.microsoft.com/office/drawing/2014/main" id="{FA8B0AEF-A310-4AC1-86F5-BF8C1C5B5641}"/>
@@ -6906,7 +12349,7 @@
         </p:spPr>
         <p:txBody>
           <a:bodyPr xmlns:a="http://schemas.openxmlformats.org/drawingml/2006/main" wrap="square" lIns="0" tIns="0" rIns="0" bIns="0" anchor="ctr">
-            <a:normAutofit fontScale="100000"/>
+            <a:normAutofit/>
           </a:bodyPr>
           <a:lstStyle xmlns:a="http://schemas.openxmlformats.org/drawingml/2006/main">
             <a:defPPr>
@@ -6919,9 +12362,100 @@
                 <a:cs typeface="Arial"/>
               </a:defRPr>
             </a:defPPr>
+            <a:lvl1pPr>
+              <a:defRPr sz="1125" b="1">
+                <a:solidFill>
+                  <a:srgbClr val="315BCE"/>
+                </a:solidFill>
+                <a:latin typeface="Arial"/>
+                <a:ea typeface="Arial"/>
+                <a:cs typeface="Arial"/>
+              </a:defRPr>
+            </a:lvl1pPr>
+            <a:lvl2pPr>
+              <a:defRPr sz="1125" b="1">
+                <a:solidFill>
+                  <a:srgbClr val="315BCE"/>
+                </a:solidFill>
+                <a:latin typeface="Arial"/>
+                <a:ea typeface="Arial"/>
+                <a:cs typeface="Arial"/>
+              </a:defRPr>
+            </a:lvl2pPr>
+            <a:lvl3pPr>
+              <a:defRPr sz="1125" b="1">
+                <a:solidFill>
+                  <a:srgbClr val="315BCE"/>
+                </a:solidFill>
+                <a:latin typeface="Arial"/>
+                <a:ea typeface="Arial"/>
+                <a:cs typeface="Arial"/>
+              </a:defRPr>
+            </a:lvl3pPr>
+            <a:lvl4pPr>
+              <a:defRPr sz="1125" b="1">
+                <a:solidFill>
+                  <a:srgbClr val="315BCE"/>
+                </a:solidFill>
+                <a:latin typeface="Arial"/>
+                <a:ea typeface="Arial"/>
+                <a:cs typeface="Arial"/>
+              </a:defRPr>
+            </a:lvl4pPr>
+            <a:lvl5pPr>
+              <a:defRPr sz="1125" b="1">
+                <a:solidFill>
+                  <a:srgbClr val="315BCE"/>
+                </a:solidFill>
+                <a:latin typeface="Arial"/>
+                <a:ea typeface="Arial"/>
+                <a:cs typeface="Arial"/>
+              </a:defRPr>
+            </a:lvl5pPr>
+            <a:lvl6pPr>
+              <a:defRPr sz="1125" b="1">
+                <a:solidFill>
+                  <a:srgbClr val="315BCE"/>
+                </a:solidFill>
+                <a:latin typeface="Arial"/>
+                <a:ea typeface="Arial"/>
+                <a:cs typeface="Arial"/>
+              </a:defRPr>
+            </a:lvl6pPr>
+            <a:lvl7pPr>
+              <a:defRPr sz="1125" b="1">
+                <a:solidFill>
+                  <a:srgbClr val="315BCE"/>
+                </a:solidFill>
+                <a:latin typeface="Arial"/>
+                <a:ea typeface="Arial"/>
+                <a:cs typeface="Arial"/>
+              </a:defRPr>
+            </a:lvl7pPr>
+            <a:lvl8pPr>
+              <a:defRPr sz="1125" b="1">
+                <a:solidFill>
+                  <a:srgbClr val="315BCE"/>
+                </a:solidFill>
+                <a:latin typeface="Arial"/>
+                <a:ea typeface="Arial"/>
+                <a:cs typeface="Arial"/>
+              </a:defRPr>
+            </a:lvl8pPr>
+            <a:lvl9pPr>
+              <a:defRPr sz="1125" b="1">
+                <a:solidFill>
+                  <a:srgbClr val="315BCE"/>
+                </a:solidFill>
+                <a:latin typeface="Arial"/>
+                <a:ea typeface="Arial"/>
+                <a:cs typeface="Arial"/>
+              </a:defRPr>
+            </a:lvl9pPr>
           </a:lstStyle>
           <a:p xmlns:a="http://schemas.openxmlformats.org/drawingml/2006/main">
             <a:pPr>
+              <a:buNone/>
               <a:defRPr sz="1125" b="1">
                 <a:solidFill>
                   <a:srgbClr val="315BCE"/>
@@ -6947,7 +12481,7 @@
       </p:sp>
       <p:sp>
         <p:nvSpPr>
-          <p:cNvPr id="8" name="">
+          <p:cNvPr id="8" name="Rectangle 7">
             <a:extLst xmlns:a="http://schemas.openxmlformats.org/drawingml/2006/main">
               <a:ext uri="{FF2B5EF4-FFF2-40B4-BE49-F238E27FC236}">
                 <a16:creationId xmlns:a16="http://schemas.microsoft.com/office/drawing/2014/main" id="{DD448F75-F183-4E5E-9645-1391027D2D52}"/>
@@ -6988,9 +12522,100 @@
                 <a:cs typeface="Arial"/>
               </a:defRPr>
             </a:defPPr>
+            <a:lvl1pPr>
+              <a:defRPr sz="1875" b="1">
+                <a:solidFill>
+                  <a:srgbClr val="16202B"/>
+                </a:solidFill>
+                <a:latin typeface="Arial"/>
+                <a:ea typeface="Arial"/>
+                <a:cs typeface="Arial"/>
+              </a:defRPr>
+            </a:lvl1pPr>
+            <a:lvl2pPr>
+              <a:defRPr sz="1875" b="1">
+                <a:solidFill>
+                  <a:srgbClr val="16202B"/>
+                </a:solidFill>
+                <a:latin typeface="Arial"/>
+                <a:ea typeface="Arial"/>
+                <a:cs typeface="Arial"/>
+              </a:defRPr>
+            </a:lvl2pPr>
+            <a:lvl3pPr>
+              <a:defRPr sz="1875" b="1">
+                <a:solidFill>
+                  <a:srgbClr val="16202B"/>
+                </a:solidFill>
+                <a:latin typeface="Arial"/>
+                <a:ea typeface="Arial"/>
+                <a:cs typeface="Arial"/>
+              </a:defRPr>
+            </a:lvl3pPr>
+            <a:lvl4pPr>
+              <a:defRPr sz="1875" b="1">
+                <a:solidFill>
+                  <a:srgbClr val="16202B"/>
+                </a:solidFill>
+                <a:latin typeface="Arial"/>
+                <a:ea typeface="Arial"/>
+                <a:cs typeface="Arial"/>
+              </a:defRPr>
+            </a:lvl4pPr>
+            <a:lvl5pPr>
+              <a:defRPr sz="1875" b="1">
+                <a:solidFill>
+                  <a:srgbClr val="16202B"/>
+                </a:solidFill>
+                <a:latin typeface="Arial"/>
+                <a:ea typeface="Arial"/>
+                <a:cs typeface="Arial"/>
+              </a:defRPr>
+            </a:lvl5pPr>
+            <a:lvl6pPr>
+              <a:defRPr sz="1875" b="1">
+                <a:solidFill>
+                  <a:srgbClr val="16202B"/>
+                </a:solidFill>
+                <a:latin typeface="Arial"/>
+                <a:ea typeface="Arial"/>
+                <a:cs typeface="Arial"/>
+              </a:defRPr>
+            </a:lvl6pPr>
+            <a:lvl7pPr>
+              <a:defRPr sz="1875" b="1">
+                <a:solidFill>
+                  <a:srgbClr val="16202B"/>
+                </a:solidFill>
+                <a:latin typeface="Arial"/>
+                <a:ea typeface="Arial"/>
+                <a:cs typeface="Arial"/>
+              </a:defRPr>
+            </a:lvl7pPr>
+            <a:lvl8pPr>
+              <a:defRPr sz="1875" b="1">
+                <a:solidFill>
+                  <a:srgbClr val="16202B"/>
+                </a:solidFill>
+                <a:latin typeface="Arial"/>
+                <a:ea typeface="Arial"/>
+                <a:cs typeface="Arial"/>
+              </a:defRPr>
+            </a:lvl8pPr>
+            <a:lvl9pPr>
+              <a:defRPr sz="1875" b="1">
+                <a:solidFill>
+                  <a:srgbClr val="16202B"/>
+                </a:solidFill>
+                <a:latin typeface="Arial"/>
+                <a:ea typeface="Arial"/>
+                <a:cs typeface="Arial"/>
+              </a:defRPr>
+            </a:lvl9pPr>
           </a:lstStyle>
           <a:p xmlns:a="http://schemas.openxmlformats.org/drawingml/2006/main">
             <a:pPr>
+              <a:buNone/>
               <a:defRPr sz="1875" b="1">
                 <a:solidFill>
                   <a:srgbClr val="16202B"/>
@@ -7009,14 +12634,14 @@
                 <a:ea typeface="Arial"/>
                 <a:cs typeface="Arial"/>
               </a:rPr>
-              <a:t>The prototype supports the workflow. Campaign results have not been measured.</a:t>
+              <a:t>A practical shortlist from historical purchase patterns. Merchants decide which shoppers merit follow-up.</a:t>
             </a:r>
           </a:p>
         </p:txBody>
       </p:sp>
       <p:sp>
         <p:nvSpPr>
-          <p:cNvPr id="9" name="">
+          <p:cNvPr id="9" name="Straight Connector 8">
             <a:extLst xmlns:a="http://schemas.openxmlformats.org/drawingml/2006/main">
               <a:ext uri="{FF2B5EF4-FFF2-40B4-BE49-F238E27FC236}">
                 <a16:creationId xmlns:a16="http://schemas.microsoft.com/office/drawing/2014/main" id="{1D2F1664-EEE9-4D00-AAA0-E429BBA0F08A}"/>
@@ -7043,10 +12668,17 @@
             <a:prstDash val="solid"/>
           </a:ln>
         </p:spPr>
+        <p:txBody>
+          <a:bodyPr xmlns:a="http://schemas.openxmlformats.org/drawingml/2006/main"/>
+          <a:lstStyle xmlns:a="http://schemas.openxmlformats.org/drawingml/2006/main"/>
+          <a:p xmlns:a="http://schemas.openxmlformats.org/drawingml/2006/main">
+            <a:endParaRPr/>
+          </a:p>
+        </p:txBody>
       </p:sp>
       <p:sp>
         <p:nvSpPr>
-          <p:cNvPr id="10" name="">
+          <p:cNvPr id="10" name="Rectangle 9">
             <a:extLst xmlns:a="http://schemas.openxmlformats.org/drawingml/2006/main">
               <a:ext uri="{FF2B5EF4-FFF2-40B4-BE49-F238E27FC236}">
                 <a16:creationId xmlns:a16="http://schemas.microsoft.com/office/drawing/2014/main" id="{D36AF5B4-63F2-4154-9C19-BF9D4B7B3D69}"/>
@@ -7074,7 +12706,7 @@
         </p:spPr>
         <p:txBody>
           <a:bodyPr xmlns:a="http://schemas.openxmlformats.org/drawingml/2006/main" wrap="square" lIns="0" tIns="0" rIns="0" bIns="0" anchor="ctr">
-            <a:normAutofit fontScale="100000"/>
+            <a:normAutofit/>
           </a:bodyPr>
           <a:lstStyle xmlns:a="http://schemas.openxmlformats.org/drawingml/2006/main">
             <a:defPPr>
@@ -7087,9 +12719,100 @@
                 <a:cs typeface="Arial"/>
               </a:defRPr>
             </a:defPPr>
+            <a:lvl1pPr>
+              <a:defRPr sz="1125" b="1">
+                <a:solidFill>
+                  <a:srgbClr val="287A63"/>
+                </a:solidFill>
+                <a:latin typeface="Arial"/>
+                <a:ea typeface="Arial"/>
+                <a:cs typeface="Arial"/>
+              </a:defRPr>
+            </a:lvl1pPr>
+            <a:lvl2pPr>
+              <a:defRPr sz="1125" b="1">
+                <a:solidFill>
+                  <a:srgbClr val="287A63"/>
+                </a:solidFill>
+                <a:latin typeface="Arial"/>
+                <a:ea typeface="Arial"/>
+                <a:cs typeface="Arial"/>
+              </a:defRPr>
+            </a:lvl2pPr>
+            <a:lvl3pPr>
+              <a:defRPr sz="1125" b="1">
+                <a:solidFill>
+                  <a:srgbClr val="287A63"/>
+                </a:solidFill>
+                <a:latin typeface="Arial"/>
+                <a:ea typeface="Arial"/>
+                <a:cs typeface="Arial"/>
+              </a:defRPr>
+            </a:lvl3pPr>
+            <a:lvl4pPr>
+              <a:defRPr sz="1125" b="1">
+                <a:solidFill>
+                  <a:srgbClr val="287A63"/>
+                </a:solidFill>
+                <a:latin typeface="Arial"/>
+                <a:ea typeface="Arial"/>
+                <a:cs typeface="Arial"/>
+              </a:defRPr>
+            </a:lvl4pPr>
+            <a:lvl5pPr>
+              <a:defRPr sz="1125" b="1">
+                <a:solidFill>
+                  <a:srgbClr val="287A63"/>
+                </a:solidFill>
+                <a:latin typeface="Arial"/>
+                <a:ea typeface="Arial"/>
+                <a:cs typeface="Arial"/>
+              </a:defRPr>
+            </a:lvl5pPr>
+            <a:lvl6pPr>
+              <a:defRPr sz="1125" b="1">
+                <a:solidFill>
+                  <a:srgbClr val="287A63"/>
+                </a:solidFill>
+                <a:latin typeface="Arial"/>
+                <a:ea typeface="Arial"/>
+                <a:cs typeface="Arial"/>
+              </a:defRPr>
+            </a:lvl6pPr>
+            <a:lvl7pPr>
+              <a:defRPr sz="1125" b="1">
+                <a:solidFill>
+                  <a:srgbClr val="287A63"/>
+                </a:solidFill>
+                <a:latin typeface="Arial"/>
+                <a:ea typeface="Arial"/>
+                <a:cs typeface="Arial"/>
+              </a:defRPr>
+            </a:lvl7pPr>
+            <a:lvl8pPr>
+              <a:defRPr sz="1125" b="1">
+                <a:solidFill>
+                  <a:srgbClr val="287A63"/>
+                </a:solidFill>
+                <a:latin typeface="Arial"/>
+                <a:ea typeface="Arial"/>
+                <a:cs typeface="Arial"/>
+              </a:defRPr>
+            </a:lvl8pPr>
+            <a:lvl9pPr>
+              <a:defRPr sz="1125" b="1">
+                <a:solidFill>
+                  <a:srgbClr val="287A63"/>
+                </a:solidFill>
+                <a:latin typeface="Arial"/>
+                <a:ea typeface="Arial"/>
+                <a:cs typeface="Arial"/>
+              </a:defRPr>
+            </a:lvl9pPr>
           </a:lstStyle>
           <a:p xmlns:a="http://schemas.openxmlformats.org/drawingml/2006/main">
             <a:pPr>
+              <a:buNone/>
               <a:defRPr sz="1125" b="1">
                 <a:solidFill>
                   <a:srgbClr val="287A63"/>
@@ -7115,7 +12838,7 @@
       </p:sp>
       <p:sp>
         <p:nvSpPr>
-          <p:cNvPr id="11" name="">
+          <p:cNvPr id="11" name="Rectangle 10">
             <a:extLst xmlns:a="http://schemas.openxmlformats.org/drawingml/2006/main">
               <a:ext uri="{FF2B5EF4-FFF2-40B4-BE49-F238E27FC236}">
                 <a16:creationId xmlns:a16="http://schemas.microsoft.com/office/drawing/2014/main" id="{ADFAD776-CDE6-4BC7-A87E-19324F1E437D}"/>
@@ -7143,7 +12866,7 @@
         </p:spPr>
         <p:txBody>
           <a:bodyPr xmlns:a="http://schemas.openxmlformats.org/drawingml/2006/main" wrap="square" lIns="0" tIns="0" rIns="0" bIns="0" anchor="ctr">
-            <a:normAutofit fontScale="100000"/>
+            <a:normAutofit/>
           </a:bodyPr>
           <a:lstStyle xmlns:a="http://schemas.openxmlformats.org/drawingml/2006/main">
             <a:defPPr>
@@ -7156,9 +12879,100 @@
                 <a:cs typeface="Arial"/>
               </a:defRPr>
             </a:defPPr>
+            <a:lvl1pPr>
+              <a:defRPr sz="1500" b="1">
+                <a:solidFill>
+                  <a:srgbClr val="16202B"/>
+                </a:solidFill>
+                <a:latin typeface="Arial"/>
+                <a:ea typeface="Arial"/>
+                <a:cs typeface="Arial"/>
+              </a:defRPr>
+            </a:lvl1pPr>
+            <a:lvl2pPr>
+              <a:defRPr sz="1500" b="1">
+                <a:solidFill>
+                  <a:srgbClr val="16202B"/>
+                </a:solidFill>
+                <a:latin typeface="Arial"/>
+                <a:ea typeface="Arial"/>
+                <a:cs typeface="Arial"/>
+              </a:defRPr>
+            </a:lvl2pPr>
+            <a:lvl3pPr>
+              <a:defRPr sz="1500" b="1">
+                <a:solidFill>
+                  <a:srgbClr val="16202B"/>
+                </a:solidFill>
+                <a:latin typeface="Arial"/>
+                <a:ea typeface="Arial"/>
+                <a:cs typeface="Arial"/>
+              </a:defRPr>
+            </a:lvl3pPr>
+            <a:lvl4pPr>
+              <a:defRPr sz="1500" b="1">
+                <a:solidFill>
+                  <a:srgbClr val="16202B"/>
+                </a:solidFill>
+                <a:latin typeface="Arial"/>
+                <a:ea typeface="Arial"/>
+                <a:cs typeface="Arial"/>
+              </a:defRPr>
+            </a:lvl4pPr>
+            <a:lvl5pPr>
+              <a:defRPr sz="1500" b="1">
+                <a:solidFill>
+                  <a:srgbClr val="16202B"/>
+                </a:solidFill>
+                <a:latin typeface="Arial"/>
+                <a:ea typeface="Arial"/>
+                <a:cs typeface="Arial"/>
+              </a:defRPr>
+            </a:lvl5pPr>
+            <a:lvl6pPr>
+              <a:defRPr sz="1500" b="1">
+                <a:solidFill>
+                  <a:srgbClr val="16202B"/>
+                </a:solidFill>
+                <a:latin typeface="Arial"/>
+                <a:ea typeface="Arial"/>
+                <a:cs typeface="Arial"/>
+              </a:defRPr>
+            </a:lvl6pPr>
+            <a:lvl7pPr>
+              <a:defRPr sz="1500" b="1">
+                <a:solidFill>
+                  <a:srgbClr val="16202B"/>
+                </a:solidFill>
+                <a:latin typeface="Arial"/>
+                <a:ea typeface="Arial"/>
+                <a:cs typeface="Arial"/>
+              </a:defRPr>
+            </a:lvl7pPr>
+            <a:lvl8pPr>
+              <a:defRPr sz="1500" b="1">
+                <a:solidFill>
+                  <a:srgbClr val="16202B"/>
+                </a:solidFill>
+                <a:latin typeface="Arial"/>
+                <a:ea typeface="Arial"/>
+                <a:cs typeface="Arial"/>
+              </a:defRPr>
+            </a:lvl8pPr>
+            <a:lvl9pPr>
+              <a:defRPr sz="1500" b="1">
+                <a:solidFill>
+                  <a:srgbClr val="16202B"/>
+                </a:solidFill>
+                <a:latin typeface="Arial"/>
+                <a:ea typeface="Arial"/>
+                <a:cs typeface="Arial"/>
+              </a:defRPr>
+            </a:lvl9pPr>
           </a:lstStyle>
           <a:p xmlns:a="http://schemas.openxmlformats.org/drawingml/2006/main">
             <a:pPr>
+              <a:buNone/>
               <a:defRPr sz="1500" b="1">
                 <a:solidFill>
                   <a:srgbClr val="16202B"/>
@@ -7184,7 +12998,7 @@
       </p:sp>
       <p:sp>
         <p:nvSpPr>
-          <p:cNvPr id="12" name="">
+          <p:cNvPr id="12" name="Rectangle 11">
             <a:extLst xmlns:a="http://schemas.openxmlformats.org/drawingml/2006/main">
               <a:ext uri="{FF2B5EF4-FFF2-40B4-BE49-F238E27FC236}">
                 <a16:creationId xmlns:a16="http://schemas.microsoft.com/office/drawing/2014/main" id="{343CA87A-415F-4FBD-9C36-B9F8BD4CB4EA}"/>
@@ -7225,9 +13039,100 @@
                 <a:cs typeface="Arial"/>
               </a:defRPr>
             </a:defPPr>
+            <a:lvl1pPr>
+              <a:defRPr sz="1275" b="0">
+                <a:solidFill>
+                  <a:srgbClr val="536170"/>
+                </a:solidFill>
+                <a:latin typeface="Arial"/>
+                <a:ea typeface="Arial"/>
+                <a:cs typeface="Arial"/>
+              </a:defRPr>
+            </a:lvl1pPr>
+            <a:lvl2pPr>
+              <a:defRPr sz="1275" b="0">
+                <a:solidFill>
+                  <a:srgbClr val="536170"/>
+                </a:solidFill>
+                <a:latin typeface="Arial"/>
+                <a:ea typeface="Arial"/>
+                <a:cs typeface="Arial"/>
+              </a:defRPr>
+            </a:lvl2pPr>
+            <a:lvl3pPr>
+              <a:defRPr sz="1275" b="0">
+                <a:solidFill>
+                  <a:srgbClr val="536170"/>
+                </a:solidFill>
+                <a:latin typeface="Arial"/>
+                <a:ea typeface="Arial"/>
+                <a:cs typeface="Arial"/>
+              </a:defRPr>
+            </a:lvl3pPr>
+            <a:lvl4pPr>
+              <a:defRPr sz="1275" b="0">
+                <a:solidFill>
+                  <a:srgbClr val="536170"/>
+                </a:solidFill>
+                <a:latin typeface="Arial"/>
+                <a:ea typeface="Arial"/>
+                <a:cs typeface="Arial"/>
+              </a:defRPr>
+            </a:lvl4pPr>
+            <a:lvl5pPr>
+              <a:defRPr sz="1275" b="0">
+                <a:solidFill>
+                  <a:srgbClr val="536170"/>
+                </a:solidFill>
+                <a:latin typeface="Arial"/>
+                <a:ea typeface="Arial"/>
+                <a:cs typeface="Arial"/>
+              </a:defRPr>
+            </a:lvl5pPr>
+            <a:lvl6pPr>
+              <a:defRPr sz="1275" b="0">
+                <a:solidFill>
+                  <a:srgbClr val="536170"/>
+                </a:solidFill>
+                <a:latin typeface="Arial"/>
+                <a:ea typeface="Arial"/>
+                <a:cs typeface="Arial"/>
+              </a:defRPr>
+            </a:lvl6pPr>
+            <a:lvl7pPr>
+              <a:defRPr sz="1275" b="0">
+                <a:solidFill>
+                  <a:srgbClr val="536170"/>
+                </a:solidFill>
+                <a:latin typeface="Arial"/>
+                <a:ea typeface="Arial"/>
+                <a:cs typeface="Arial"/>
+              </a:defRPr>
+            </a:lvl7pPr>
+            <a:lvl8pPr>
+              <a:defRPr sz="1275" b="0">
+                <a:solidFill>
+                  <a:srgbClr val="536170"/>
+                </a:solidFill>
+                <a:latin typeface="Arial"/>
+                <a:ea typeface="Arial"/>
+                <a:cs typeface="Arial"/>
+              </a:defRPr>
+            </a:lvl8pPr>
+            <a:lvl9pPr>
+              <a:defRPr sz="1275" b="0">
+                <a:solidFill>
+                  <a:srgbClr val="536170"/>
+                </a:solidFill>
+                <a:latin typeface="Arial"/>
+                <a:ea typeface="Arial"/>
+                <a:cs typeface="Arial"/>
+              </a:defRPr>
+            </a:lvl9pPr>
           </a:lstStyle>
           <a:p xmlns:a="http://schemas.openxmlformats.org/drawingml/2006/main">
             <a:pPr>
+              <a:buNone/>
               <a:defRPr sz="1275" b="0">
                 <a:solidFill>
                   <a:srgbClr val="536170"/>
@@ -7246,7 +13151,7 @@
                 <a:ea typeface="Arial"/>
                 <a:cs typeface="Arial"/>
               </a:rPr>
-              <a:t>AMD Radeon RX 9070 XT acceleration must be shown during the demo; GPU offload is not yet verified.</a:t>
+              <a:t>GPU offload on the AMD Radeon RX 9070 XT has not been verified.</a:t>
             </a:r>
           </a:p>
         </p:txBody>
